--- a/decks/under-construction-lesson-v2.pptx
+++ b/decks/under-construction-lesson-v2.pptx
@@ -16,6 +16,7 @@
     <p:sldId id="264" r:id="rId16"/>
     <p:sldId id="265" r:id="rId17"/>
     <p:sldId id="266" r:id="rId18"/>
+    <p:sldId id="267" r:id="rId19"/>
   </p:sldIdLst>
   <p:sldSz cx="12192000" cy="6858000" type="screen4x3"/>
   <p:notesSz cx="6858000" cy="9144000"/>
@@ -512,7 +513,7 @@
           <a:lstStyle/>
           <a:p>
             <a:r>
-              <a:t>This page and the next three are hidden. They stay in the deck for you and are skipped when you present.</a:t>
+              <a:t>This page is hidden and skipped when you present. The full plan, care notes and research are on the hidden pages at the end of the deck, if you want them.</a:t>
             </a:r>
           </a:p>
         </p:txBody>
@@ -1003,6 +1004,76 @@
           <a:p>
             <a:r>
               <a:t>2 MINUTES. Private, on the card. Other options from the student page: name three values you can steer by, follow something new on purpose, or find one place to be all of you. Share the student page link (post it on your advisory page too). It has the four places to be, the moves, a private check-in, and who to talk to. Remind students that being harassed or outed, or feeling you have to hide who you are everywhere, is a reason to talk to a counselor today. The Trevor Project and 988 are on the page.</a:t>
+            </a:r>
+          </a:p>
+        </p:txBody>
+      </p:sp>
+      <p:sp>
+        <p:nvSpPr>
+          <p:cNvPr id="4" name="Slide Number Placeholder 3"/>
+          <p:cNvSpPr>
+            <a:spLocks noGrp="1"/>
+          </p:cNvSpPr>
+          <p:nvPr>
+            <p:ph type="sldNum" idx="5" sz="quarter"/>
+          </p:nvPr>
+        </p:nvSpPr>
+        <p:spPr/>
+      </p:sp>
+    </p:spTree>
+  </p:cSld>
+  <p:clrMapOvr>
+    <a:masterClrMapping/>
+  </p:clrMapOvr>
+</p:notes>
+</file>
+
+<file path=ppt/notesSlides/notesSlide9.xml><?xml version="1.0" encoding="utf-8"?>
+<p:notes xmlns:a="http://schemas.openxmlformats.org/drawingml/2006/main" xmlns:p="http://schemas.openxmlformats.org/presentationml/2006/main" xmlns:r="http://schemas.openxmlformats.org/officeDocument/2006/relationships">
+  <p:cSld>
+    <p:spTree>
+      <p:nvGrpSpPr>
+        <p:cNvPr id="1" name=""/>
+        <p:cNvGrpSpPr/>
+        <p:nvPr/>
+      </p:nvGrpSpPr>
+      <p:grpSpPr>
+        <a:xfrm>
+          <a:off x="0" y="0"/>
+          <a:ext cx="0" cy="0"/>
+          <a:chOff x="0" y="0"/>
+          <a:chExt cx="0" cy="0"/>
+        </a:xfrm>
+      </p:grpSpPr>
+      <p:sp>
+        <p:nvSpPr>
+          <p:cNvPr id="2" name="Slide Image Placeholder 1"/>
+          <p:cNvSpPr>
+            <a:spLocks noGrp="1"/>
+          </p:cNvSpPr>
+          <p:nvPr>
+            <p:ph type="sldImg" idx="2"/>
+          </p:nvPr>
+        </p:nvSpPr>
+        <p:spPr/>
+      </p:sp>
+      <p:sp>
+        <p:nvSpPr>
+          <p:cNvPr id="3" name="Notes Placeholder 2"/>
+          <p:cNvSpPr>
+            <a:spLocks noGrp="1"/>
+          </p:cNvSpPr>
+          <p:nvPr>
+            <p:ph type="body" idx="3" sz="quarter"/>
+          </p:nvPr>
+        </p:nvSpPr>
+        <p:spPr/>
+        <p:txBody>
+          <a:bodyPr/>
+          <a:lstStyle/>
+          <a:p>
+            <a:r>
+              <a:t>If you want more: this page and the next three are hidden and skipped when you present.</a:t>
             </a:r>
           </a:p>
         </p:txBody>
@@ -4094,7 +4165,7 @@
                 </a:solidFill>
                 <a:latin typeface="Inter Tight"/>
               </a:rPr>
-              <a:t>TEACHER PAGE  ·  skipped when you present  ·  Lesson plan</a:t>
+              <a:t>TEACHER PAGE  ·  skipped when you present  ·  Before you start</a:t>
             </a:r>
           </a:p>
         </p:txBody>
@@ -4185,8 +4256,8 @@
         </p:nvSpPr>
         <p:spPr>
           <a:xfrm>
-            <a:off x="548640" y="1828800"/>
-            <a:ext cx="5120640" cy="4389120"/>
+            <a:off x="548640" y="2011680"/>
+            <a:ext cx="11064240" cy="4206240"/>
           </a:xfrm>
           <a:prstGeom prst="rect">
             <a:avLst/>
@@ -4201,43 +4272,43 @@
           <a:p>
             <a:pPr algn="l">
               <a:spcAft>
-                <a:spcPts val="675"/>
-              </a:spcAft>
-            </a:pPr>
-            <a:r>
-              <a:rPr sz="1100" b="1" i="0">
+                <a:spcPts val="900"/>
+              </a:spcAft>
+            </a:pPr>
+            <a:r>
+              <a:rPr sz="1200" b="1" i="0">
                 <a:solidFill>
                   <a:srgbClr val="0B2D5B"/>
                 </a:solidFill>
                 <a:latin typeface="Inter Tight"/>
               </a:rPr>
-              <a:t>GOAL</a:t>
-            </a:r>
-          </a:p>
-          <a:p>
-            <a:pPr algn="l">
-              <a:spcAft>
-                <a:spcPts val="675"/>
-              </a:spcAft>
-            </a:pPr>
-            <a:r>
-              <a:rPr sz="1500" b="0" i="0">
+              <a:t>BEFORE YOU START</a:t>
+            </a:r>
+          </a:p>
+          <a:p>
+            <a:pPr algn="l">
+              <a:spcAft>
+                <a:spcPts val="900"/>
+              </a:spcAft>
+            </a:pPr>
+            <a:r>
+              <a:rPr sz="2000" b="0" i="0">
                 <a:solidFill>
                   <a:srgbClr val="1C1B19"/>
                 </a:solidFill>
                 <a:latin typeface="Source Serif 4"/>
               </a:rPr>
-              <a:t>Students can describe identity as exploring and then committing, know that it keeps developing through the 20s, and choose one low-stakes way to explore or one place to be all of themselves. Nobody has to share anything about their own identity.</a:t>
-            </a:r>
-          </a:p>
-          <a:p>
-            <a:pPr algn="l">
-              <a:spcAft>
-                <a:spcPts val="675"/>
-              </a:spcAft>
-            </a:pPr>
-            <a:r>
-              <a:rPr sz="1500" b="0" i="0">
+              <a:t>Students learn that identity means exploring and then committing, that it keeps developing through the 20s, and pick one low-stakes way to explore. Point to four corners of the room, keep every vote on the research statements, and make every personal share optional.</a:t>
+            </a:r>
+          </a:p>
+          <a:p>
+            <a:pPr algn="l">
+              <a:spcAft>
+                <a:spcPts val="900"/>
+              </a:spcAft>
+            </a:pPr>
+            <a:r>
+              <a:rPr sz="2000" b="0" i="0">
                 <a:solidFill>
                   <a:srgbClr val="1C1B19"/>
                 </a:solidFill>
@@ -4249,302 +4320,33 @@
           <a:p>
             <a:pPr algn="l">
               <a:spcAft>
-                <a:spcPts val="675"/>
-              </a:spcAft>
-            </a:pPr>
-            <a:r>
-              <a:rPr sz="1100" b="1" i="0">
+                <a:spcPts val="900"/>
+              </a:spcAft>
+            </a:pPr>
+            <a:r>
+              <a:rPr sz="1200" b="1" i="0">
                 <a:solidFill>
                   <a:srgbClr val="0B2D5B"/>
                 </a:solidFill>
                 <a:latin typeface="Inter Tight"/>
               </a:rPr>
-              <a:t>MATERIALS</a:t>
-            </a:r>
-          </a:p>
-          <a:p>
-            <a:pPr algn="l">
-              <a:spcAft>
-                <a:spcPts val="675"/>
-              </a:spcAft>
-            </a:pPr>
-            <a:r>
-              <a:rPr sz="1500" b="0" i="0">
+              <a:t>EVERY STUDENT IN THE ROOM</a:t>
+            </a:r>
+          </a:p>
+          <a:p>
+            <a:pPr algn="l">
+              <a:spcAft>
+                <a:spcPts val="900"/>
+              </a:spcAft>
+            </a:pPr>
+            <a:r>
+              <a:rPr sz="2000" b="0" i="0">
                 <a:solidFill>
                   <a:srgbClr val="1C1B19"/>
                 </a:solidFill>
                 <a:latin typeface="Source Serif 4"/>
               </a:rPr>
-              <a:t>Four corner signs (agree, disagree, not sure, it depends), or just point to four corners of the room</a:t>
-            </a:r>
-          </a:p>
-          <a:p>
-            <a:pPr algn="l">
-              <a:spcAft>
-                <a:spcPts val="675"/>
-              </a:spcAft>
-            </a:pPr>
-            <a:r>
-              <a:rPr sz="1500" b="0" i="0">
-                <a:solidFill>
-                  <a:srgbClr val="1C1B19"/>
-                </a:solidFill>
-                <a:latin typeface="Source Serif 4"/>
-              </a:rPr>
-              <a:t>Index cards for the private reflection and the closing experiment</a:t>
-            </a:r>
-          </a:p>
-          <a:p>
-            <a:pPr algn="l">
-              <a:spcAft>
-                <a:spcPts val="675"/>
-              </a:spcAft>
-            </a:pPr>
-            <a:r>
-              <a:rPr sz="1500" b="0" i="0">
-                <a:solidFill>
-                  <a:srgbClr val="1C1B19"/>
-                </a:solidFill>
-                <a:latin typeface="Source Serif 4"/>
-              </a:rPr>
-              <a:t>The student page link (last slide) to share after advisory</a:t>
-            </a:r>
-          </a:p>
-        </p:txBody>
-      </p:sp>
-      <p:sp>
-        <p:nvSpPr>
-          <p:cNvPr id="7" name="TextBox 6"/>
-          <p:cNvSpPr txBox="1"/>
-          <p:nvPr/>
-        </p:nvSpPr>
-        <p:spPr>
-          <a:xfrm>
-            <a:off x="6126480" y="1828800"/>
-            <a:ext cx="5486400" cy="4389120"/>
-          </a:xfrm>
-          <a:prstGeom prst="rect">
-            <a:avLst/>
-          </a:prstGeom>
-          <a:noFill/>
-        </p:spPr>
-        <p:txBody>
-          <a:bodyPr wrap="square" anchor="t" lIns="0" rIns="0" tIns="0" bIns="0">
-            <a:spAutoFit/>
-          </a:bodyPr>
-          <a:lstStyle/>
-          <a:p>
-            <a:pPr algn="l">
-              <a:spcAft>
-                <a:spcPts val="630"/>
-              </a:spcAft>
-            </a:pPr>
-            <a:r>
-              <a:rPr sz="1100" b="1" i="0">
-                <a:solidFill>
-                  <a:srgbClr val="0B2D5B"/>
-                </a:solidFill>
-                <a:latin typeface="Inter Tight"/>
-              </a:rPr>
-              <a:t>FLOW</a:t>
-            </a:r>
-          </a:p>
-          <a:p>
-            <a:pPr algn="l">
-              <a:spcAft>
-                <a:spcPts val="630"/>
-              </a:spcAft>
-            </a:pPr>
-            <a:r>
-              <a:rPr sz="1300" b="1" i="0">
-                <a:solidFill>
-                  <a:srgbClr val="F47B20"/>
-                </a:solidFill>
-                <a:latin typeface="Inter Tight"/>
-              </a:rPr>
-              <a:t>3 min   </a:t>
-            </a:r>
-            <a:r>
-              <a:rPr sz="1400" b="0" i="0">
-                <a:solidFill>
-                  <a:srgbClr val="1C1B19"/>
-                </a:solidFill>
-                <a:latin typeface="Source Serif 4"/>
-              </a:rPr>
-              <a:t>Four corners: "Know who you are by graduation"</a:t>
-            </a:r>
-          </a:p>
-          <a:p>
-            <a:pPr algn="l">
-              <a:spcAft>
-                <a:spcPts val="630"/>
-              </a:spcAft>
-            </a:pPr>
-            <a:r>
-              <a:rPr sz="1300" b="1" i="0">
-                <a:solidFill>
-                  <a:srgbClr val="F47B20"/>
-                </a:solidFill>
-                <a:latin typeface="Inter Tight"/>
-              </a:rPr>
-              <a:t>4 min   </a:t>
-            </a:r>
-            <a:r>
-              <a:rPr sz="1400" b="0" i="0">
-                <a:solidFill>
-                  <a:srgbClr val="1C1B19"/>
-                </a:solidFill>
-                <a:latin typeface="Source Serif 4"/>
-              </a:rPr>
-              <a:t>Explore, then commit</a:t>
-            </a:r>
-          </a:p>
-          <a:p>
-            <a:pPr algn="l">
-              <a:spcAft>
-                <a:spcPts val="630"/>
-              </a:spcAft>
-            </a:pPr>
-            <a:r>
-              <a:rPr sz="1300" b="1" i="0">
-                <a:solidFill>
-                  <a:srgbClr val="F47B20"/>
-                </a:solidFill>
-                <a:latin typeface="Inter Tight"/>
-              </a:rPr>
-              <a:t>3 min   </a:t>
-            </a:r>
-            <a:r>
-              <a:rPr sz="1400" b="0" i="0">
-                <a:solidFill>
-                  <a:srgbClr val="1C1B19"/>
-                </a:solidFill>
-                <a:latin typeface="Source Serif 4"/>
-              </a:rPr>
-              <a:t>The pieces of you (private reflection)</a:t>
-            </a:r>
-          </a:p>
-          <a:p>
-            <a:pPr algn="l">
-              <a:spcAft>
-                <a:spcPts val="630"/>
-              </a:spcAft>
-            </a:pPr>
-            <a:r>
-              <a:rPr sz="1300" b="1" i="0">
-                <a:solidFill>
-                  <a:srgbClr val="F47B20"/>
-                </a:solidFill>
-                <a:latin typeface="Inter Tight"/>
-              </a:rPr>
-              <a:t>3 min   </a:t>
-            </a:r>
-            <a:r>
-              <a:rPr sz="1400" b="0" i="0">
-                <a:solidFill>
-                  <a:srgbClr val="1C1B19"/>
-                </a:solidFill>
-                <a:latin typeface="Source Serif 4"/>
-              </a:rPr>
-              <a:t>Four corners: "Adults expect to change a lot"</a:t>
-            </a:r>
-          </a:p>
-          <a:p>
-            <a:pPr algn="l">
-              <a:spcAft>
-                <a:spcPts val="630"/>
-              </a:spcAft>
-            </a:pPr>
-            <a:r>
-              <a:rPr sz="1300" b="1" i="0">
-                <a:solidFill>
-                  <a:srgbClr val="F47B20"/>
-                </a:solidFill>
-                <a:latin typeface="Inter Tight"/>
-              </a:rPr>
-              <a:t>5 min   </a:t>
-            </a:r>
-            <a:r>
-              <a:rPr sz="1400" b="0" i="0">
-                <a:solidFill>
-                  <a:srgbClr val="1C1B19"/>
-                </a:solidFill>
-                <a:latin typeface="Source Serif 4"/>
-              </a:rPr>
-              <a:t>Three moments (scenario talk)</a:t>
-            </a:r>
-          </a:p>
-          <a:p>
-            <a:pPr algn="l">
-              <a:spcAft>
-                <a:spcPts val="630"/>
-              </a:spcAft>
-            </a:pPr>
-            <a:r>
-              <a:rPr sz="1300" b="1" i="0">
-                <a:solidFill>
-                  <a:srgbClr val="F47B20"/>
-                </a:solidFill>
-                <a:latin typeface="Inter Tight"/>
-              </a:rPr>
-              <a:t>2 min   </a:t>
-            </a:r>
-            <a:r>
-              <a:rPr sz="1400" b="0" i="0">
-                <a:solidFill>
-                  <a:srgbClr val="1C1B19"/>
-                </a:solidFill>
-                <a:latin typeface="Source Serif 4"/>
-              </a:rPr>
-              <a:t>One experiment, and the student page link</a:t>
-            </a:r>
-          </a:p>
-          <a:p>
-            <a:pPr algn="l">
-              <a:spcAft>
-                <a:spcPts val="630"/>
-              </a:spcAft>
-            </a:pPr>
-            <a:r>
-              <a:rPr sz="1400" b="0" i="0">
-                <a:solidFill>
-                  <a:srgbClr val="1C1B19"/>
-                </a:solidFill>
-                <a:latin typeface="Source Serif 4"/>
-              </a:rPr>
-              <a:t/>
-            </a:r>
-          </a:p>
-          <a:p>
-            <a:pPr algn="l">
-              <a:spcAft>
-                <a:spcPts val="630"/>
-              </a:spcAft>
-            </a:pPr>
-            <a:r>
-              <a:rPr sz="1100" b="1" i="0">
-                <a:solidFill>
-                  <a:srgbClr val="0B2D5B"/>
-                </a:solidFill>
-                <a:latin typeface="Inter Tight"/>
-              </a:rPr>
-              <a:t>SHORT ON TIME (10-MINUTE CHECK-IN)</a:t>
-            </a:r>
-          </a:p>
-          <a:p>
-            <a:pPr algn="l">
-              <a:spcAft>
-                <a:spcPts val="630"/>
-              </a:spcAft>
-            </a:pPr>
-            <a:r>
-              <a:rPr sz="1400" b="0" i="0">
-                <a:solidFill>
-                  <a:srgbClr val="1C1B19"/>
-                </a:solidFill>
-                <a:latin typeface="Source Serif 4"/>
-              </a:rPr>
-              <a:t>Four corners on graduation (3), explore then commit (3), the pieces of you, private (2), one experiment and the link (2).</a:t>
+              <a:t>If a student comes out in the circle, thank them simply and check in afterward, and remember that "interview your roots" doesn't assume who's at home.</a:t>
             </a:r>
           </a:p>
         </p:txBody>
@@ -4558,6 +4360,1692 @@
 </file>
 
 <file path=ppt/slides/slide10.xml><?xml version="1.0" encoding="utf-8"?>
+<p:sld xmlns:a="http://schemas.openxmlformats.org/drawingml/2006/main" xmlns:p="http://schemas.openxmlformats.org/presentationml/2006/main" xmlns:r="http://schemas.openxmlformats.org/officeDocument/2006/relationships" show="0">
+  <p:cSld>
+    <p:bg>
+      <p:bgPr>
+        <a:solidFill>
+          <a:srgbClr val="EEEBE4"/>
+        </a:solidFill>
+        <a:effectLst/>
+      </p:bgPr>
+    </p:bg>
+    <p:spTree>
+      <p:nvGrpSpPr>
+        <p:cNvPr id="1" name=""/>
+        <p:cNvGrpSpPr/>
+        <p:nvPr/>
+      </p:nvGrpSpPr>
+      <p:grpSpPr/>
+      <p:sp>
+        <p:nvSpPr>
+          <p:cNvPr id="2" name="Rectangle 1"/>
+          <p:cNvSpPr/>
+          <p:nvPr/>
+        </p:nvSpPr>
+        <p:spPr>
+          <a:xfrm>
+            <a:off x="0" y="0"/>
+            <a:ext cx="12191695" cy="384048"/>
+          </a:xfrm>
+          <a:prstGeom prst="rect">
+            <a:avLst/>
+          </a:prstGeom>
+          <a:solidFill>
+            <a:srgbClr val="0B2D5B"/>
+          </a:solidFill>
+          <a:ln>
+            <a:noFill/>
+          </a:ln>
+          <a:effectLst/>
+        </p:spPr>
+        <p:style>
+          <a:lnRef idx="1">
+            <a:schemeClr val="accent1"/>
+          </a:lnRef>
+          <a:fillRef idx="3">
+            <a:schemeClr val="accent1"/>
+          </a:fillRef>
+          <a:effectRef idx="2">
+            <a:schemeClr val="accent1"/>
+          </a:effectRef>
+          <a:fontRef idx="minor">
+            <a:schemeClr val="lt1"/>
+          </a:fontRef>
+        </p:style>
+        <p:txBody>
+          <a:bodyPr rtlCol="0" anchor="ctr"/>
+          <a:lstStyle/>
+          <a:p>
+            <a:pPr algn="ctr"/>
+          </a:p>
+        </p:txBody>
+      </p:sp>
+      <p:sp>
+        <p:nvSpPr>
+          <p:cNvPr id="3" name="TextBox 2"/>
+          <p:cNvSpPr txBox="1"/>
+          <p:nvPr/>
+        </p:nvSpPr>
+        <p:spPr>
+          <a:xfrm>
+            <a:off x="548640" y="100584"/>
+            <a:ext cx="10972800" cy="274320"/>
+          </a:xfrm>
+          <a:prstGeom prst="rect">
+            <a:avLst/>
+          </a:prstGeom>
+          <a:noFill/>
+        </p:spPr>
+        <p:txBody>
+          <a:bodyPr wrap="square" anchor="t" lIns="0" rIns="0" tIns="0" bIns="0">
+            <a:spAutoFit/>
+          </a:bodyPr>
+          <a:lstStyle/>
+          <a:p>
+            <a:pPr algn="l">
+              <a:spcAft>
+                <a:spcPts val="495"/>
+              </a:spcAft>
+            </a:pPr>
+            <a:r>
+              <a:rPr sz="1100" b="1" i="0">
+                <a:solidFill>
+                  <a:srgbClr val="FFFFFF"/>
+                </a:solidFill>
+                <a:latin typeface="Inter Tight"/>
+              </a:rPr>
+              <a:t>TEACHER PAGE  ·  skipped when you present  ·  Before you teach</a:t>
+            </a:r>
+          </a:p>
+        </p:txBody>
+      </p:sp>
+      <p:sp>
+        <p:nvSpPr>
+          <p:cNvPr id="4" name="TextBox 3"/>
+          <p:cNvSpPr txBox="1"/>
+          <p:nvPr/>
+        </p:nvSpPr>
+        <p:spPr>
+          <a:xfrm>
+            <a:off x="548640" y="685800"/>
+            <a:ext cx="10972800" cy="640080"/>
+          </a:xfrm>
+          <a:prstGeom prst="rect">
+            <a:avLst/>
+          </a:prstGeom>
+          <a:noFill/>
+        </p:spPr>
+        <p:txBody>
+          <a:bodyPr wrap="square" anchor="t" lIns="0" rIns="0" tIns="0" bIns="0">
+            <a:spAutoFit/>
+          </a:bodyPr>
+          <a:lstStyle/>
+          <a:p>
+            <a:pPr algn="l">
+              <a:spcAft>
+                <a:spcPts val="1350"/>
+              </a:spcAft>
+            </a:pPr>
+            <a:r>
+              <a:rPr sz="3000" b="1" i="0">
+                <a:solidFill>
+                  <a:srgbClr val="1C1B19"/>
+                </a:solidFill>
+                <a:latin typeface="Source Serif 4"/>
+              </a:rPr>
+              <a:t>Before you teach</a:t>
+            </a:r>
+          </a:p>
+        </p:txBody>
+      </p:sp>
+      <p:sp>
+        <p:nvSpPr>
+          <p:cNvPr id="5" name="TextBox 4"/>
+          <p:cNvSpPr txBox="1"/>
+          <p:nvPr/>
+        </p:nvSpPr>
+        <p:spPr>
+          <a:xfrm>
+            <a:off x="548640" y="1463040"/>
+            <a:ext cx="5394960" cy="4937760"/>
+          </a:xfrm>
+          <a:prstGeom prst="rect">
+            <a:avLst/>
+          </a:prstGeom>
+          <a:noFill/>
+        </p:spPr>
+        <p:txBody>
+          <a:bodyPr wrap="square" anchor="t" lIns="0" rIns="0" tIns="0" bIns="0">
+            <a:spAutoFit/>
+          </a:bodyPr>
+          <a:lstStyle/>
+          <a:p>
+            <a:pPr algn="l">
+              <a:spcAft>
+                <a:spcPts val="585"/>
+              </a:spcAft>
+            </a:pPr>
+            <a:r>
+              <a:rPr sz="1500" b="1" i="0">
+                <a:solidFill>
+                  <a:srgbClr val="1C1B19"/>
+                </a:solidFill>
+                <a:latin typeface="Source Serif 4"/>
+              </a:rPr>
+              <a:t>Nobody shares their own identity.</a:t>
+            </a:r>
+          </a:p>
+          <a:p>
+            <a:pPr algn="l">
+              <a:spcAft>
+                <a:spcPts val="585"/>
+              </a:spcAft>
+            </a:pPr>
+            <a:r>
+              <a:rPr sz="1300" b="0" i="0">
+                <a:solidFill>
+                  <a:srgbClr val="1C1B19"/>
+                </a:solidFill>
+                <a:latin typeface="Source Serif 4"/>
+              </a:rPr>
+              <a:t>Gender, sexuality, faith, immigration, adoption and money can be private, or unsafe to talk about. Every share today is optional. Never ask a student to speak for their whole group, and don't turn to the one student in the circle who shares a background.</a:t>
+            </a:r>
+          </a:p>
+          <a:p>
+            <a:pPr algn="l">
+              <a:spcAft>
+                <a:spcPts val="585"/>
+              </a:spcAft>
+            </a:pPr>
+            <a:r>
+              <a:rPr sz="1300" b="0" i="0">
+                <a:solidFill>
+                  <a:srgbClr val="1C1B19"/>
+                </a:solidFill>
+                <a:latin typeface="Source Serif 4"/>
+              </a:rPr>
+              <a:t/>
+            </a:r>
+          </a:p>
+          <a:p>
+            <a:pPr algn="l">
+              <a:spcAft>
+                <a:spcPts val="585"/>
+              </a:spcAft>
+            </a:pPr>
+            <a:r>
+              <a:rPr sz="1500" b="1" i="0">
+                <a:solidFill>
+                  <a:srgbClr val="1C1B19"/>
+                </a:solidFill>
+                <a:latin typeface="Source Serif 4"/>
+              </a:rPr>
+              <a:t>Four corners is about the research statements.</a:t>
+            </a:r>
+          </a:p>
+          <a:p>
+            <a:pPr algn="l">
+              <a:spcAft>
+                <a:spcPts val="585"/>
+              </a:spcAft>
+            </a:pPr>
+            <a:r>
+              <a:rPr sz="1300" b="0" i="0">
+                <a:solidFill>
+                  <a:srgbClr val="1C1B19"/>
+                </a:solidFill>
+                <a:latin typeface="Source Serif 4"/>
+              </a:rPr>
+              <a:t>Students vote on what the research says, never on anything personal. Pointing works as well as walking, and "it depends" is always a fine corner.</a:t>
+            </a:r>
+          </a:p>
+          <a:p>
+            <a:pPr algn="l">
+              <a:spcAft>
+                <a:spcPts val="585"/>
+              </a:spcAft>
+            </a:pPr>
+            <a:r>
+              <a:rPr sz="1300" b="0" i="0">
+                <a:solidFill>
+                  <a:srgbClr val="1C1B19"/>
+                </a:solidFill>
+                <a:latin typeface="Source Serif 4"/>
+              </a:rPr>
+              <a:t/>
+            </a:r>
+          </a:p>
+          <a:p>
+            <a:pPr algn="l">
+              <a:spcAft>
+                <a:spcPts val="585"/>
+              </a:spcAft>
+            </a:pPr>
+            <a:r>
+              <a:rPr sz="1500" b="1" i="0">
+                <a:solidFill>
+                  <a:srgbClr val="1C1B19"/>
+                </a:solidFill>
+                <a:latin typeface="Source Serif 4"/>
+              </a:rPr>
+              <a:t>If a student comes out in the circle.</a:t>
+            </a:r>
+          </a:p>
+          <a:p>
+            <a:pPr algn="l">
+              <a:spcAft>
+                <a:spcPts val="585"/>
+              </a:spcAft>
+            </a:pPr>
+            <a:r>
+              <a:rPr sz="1300" b="0" i="0">
+                <a:solidFill>
+                  <a:srgbClr val="1C1B19"/>
+                </a:solidFill>
+                <a:latin typeface="Source Serif 4"/>
+              </a:rPr>
+              <a:t>Thank them simply ("Thanks for telling us"), keep going, and don't make it a moment. Check in privately afterward. Remind the group at the start that what people say in advisory stays in advisory, while being honest that you'd get help if someone's safety were at risk.</a:t>
+            </a:r>
+          </a:p>
+          <a:p>
+            <a:pPr algn="l">
+              <a:spcAft>
+                <a:spcPts val="585"/>
+              </a:spcAft>
+            </a:pPr>
+            <a:r>
+              <a:rPr sz="1300" b="0" i="0">
+                <a:solidFill>
+                  <a:srgbClr val="1C1B19"/>
+                </a:solidFill>
+                <a:latin typeface="Source Serif 4"/>
+              </a:rPr>
+              <a:t/>
+            </a:r>
+          </a:p>
+        </p:txBody>
+      </p:sp>
+      <p:sp>
+        <p:nvSpPr>
+          <p:cNvPr id="6" name="TextBox 5"/>
+          <p:cNvSpPr txBox="1"/>
+          <p:nvPr/>
+        </p:nvSpPr>
+        <p:spPr>
+          <a:xfrm>
+            <a:off x="6217920" y="1463040"/>
+            <a:ext cx="5394960" cy="4937760"/>
+          </a:xfrm>
+          <a:prstGeom prst="rect">
+            <a:avLst/>
+          </a:prstGeom>
+          <a:noFill/>
+        </p:spPr>
+        <p:txBody>
+          <a:bodyPr wrap="square" anchor="t" lIns="0" rIns="0" tIns="0" bIns="0">
+            <a:spAutoFit/>
+          </a:bodyPr>
+          <a:lstStyle/>
+          <a:p>
+            <a:pPr algn="l">
+              <a:spcAft>
+                <a:spcPts val="585"/>
+              </a:spcAft>
+            </a:pPr>
+            <a:r>
+              <a:rPr sz="1500" b="1" i="0">
+                <a:solidFill>
+                  <a:srgbClr val="1C1B19"/>
+                </a:solidFill>
+                <a:latin typeface="Source Serif 4"/>
+              </a:rPr>
+              <a:t>Harassment and outing go to a counselor that day.</a:t>
+            </a:r>
+          </a:p>
+          <a:p>
+            <a:pPr algn="l">
+              <a:spcAft>
+                <a:spcPts val="585"/>
+              </a:spcAft>
+            </a:pPr>
+            <a:r>
+              <a:rPr sz="1300" b="0" i="0">
+                <a:solidFill>
+                  <a:srgbClr val="1C1B19"/>
+                </a:solidFill>
+                <a:latin typeface="Source Serif 4"/>
+              </a:rPr>
+              <a:t>If a student is being harassed or threatened because of their race, religion, gender, sexuality or disability, or someone outed them or is sharing private photos, that is a same-day counselor conversation, not a discussion topic.</a:t>
+            </a:r>
+          </a:p>
+          <a:p>
+            <a:pPr algn="l">
+              <a:spcAft>
+                <a:spcPts val="585"/>
+              </a:spcAft>
+            </a:pPr>
+            <a:r>
+              <a:rPr sz="1300" b="0" i="0">
+                <a:solidFill>
+                  <a:srgbClr val="1C1B19"/>
+                </a:solidFill>
+                <a:latin typeface="Source Serif 4"/>
+              </a:rPr>
+              <a:t/>
+            </a:r>
+          </a:p>
+          <a:p>
+            <a:pPr algn="l">
+              <a:spcAft>
+                <a:spcPts val="585"/>
+              </a:spcAft>
+            </a:pPr>
+            <a:r>
+              <a:rPr sz="1500" b="1" i="0">
+                <a:solidFill>
+                  <a:srgbClr val="1C1B19"/>
+                </a:solidFill>
+                <a:latin typeface="Source Serif 4"/>
+              </a:rPr>
+              <a:t>Keep families in the story.</a:t>
+            </a:r>
+          </a:p>
+          <a:p>
+            <a:pPr algn="l">
+              <a:spcAft>
+                <a:spcPts val="585"/>
+              </a:spcAft>
+            </a:pPr>
+            <a:r>
+              <a:rPr sz="1300" b="0" i="0">
+                <a:solidFill>
+                  <a:srgbClr val="1C1B19"/>
+                </a:solidFill>
+                <a:latin typeface="Source Serif 4"/>
+              </a:rPr>
+              <a:t>The Nadia scenario is about a family plan. Families pass down a lot worth keeping: language, faith, food, values, stories. Building your own identity can include choosing much of what you were given. Don't let the discussion turn into teens against families.</a:t>
+            </a:r>
+          </a:p>
+          <a:p>
+            <a:pPr algn="l">
+              <a:spcAft>
+                <a:spcPts val="585"/>
+              </a:spcAft>
+            </a:pPr>
+            <a:r>
+              <a:rPr sz="1300" b="0" i="0">
+                <a:solidFill>
+                  <a:srgbClr val="1C1B19"/>
+                </a:solidFill>
+                <a:latin typeface="Source Serif 4"/>
+              </a:rPr>
+              <a:t/>
+            </a:r>
+          </a:p>
+          <a:p>
+            <a:pPr algn="l">
+              <a:spcAft>
+                <a:spcPts val="585"/>
+              </a:spcAft>
+            </a:pPr>
+            <a:r>
+              <a:rPr sz="1500" b="1" i="0">
+                <a:solidFill>
+                  <a:srgbClr val="1C1B19"/>
+                </a:solidFill>
+                <a:latin typeface="Source Serif 4"/>
+              </a:rPr>
+              <a:t>Know when it's more than figuring things out.</a:t>
+            </a:r>
+          </a:p>
+          <a:p>
+            <a:pPr algn="l">
+              <a:spcAft>
+                <a:spcPts val="585"/>
+              </a:spcAft>
+            </a:pPr>
+            <a:r>
+              <a:rPr sz="1300" b="0" i="0">
+                <a:solidFill>
+                  <a:srgbClr val="1C1B19"/>
+                </a:solidFill>
+                <a:latin typeface="Source Serif 4"/>
+              </a:rPr>
+              <a:t>Feeling you have to hide who you are everywhere, including at home, or thoughts of hurting yourself, go to a counselor the same day. Don't ask about these in advisory. Students can call or text 988 any time. The Trevor Project (1-866-488-7386, or text START to 678-678) is there for LGBTQ+ young people, and Trans Lifeline is at 877-565-8860.</a:t>
+            </a:r>
+          </a:p>
+          <a:p>
+            <a:pPr algn="l">
+              <a:spcAft>
+                <a:spcPts val="585"/>
+              </a:spcAft>
+            </a:pPr>
+            <a:r>
+              <a:rPr sz="1300" b="0" i="0">
+                <a:solidFill>
+                  <a:srgbClr val="1C1B19"/>
+                </a:solidFill>
+                <a:latin typeface="Source Serif 4"/>
+              </a:rPr>
+              <a:t/>
+            </a:r>
+          </a:p>
+        </p:txBody>
+      </p:sp>
+    </p:spTree>
+  </p:cSld>
+  <p:clrMapOvr>
+    <a:masterClrMapping/>
+  </p:clrMapOvr>
+</p:sld>
+</file>
+
+<file path=ppt/slides/slide11.xml><?xml version="1.0" encoding="utf-8"?>
+<p:sld xmlns:a="http://schemas.openxmlformats.org/drawingml/2006/main" xmlns:p="http://schemas.openxmlformats.org/presentationml/2006/main" xmlns:r="http://schemas.openxmlformats.org/officeDocument/2006/relationships" show="0">
+  <p:cSld>
+    <p:bg>
+      <p:bgPr>
+        <a:solidFill>
+          <a:srgbClr val="EEEBE4"/>
+        </a:solidFill>
+        <a:effectLst/>
+      </p:bgPr>
+    </p:bg>
+    <p:spTree>
+      <p:nvGrpSpPr>
+        <p:cNvPr id="1" name=""/>
+        <p:cNvGrpSpPr/>
+        <p:nvPr/>
+      </p:nvGrpSpPr>
+      <p:grpSpPr/>
+      <p:sp>
+        <p:nvSpPr>
+          <p:cNvPr id="2" name="Rectangle 1"/>
+          <p:cNvSpPr/>
+          <p:nvPr/>
+        </p:nvSpPr>
+        <p:spPr>
+          <a:xfrm>
+            <a:off x="0" y="0"/>
+            <a:ext cx="12191695" cy="384048"/>
+          </a:xfrm>
+          <a:prstGeom prst="rect">
+            <a:avLst/>
+          </a:prstGeom>
+          <a:solidFill>
+            <a:srgbClr val="0B2D5B"/>
+          </a:solidFill>
+          <a:ln>
+            <a:noFill/>
+          </a:ln>
+          <a:effectLst/>
+        </p:spPr>
+        <p:style>
+          <a:lnRef idx="1">
+            <a:schemeClr val="accent1"/>
+          </a:lnRef>
+          <a:fillRef idx="3">
+            <a:schemeClr val="accent1"/>
+          </a:fillRef>
+          <a:effectRef idx="2">
+            <a:schemeClr val="accent1"/>
+          </a:effectRef>
+          <a:fontRef idx="minor">
+            <a:schemeClr val="lt1"/>
+          </a:fontRef>
+        </p:style>
+        <p:txBody>
+          <a:bodyPr rtlCol="0" anchor="ctr"/>
+          <a:lstStyle/>
+          <a:p>
+            <a:pPr algn="ctr"/>
+          </a:p>
+        </p:txBody>
+      </p:sp>
+      <p:sp>
+        <p:nvSpPr>
+          <p:cNvPr id="3" name="TextBox 2"/>
+          <p:cNvSpPr txBox="1"/>
+          <p:nvPr/>
+        </p:nvSpPr>
+        <p:spPr>
+          <a:xfrm>
+            <a:off x="548640" y="100584"/>
+            <a:ext cx="10972800" cy="274320"/>
+          </a:xfrm>
+          <a:prstGeom prst="rect">
+            <a:avLst/>
+          </a:prstGeom>
+          <a:noFill/>
+        </p:spPr>
+        <p:txBody>
+          <a:bodyPr wrap="square" anchor="t" lIns="0" rIns="0" tIns="0" bIns="0">
+            <a:spAutoFit/>
+          </a:bodyPr>
+          <a:lstStyle/>
+          <a:p>
+            <a:pPr algn="l">
+              <a:spcAft>
+                <a:spcPts val="495"/>
+              </a:spcAft>
+            </a:pPr>
+            <a:r>
+              <a:rPr sz="1100" b="1" i="0">
+                <a:solidFill>
+                  <a:srgbClr val="FFFFFF"/>
+                </a:solidFill>
+                <a:latin typeface="Inter Tight"/>
+              </a:rPr>
+              <a:t>TEACHER PAGE  ·  skipped when you present  ·  Every student in the room</a:t>
+            </a:r>
+          </a:p>
+        </p:txBody>
+      </p:sp>
+      <p:sp>
+        <p:nvSpPr>
+          <p:cNvPr id="4" name="TextBox 3"/>
+          <p:cNvSpPr txBox="1"/>
+          <p:nvPr/>
+        </p:nvSpPr>
+        <p:spPr>
+          <a:xfrm>
+            <a:off x="548640" y="685800"/>
+            <a:ext cx="10972800" cy="640080"/>
+          </a:xfrm>
+          <a:prstGeom prst="rect">
+            <a:avLst/>
+          </a:prstGeom>
+          <a:noFill/>
+        </p:spPr>
+        <p:txBody>
+          <a:bodyPr wrap="square" anchor="t" lIns="0" rIns="0" tIns="0" bIns="0">
+            <a:spAutoFit/>
+          </a:bodyPr>
+          <a:lstStyle/>
+          <a:p>
+            <a:pPr algn="l">
+              <a:spcAft>
+                <a:spcPts val="1350"/>
+              </a:spcAft>
+            </a:pPr>
+            <a:r>
+              <a:rPr sz="3000" b="1" i="0">
+                <a:solidFill>
+                  <a:srgbClr val="1C1B19"/>
+                </a:solidFill>
+                <a:latin typeface="Source Serif 4"/>
+              </a:rPr>
+              <a:t>Every student in the room</a:t>
+            </a:r>
+          </a:p>
+        </p:txBody>
+      </p:sp>
+      <p:sp>
+        <p:nvSpPr>
+          <p:cNvPr id="5" name="TextBox 4"/>
+          <p:cNvSpPr txBox="1"/>
+          <p:nvPr/>
+        </p:nvSpPr>
+        <p:spPr>
+          <a:xfrm>
+            <a:off x="548640" y="1325880"/>
+            <a:ext cx="10972800" cy="365760"/>
+          </a:xfrm>
+          <a:prstGeom prst="rect">
+            <a:avLst/>
+          </a:prstGeom>
+          <a:noFill/>
+        </p:spPr>
+        <p:txBody>
+          <a:bodyPr wrap="square" anchor="t" lIns="0" rIns="0" tIns="0" bIns="0">
+            <a:spAutoFit/>
+          </a:bodyPr>
+          <a:lstStyle/>
+          <a:p>
+            <a:pPr algn="l">
+              <a:spcAft>
+                <a:spcPts val="630"/>
+              </a:spcAft>
+            </a:pPr>
+            <a:r>
+              <a:rPr sz="1400" b="0" i="0">
+                <a:solidFill>
+                  <a:srgbClr val="5D5A54"/>
+                </a:solidFill>
+                <a:latin typeface="Inter Tight"/>
+              </a:rPr>
+              <a:t>Culture, family, identity, ability and money: what to keep in mind for this topic.</a:t>
+            </a:r>
+          </a:p>
+        </p:txBody>
+      </p:sp>
+      <p:sp>
+        <p:nvSpPr>
+          <p:cNvPr id="6" name="TextBox 5"/>
+          <p:cNvSpPr txBox="1"/>
+          <p:nvPr/>
+        </p:nvSpPr>
+        <p:spPr>
+          <a:xfrm>
+            <a:off x="548640" y="1828800"/>
+            <a:ext cx="5394960" cy="4572000"/>
+          </a:xfrm>
+          <a:prstGeom prst="rect">
+            <a:avLst/>
+          </a:prstGeom>
+          <a:noFill/>
+        </p:spPr>
+        <p:txBody>
+          <a:bodyPr wrap="square" anchor="t" lIns="0" rIns="0" tIns="0" bIns="0">
+            <a:spAutoFit/>
+          </a:bodyPr>
+          <a:lstStyle/>
+          <a:p>
+            <a:pPr algn="l">
+              <a:spcAft>
+                <a:spcPts val="585"/>
+              </a:spcAft>
+            </a:pPr>
+            <a:r>
+              <a:rPr sz="1500" b="1" i="0">
+                <a:solidFill>
+                  <a:srgbClr val="1C1B19"/>
+                </a:solidFill>
+                <a:latin typeface="Source Serif 4"/>
+              </a:rPr>
+              <a:t>Everyone has a racial and cultural story.</a:t>
+            </a:r>
+          </a:p>
+          <a:p>
+            <a:pPr algn="l">
+              <a:spcAft>
+                <a:spcPts val="585"/>
+              </a:spcAft>
+            </a:pPr>
+            <a:r>
+              <a:rPr sz="1300" b="0" i="0">
+                <a:solidFill>
+                  <a:srgbClr val="1C1B19"/>
+                </a:solidFill>
+                <a:latin typeface="Source Serif 4"/>
+              </a:rPr>
+              <a:t>Students of color often start thinking about racial identity early because the world brings it up. White students in mostly white places may not until later. The "where are you really from" scenario lets students practice without anyone in the circle having to tell their own story.</a:t>
+            </a:r>
+          </a:p>
+          <a:p>
+            <a:pPr algn="l">
+              <a:spcAft>
+                <a:spcPts val="585"/>
+              </a:spcAft>
+            </a:pPr>
+            <a:r>
+              <a:rPr sz="1300" b="0" i="0">
+                <a:solidFill>
+                  <a:srgbClr val="1C1B19"/>
+                </a:solidFill>
+                <a:latin typeface="Source Serif 4"/>
+              </a:rPr>
+              <a:t/>
+            </a:r>
+          </a:p>
+          <a:p>
+            <a:pPr algn="l">
+              <a:spcAft>
+                <a:spcPts val="585"/>
+              </a:spcAft>
+            </a:pPr>
+            <a:r>
+              <a:rPr sz="1500" b="1" i="0">
+                <a:solidFill>
+                  <a:srgbClr val="1C1B19"/>
+                </a:solidFill>
+                <a:latin typeface="Source Serif 4"/>
+              </a:rPr>
+              <a:t>Gender and sexuality: their timeline, their words.</a:t>
+            </a:r>
+          </a:p>
+          <a:p>
+            <a:pPr algn="l">
+              <a:spcAft>
+                <a:spcPts val="585"/>
+              </a:spcAft>
+            </a:pPr>
+            <a:r>
+              <a:rPr sz="1300" b="0" i="0">
+                <a:solidFill>
+                  <a:srgbClr val="1C1B19"/>
+                </a:solidFill>
+                <a:latin typeface="Source Serif 4"/>
+              </a:rPr>
+              <a:t>Some students know early, some question for a while, some land where they started. All of it is identity work. Nobody owes anyone a label, and who to tell, and when, is the student's call, with safety first. A student who isn't out at home needs a school adult route: a counselor can help them figure out who to talk to.</a:t>
+            </a:r>
+          </a:p>
+          <a:p>
+            <a:pPr algn="l">
+              <a:spcAft>
+                <a:spcPts val="585"/>
+              </a:spcAft>
+            </a:pPr>
+            <a:r>
+              <a:rPr sz="1300" b="0" i="0">
+                <a:solidFill>
+                  <a:srgbClr val="1C1B19"/>
+                </a:solidFill>
+                <a:latin typeface="Source Serif 4"/>
+              </a:rPr>
+              <a:t/>
+            </a:r>
+          </a:p>
+          <a:p>
+            <a:pPr algn="l">
+              <a:spcAft>
+                <a:spcPts val="585"/>
+              </a:spcAft>
+            </a:pPr>
+            <a:r>
+              <a:rPr sz="1500" b="1" i="0">
+                <a:solidFill>
+                  <a:srgbClr val="1C1B19"/>
+                </a:solidFill>
+                <a:latin typeface="Source Serif 4"/>
+              </a:rPr>
+              <a:t>"Interview your roots" doesn't assume who's at home.</a:t>
+            </a:r>
+          </a:p>
+          <a:p>
+            <a:pPr algn="l">
+              <a:spcAft>
+                <a:spcPts val="585"/>
+              </a:spcAft>
+            </a:pPr>
+            <a:r>
+              <a:rPr sz="1300" b="0" i="0">
+                <a:solidFill>
+                  <a:srgbClr val="1C1B19"/>
+                </a:solidFill>
+                <a:latin typeface="Source Serif 4"/>
+              </a:rPr>
+              <a:t>Students live with one parent, two moms or two dads, grandparents, foster or kinship families, or between two homes. Adopted students may not have access to some of their story. Any elder, family friend, coach or mentor who knows part of their story counts.</a:t>
+            </a:r>
+          </a:p>
+          <a:p>
+            <a:pPr algn="l">
+              <a:spcAft>
+                <a:spcPts val="585"/>
+              </a:spcAft>
+            </a:pPr>
+            <a:r>
+              <a:rPr sz="1300" b="0" i="0">
+                <a:solidFill>
+                  <a:srgbClr val="1C1B19"/>
+                </a:solidFill>
+                <a:latin typeface="Source Serif 4"/>
+              </a:rPr>
+              <a:t/>
+            </a:r>
+          </a:p>
+        </p:txBody>
+      </p:sp>
+      <p:sp>
+        <p:nvSpPr>
+          <p:cNvPr id="7" name="TextBox 6"/>
+          <p:cNvSpPr txBox="1"/>
+          <p:nvPr/>
+        </p:nvSpPr>
+        <p:spPr>
+          <a:xfrm>
+            <a:off x="6217920" y="1828800"/>
+            <a:ext cx="5394960" cy="4572000"/>
+          </a:xfrm>
+          <a:prstGeom prst="rect">
+            <a:avLst/>
+          </a:prstGeom>
+          <a:noFill/>
+        </p:spPr>
+        <p:txBody>
+          <a:bodyPr wrap="square" anchor="t" lIns="0" rIns="0" tIns="0" bIns="0">
+            <a:spAutoFit/>
+          </a:bodyPr>
+          <a:lstStyle/>
+          <a:p>
+            <a:pPr algn="l">
+              <a:spcAft>
+                <a:spcPts val="585"/>
+              </a:spcAft>
+            </a:pPr>
+            <a:r>
+              <a:rPr sz="1500" b="1" i="0">
+                <a:solidFill>
+                  <a:srgbClr val="1C1B19"/>
+                </a:solidFill>
+                <a:latin typeface="Source Serif 4"/>
+              </a:rPr>
+              <a:t>Faith can be kept, questioned, or chosen.</a:t>
+            </a:r>
+          </a:p>
+          <a:p>
+            <a:pPr algn="l">
+              <a:spcAft>
+                <a:spcPts val="585"/>
+              </a:spcAft>
+            </a:pPr>
+            <a:r>
+              <a:rPr sz="1300" b="0" i="0">
+                <a:solidFill>
+                  <a:srgbClr val="1C1B19"/>
+                </a:solidFill>
+                <a:latin typeface="Source Serif 4"/>
+              </a:rPr>
+              <a:t>For some students faith is the steadiest piece. Others are questioning it, or grew up without one. Keeping a faith after thinking it through is as much a commitment that fits as anything else. Don't present questioning as the goal.</a:t>
+            </a:r>
+          </a:p>
+          <a:p>
+            <a:pPr algn="l">
+              <a:spcAft>
+                <a:spcPts val="585"/>
+              </a:spcAft>
+            </a:pPr>
+            <a:r>
+              <a:rPr sz="1300" b="0" i="0">
+                <a:solidFill>
+                  <a:srgbClr val="1C1B19"/>
+                </a:solidFill>
+                <a:latin typeface="Source Serif 4"/>
+              </a:rPr>
+              <a:t/>
+            </a:r>
+          </a:p>
+          <a:p>
+            <a:pPr algn="l">
+              <a:spcAft>
+                <a:spcPts val="585"/>
+              </a:spcAft>
+            </a:pPr>
+            <a:r>
+              <a:rPr sz="1500" b="1" i="0">
+                <a:solidFill>
+                  <a:srgbClr val="1C1B19"/>
+                </a:solidFill>
+                <a:latin typeface="Source Serif 4"/>
+              </a:rPr>
+              <a:t>Body and ability is one of the pieces.</a:t>
+            </a:r>
+          </a:p>
+          <a:p>
+            <a:pPr algn="l">
+              <a:spcAft>
+                <a:spcPts val="585"/>
+              </a:spcAft>
+            </a:pPr>
+            <a:r>
+              <a:rPr sz="1300" b="0" i="0">
+                <a:solidFill>
+                  <a:srgbClr val="1C1B19"/>
+                </a:solidFill>
+                <a:latin typeface="Source Serif 4"/>
+              </a:rPr>
+              <a:t>For disabled and chronically ill students, disability can be a source of pride and community, not only something other people notice. Include it in the list without making it the example of something hard.</a:t>
+            </a:r>
+          </a:p>
+          <a:p>
+            <a:pPr algn="l">
+              <a:spcAft>
+                <a:spcPts val="585"/>
+              </a:spcAft>
+            </a:pPr>
+            <a:r>
+              <a:rPr sz="1300" b="0" i="0">
+                <a:solidFill>
+                  <a:srgbClr val="1C1B19"/>
+                </a:solidFill>
+                <a:latin typeface="Source Serif 4"/>
+              </a:rPr>
+              <a:t/>
+            </a:r>
+          </a:p>
+          <a:p>
+            <a:pPr algn="l">
+              <a:spcAft>
+                <a:spcPts val="585"/>
+              </a:spcAft>
+            </a:pPr>
+            <a:r>
+              <a:rPr sz="1500" b="1" i="0">
+                <a:solidFill>
+                  <a:srgbClr val="1C1B19"/>
+                </a:solidFill>
+                <a:latin typeface="Source Serif 4"/>
+              </a:rPr>
+              <a:t>Language and code switching.</a:t>
+            </a:r>
+          </a:p>
+          <a:p>
+            <a:pPr algn="l">
+              <a:spcAft>
+                <a:spcPts val="585"/>
+              </a:spcAft>
+            </a:pPr>
+            <a:r>
+              <a:rPr sz="1300" b="0" i="0">
+                <a:solidFill>
+                  <a:srgbClr val="1C1B19"/>
+                </a:solidFill>
+                <a:latin typeface="Source Serif 4"/>
+              </a:rPr>
+              <a:t>Children of immigrants and students whose home language isn't English may switch how they talk, dress or act between home and school. It is a real skill, and it can be tiring when you never get a break. Mixed students don't have to pick a side.</a:t>
+            </a:r>
+          </a:p>
+          <a:p>
+            <a:pPr algn="l">
+              <a:spcAft>
+                <a:spcPts val="585"/>
+              </a:spcAft>
+            </a:pPr>
+            <a:r>
+              <a:rPr sz="1300" b="0" i="0">
+                <a:solidFill>
+                  <a:srgbClr val="1C1B19"/>
+                </a:solidFill>
+                <a:latin typeface="Source Serif 4"/>
+              </a:rPr>
+              <a:t/>
+            </a:r>
+          </a:p>
+        </p:txBody>
+      </p:sp>
+    </p:spTree>
+  </p:cSld>
+  <p:clrMapOvr>
+    <a:masterClrMapping/>
+  </p:clrMapOvr>
+</p:sld>
+</file>
+
+<file path=ppt/slides/slide12.xml><?xml version="1.0" encoding="utf-8"?>
+<p:sld xmlns:a="http://schemas.openxmlformats.org/drawingml/2006/main" xmlns:p="http://schemas.openxmlformats.org/presentationml/2006/main" xmlns:r="http://schemas.openxmlformats.org/officeDocument/2006/relationships" show="0">
+  <p:cSld>
+    <p:bg>
+      <p:bgPr>
+        <a:solidFill>
+          <a:srgbClr val="EEEBE4"/>
+        </a:solidFill>
+        <a:effectLst/>
+      </p:bgPr>
+    </p:bg>
+    <p:spTree>
+      <p:nvGrpSpPr>
+        <p:cNvPr id="1" name=""/>
+        <p:cNvGrpSpPr/>
+        <p:nvPr/>
+      </p:nvGrpSpPr>
+      <p:grpSpPr/>
+      <p:sp>
+        <p:nvSpPr>
+          <p:cNvPr id="2" name="Rectangle 1"/>
+          <p:cNvSpPr/>
+          <p:nvPr/>
+        </p:nvSpPr>
+        <p:spPr>
+          <a:xfrm>
+            <a:off x="0" y="0"/>
+            <a:ext cx="12191695" cy="384048"/>
+          </a:xfrm>
+          <a:prstGeom prst="rect">
+            <a:avLst/>
+          </a:prstGeom>
+          <a:solidFill>
+            <a:srgbClr val="0B2D5B"/>
+          </a:solidFill>
+          <a:ln>
+            <a:noFill/>
+          </a:ln>
+          <a:effectLst/>
+        </p:spPr>
+        <p:style>
+          <a:lnRef idx="1">
+            <a:schemeClr val="accent1"/>
+          </a:lnRef>
+          <a:fillRef idx="3">
+            <a:schemeClr val="accent1"/>
+          </a:fillRef>
+          <a:effectRef idx="2">
+            <a:schemeClr val="accent1"/>
+          </a:effectRef>
+          <a:fontRef idx="minor">
+            <a:schemeClr val="lt1"/>
+          </a:fontRef>
+        </p:style>
+        <p:txBody>
+          <a:bodyPr rtlCol="0" anchor="ctr"/>
+          <a:lstStyle/>
+          <a:p>
+            <a:pPr algn="ctr"/>
+          </a:p>
+        </p:txBody>
+      </p:sp>
+      <p:sp>
+        <p:nvSpPr>
+          <p:cNvPr id="3" name="TextBox 2"/>
+          <p:cNvSpPr txBox="1"/>
+          <p:nvPr/>
+        </p:nvSpPr>
+        <p:spPr>
+          <a:xfrm>
+            <a:off x="548640" y="100584"/>
+            <a:ext cx="10972800" cy="274320"/>
+          </a:xfrm>
+          <a:prstGeom prst="rect">
+            <a:avLst/>
+          </a:prstGeom>
+          <a:noFill/>
+        </p:spPr>
+        <p:txBody>
+          <a:bodyPr wrap="square" anchor="t" lIns="0" rIns="0" tIns="0" bIns="0">
+            <a:spAutoFit/>
+          </a:bodyPr>
+          <a:lstStyle/>
+          <a:p>
+            <a:pPr algn="l">
+              <a:spcAft>
+                <a:spcPts val="495"/>
+              </a:spcAft>
+            </a:pPr>
+            <a:r>
+              <a:rPr sz="1100" b="1" i="0">
+                <a:solidFill>
+                  <a:srgbClr val="FFFFFF"/>
+                </a:solidFill>
+                <a:latin typeface="Inter Tight"/>
+              </a:rPr>
+              <a:t>TEACHER PAGE  ·  skipped when you present  ·  Background</a:t>
+            </a:r>
+          </a:p>
+        </p:txBody>
+      </p:sp>
+      <p:sp>
+        <p:nvSpPr>
+          <p:cNvPr id="4" name="TextBox 3"/>
+          <p:cNvSpPr txBox="1"/>
+          <p:nvPr/>
+        </p:nvSpPr>
+        <p:spPr>
+          <a:xfrm>
+            <a:off x="548640" y="685800"/>
+            <a:ext cx="10972800" cy="640080"/>
+          </a:xfrm>
+          <a:prstGeom prst="rect">
+            <a:avLst/>
+          </a:prstGeom>
+          <a:noFill/>
+        </p:spPr>
+        <p:txBody>
+          <a:bodyPr wrap="square" anchor="t" lIns="0" rIns="0" tIns="0" bIns="0">
+            <a:spAutoFit/>
+          </a:bodyPr>
+          <a:lstStyle/>
+          <a:p>
+            <a:pPr algn="l">
+              <a:spcAft>
+                <a:spcPts val="1350"/>
+              </a:spcAft>
+            </a:pPr>
+            <a:r>
+              <a:rPr sz="3000" b="1" i="0">
+                <a:solidFill>
+                  <a:srgbClr val="1C1B19"/>
+                </a:solidFill>
+                <a:latin typeface="Source Serif 4"/>
+              </a:rPr>
+              <a:t>What the research says</a:t>
+            </a:r>
+          </a:p>
+        </p:txBody>
+      </p:sp>
+      <p:sp>
+        <p:nvSpPr>
+          <p:cNvPr id="5" name="TextBox 4"/>
+          <p:cNvSpPr txBox="1"/>
+          <p:nvPr/>
+        </p:nvSpPr>
+        <p:spPr>
+          <a:xfrm>
+            <a:off x="548640" y="1463040"/>
+            <a:ext cx="5394960" cy="4937760"/>
+          </a:xfrm>
+          <a:prstGeom prst="rect">
+            <a:avLst/>
+          </a:prstGeom>
+          <a:noFill/>
+        </p:spPr>
+        <p:txBody>
+          <a:bodyPr wrap="square" anchor="t" lIns="0" rIns="0" tIns="0" bIns="0">
+            <a:spAutoFit/>
+          </a:bodyPr>
+          <a:lstStyle/>
+          <a:p>
+            <a:pPr algn="l">
+              <a:spcAft>
+                <a:spcPts val="585"/>
+              </a:spcAft>
+            </a:pPr>
+            <a:r>
+              <a:rPr sz="1300" b="0" i="0">
+                <a:solidFill>
+                  <a:srgbClr val="1C1B19"/>
+                </a:solidFill>
+                <a:latin typeface="Source Serif 4"/>
+              </a:rPr>
+              <a:t>Psychologist Erik Erikson called building a sense of who you are and where you fit the central task of adolescence.</a:t>
+            </a:r>
+          </a:p>
+          <a:p>
+            <a:pPr algn="l">
+              <a:spcAft>
+                <a:spcPts val="585"/>
+              </a:spcAft>
+            </a:pPr>
+            <a:r>
+              <a:rPr sz="1050" b="0" i="0">
+                <a:solidFill>
+                  <a:srgbClr val="5D5A54"/>
+                </a:solidFill>
+                <a:latin typeface="Inter Tight"/>
+              </a:rPr>
+              <a:t>Erikson, Identity: Youth and Crisis, 1968</a:t>
+            </a:r>
+          </a:p>
+          <a:p>
+            <a:pPr algn="l">
+              <a:spcAft>
+                <a:spcPts val="585"/>
+              </a:spcAft>
+            </a:pPr>
+            <a:r>
+              <a:rPr sz="1300" b="0" i="0">
+                <a:solidFill>
+                  <a:srgbClr val="1C1B19"/>
+                </a:solidFill>
+                <a:latin typeface="Source Serif 4"/>
+              </a:rPr>
+              <a:t>Identity can be described by two questions: Have you explored your options? Have you committed to something? The answers make four common places to be, and a person can be in a different place for each part of themselves.</a:t>
+            </a:r>
+          </a:p>
+          <a:p>
+            <a:pPr algn="l">
+              <a:spcAft>
+                <a:spcPts val="585"/>
+              </a:spcAft>
+            </a:pPr>
+            <a:r>
+              <a:rPr sz="1050" b="0" i="0">
+                <a:solidFill>
+                  <a:srgbClr val="5D5A54"/>
+                </a:solidFill>
+                <a:latin typeface="Inter Tight"/>
+              </a:rPr>
+              <a:t>Marcia, Journal of Personality and Social Psychology, 1966</a:t>
+            </a:r>
+          </a:p>
+          <a:p>
+            <a:pPr algn="l">
+              <a:spcAft>
+                <a:spcPts val="585"/>
+              </a:spcAft>
+            </a:pPr>
+            <a:r>
+              <a:rPr sz="1300" b="0" i="0">
+                <a:solidFill>
+                  <a:srgbClr val="1C1B19"/>
+                </a:solidFill>
+                <a:latin typeface="Source Serif 4"/>
+              </a:rPr>
+              <a:t>Across 73 studies, the most common change from the teens into the 20s was from exploring to a commitment that fits. Moving forward was about twice as common as sliding back.</a:t>
+            </a:r>
+          </a:p>
+          <a:p>
+            <a:pPr algn="l">
+              <a:spcAft>
+                <a:spcPts val="585"/>
+              </a:spcAft>
+            </a:pPr>
+            <a:r>
+              <a:rPr sz="1050" b="0" i="0">
+                <a:solidFill>
+                  <a:srgbClr val="5D5A54"/>
+                </a:solidFill>
+                <a:latin typeface="Inter Tight"/>
+              </a:rPr>
+              <a:t>Kroger, Martinussen and Marcia, Journal of Adolescence, 2010</a:t>
+            </a:r>
+          </a:p>
+          <a:p>
+            <a:pPr algn="l">
+              <a:spcAft>
+                <a:spcPts val="585"/>
+              </a:spcAft>
+            </a:pPr>
+            <a:r>
+              <a:rPr sz="1300" b="0" i="0">
+                <a:solidFill>
+                  <a:srgbClr val="1C1B19"/>
+                </a:solidFill>
+                <a:latin typeface="Source Serif 4"/>
+              </a:rPr>
+              <a:t>Across 46 studies, minority youth who felt good about their ethnic or racial group had fewer symptoms of depression, better self-esteem, fewer problems with drugs and alcohol, and did better in school.</a:t>
+            </a:r>
+          </a:p>
+          <a:p>
+            <a:pPr algn="l">
+              <a:spcAft>
+                <a:spcPts val="585"/>
+              </a:spcAft>
+            </a:pPr>
+            <a:r>
+              <a:rPr sz="1050" b="0" i="0">
+                <a:solidFill>
+                  <a:srgbClr val="5D5A54"/>
+                </a:solidFill>
+                <a:latin typeface="Inter Tight"/>
+              </a:rPr>
+              <a:t>Rivas-Drake et al., Child Development, 2014</a:t>
+            </a:r>
+          </a:p>
+        </p:txBody>
+      </p:sp>
+      <p:sp>
+        <p:nvSpPr>
+          <p:cNvPr id="6" name="TextBox 5"/>
+          <p:cNvSpPr txBox="1"/>
+          <p:nvPr/>
+        </p:nvSpPr>
+        <p:spPr>
+          <a:xfrm>
+            <a:off x="6217920" y="1463040"/>
+            <a:ext cx="5394960" cy="4937760"/>
+          </a:xfrm>
+          <a:prstGeom prst="rect">
+            <a:avLst/>
+          </a:prstGeom>
+          <a:noFill/>
+        </p:spPr>
+        <p:txBody>
+          <a:bodyPr wrap="square" anchor="t" lIns="0" rIns="0" tIns="0" bIns="0">
+            <a:spAutoFit/>
+          </a:bodyPr>
+          <a:lstStyle/>
+          <a:p>
+            <a:pPr algn="l">
+              <a:spcAft>
+                <a:spcPts val="585"/>
+              </a:spcAft>
+            </a:pPr>
+            <a:r>
+              <a:rPr sz="1300" b="0" i="0">
+                <a:solidFill>
+                  <a:srgbClr val="1C1B19"/>
+                </a:solidFill>
+                <a:latin typeface="Source Serif 4"/>
+              </a:rPr>
+              <a:t>Ethnic and racial identity develops across adolescence and into young adulthood. Students of color often start this work early; white students in mostly white settings may start later.</a:t>
+            </a:r>
+          </a:p>
+          <a:p>
+            <a:pPr algn="l">
+              <a:spcAft>
+                <a:spcPts val="585"/>
+              </a:spcAft>
+            </a:pPr>
+            <a:r>
+              <a:rPr sz="1050" b="0" i="0">
+                <a:solidFill>
+                  <a:srgbClr val="5D5A54"/>
+                </a:solidFill>
+                <a:latin typeface="Inter Tight"/>
+              </a:rPr>
+              <a:t>Umaña-Taylor et al., Child Development, 2014</a:t>
+            </a:r>
+          </a:p>
+          <a:p>
+            <a:pPr algn="l">
+              <a:spcAft>
+                <a:spcPts val="585"/>
+              </a:spcAft>
+            </a:pPr>
+            <a:r>
+              <a:rPr sz="1300" b="0" i="0">
+                <a:solidFill>
+                  <a:srgbClr val="1C1B19"/>
+                </a:solidFill>
+                <a:latin typeface="Source Serif 4"/>
+              </a:rPr>
+              <a:t>People start building a life story about where they came from and where they're headed in adolescence. People who find growth or meaning in a hard stretch tend to do better than those who tell it as a dead end.</a:t>
+            </a:r>
+          </a:p>
+          <a:p>
+            <a:pPr algn="l">
+              <a:spcAft>
+                <a:spcPts val="585"/>
+              </a:spcAft>
+            </a:pPr>
+            <a:r>
+              <a:rPr sz="1050" b="0" i="0">
+                <a:solidFill>
+                  <a:srgbClr val="5D5A54"/>
+                </a:solidFill>
+                <a:latin typeface="Inter Tight"/>
+              </a:rPr>
+              <a:t>McAdams and McLean, Current Directions in Psychological Science, 2013</a:t>
+            </a:r>
+          </a:p>
+          <a:p>
+            <a:pPr algn="l">
+              <a:spcAft>
+                <a:spcPts val="585"/>
+              </a:spcAft>
+            </a:pPr>
+            <a:r>
+              <a:rPr sz="1300" b="0" i="0">
+                <a:solidFill>
+                  <a:srgbClr val="1C1B19"/>
+                </a:solidFill>
+                <a:latin typeface="Source Serif 4"/>
+              </a:rPr>
+              <a:t>In a study of about 19,000 adults ages 18 to 68, people at every age said they'd changed a lot in the past ten years and expected to change very little in the next ten: the "end of history illusion." It compared people of different ages, so it's a rough picture.</a:t>
+            </a:r>
+          </a:p>
+          <a:p>
+            <a:pPr algn="l">
+              <a:spcAft>
+                <a:spcPts val="585"/>
+              </a:spcAft>
+            </a:pPr>
+            <a:r>
+              <a:rPr sz="1050" b="0" i="0">
+                <a:solidFill>
+                  <a:srgbClr val="5D5A54"/>
+                </a:solidFill>
+                <a:latin typeface="Inter Tight"/>
+              </a:rPr>
+              <a:t>Quoidbach, Gilbert and Wilson, Science, 2013</a:t>
+            </a:r>
+          </a:p>
+        </p:txBody>
+      </p:sp>
+    </p:spTree>
+  </p:cSld>
+  <p:clrMapOvr>
+    <a:masterClrMapping/>
+  </p:clrMapOvr>
+</p:sld>
+</file>
+
+<file path=ppt/slides/slide2.xml><?xml version="1.0" encoding="utf-8"?>
+<p:sld xmlns:a="http://schemas.openxmlformats.org/drawingml/2006/main" xmlns:p="http://schemas.openxmlformats.org/presentationml/2006/main" xmlns:r="http://schemas.openxmlformats.org/officeDocument/2006/relationships">
+  <p:cSld>
+    <p:bg>
+      <p:bgPr>
+        <a:solidFill>
+          <a:srgbClr val="0B2D5B"/>
+        </a:solidFill>
+        <a:effectLst/>
+      </p:bgPr>
+    </p:bg>
+    <p:spTree>
+      <p:nvGrpSpPr>
+        <p:cNvPr id="1" name=""/>
+        <p:cNvGrpSpPr/>
+        <p:nvPr/>
+      </p:nvGrpSpPr>
+      <p:grpSpPr/>
+      <p:sp>
+        <p:nvSpPr>
+          <p:cNvPr id="2" name="Rectangle 1"/>
+          <p:cNvSpPr/>
+          <p:nvPr/>
+        </p:nvSpPr>
+        <p:spPr>
+          <a:xfrm>
+            <a:off x="548640" y="502920"/>
+            <a:ext cx="457200" cy="54864"/>
+          </a:xfrm>
+          <a:prstGeom prst="rect">
+            <a:avLst/>
+          </a:prstGeom>
+          <a:solidFill>
+            <a:srgbClr val="F47B20"/>
+          </a:solidFill>
+          <a:ln>
+            <a:noFill/>
+          </a:ln>
+          <a:effectLst/>
+        </p:spPr>
+        <p:style>
+          <a:lnRef idx="1">
+            <a:schemeClr val="accent1"/>
+          </a:lnRef>
+          <a:fillRef idx="3">
+            <a:schemeClr val="accent1"/>
+          </a:fillRef>
+          <a:effectRef idx="2">
+            <a:schemeClr val="accent1"/>
+          </a:effectRef>
+          <a:fontRef idx="minor">
+            <a:schemeClr val="lt1"/>
+          </a:fontRef>
+        </p:style>
+        <p:txBody>
+          <a:bodyPr rtlCol="0" anchor="ctr"/>
+          <a:lstStyle/>
+          <a:p>
+            <a:pPr algn="ctr"/>
+          </a:p>
+        </p:txBody>
+      </p:sp>
+      <p:sp>
+        <p:nvSpPr>
+          <p:cNvPr id="3" name="TextBox 2"/>
+          <p:cNvSpPr txBox="1"/>
+          <p:nvPr/>
+        </p:nvSpPr>
+        <p:spPr>
+          <a:xfrm>
+            <a:off x="1143000" y="393192"/>
+            <a:ext cx="8229600" cy="274320"/>
+          </a:xfrm>
+          <a:prstGeom prst="rect">
+            <a:avLst/>
+          </a:prstGeom>
+          <a:noFill/>
+        </p:spPr>
+        <p:txBody>
+          <a:bodyPr wrap="square" anchor="t" lIns="0" rIns="0" tIns="0" bIns="0">
+            <a:spAutoFit/>
+          </a:bodyPr>
+          <a:lstStyle/>
+          <a:p>
+            <a:pPr algn="l">
+              <a:spcAft>
+                <a:spcPts val="540"/>
+              </a:spcAft>
+            </a:pPr>
+            <a:r>
+              <a:rPr sz="1200" b="1" i="0">
+                <a:solidFill>
+                  <a:srgbClr val="5D5A54"/>
+                </a:solidFill>
+                <a:latin typeface="Inter Tight"/>
+              </a:rPr>
+              <a:t>UNDER CONSTRUCTION</a:t>
+            </a:r>
+          </a:p>
+        </p:txBody>
+      </p:sp>
+      <p:sp>
+        <p:nvSpPr>
+          <p:cNvPr id="4" name="TextBox 3"/>
+          <p:cNvSpPr txBox="1"/>
+          <p:nvPr/>
+        </p:nvSpPr>
+        <p:spPr>
+          <a:xfrm>
+            <a:off x="8229600" y="6400800"/>
+            <a:ext cx="3410712" cy="274320"/>
+          </a:xfrm>
+          <a:prstGeom prst="rect">
+            <a:avLst/>
+          </a:prstGeom>
+          <a:noFill/>
+        </p:spPr>
+        <p:txBody>
+          <a:bodyPr wrap="square" anchor="t" lIns="0" rIns="0" tIns="0" bIns="0">
+            <a:spAutoFit/>
+          </a:bodyPr>
+          <a:lstStyle/>
+          <a:p>
+            <a:pPr algn="r">
+              <a:spcAft>
+                <a:spcPts val="450"/>
+              </a:spcAft>
+            </a:pPr>
+            <a:r>
+              <a:rPr sz="1000" b="0" i="0">
+                <a:solidFill>
+                  <a:srgbClr val="5D5A54"/>
+                </a:solidFill>
+                <a:latin typeface="Inter Tight"/>
+              </a:rPr>
+              <a:t>Beaver Counseling</a:t>
+            </a:r>
+          </a:p>
+        </p:txBody>
+      </p:sp>
+      <p:sp>
+        <p:nvSpPr>
+          <p:cNvPr id="5" name="TextBox 4"/>
+          <p:cNvSpPr txBox="1"/>
+          <p:nvPr/>
+        </p:nvSpPr>
+        <p:spPr>
+          <a:xfrm>
+            <a:off x="822960" y="2011680"/>
+            <a:ext cx="10515600" cy="1463040"/>
+          </a:xfrm>
+          <a:prstGeom prst="rect">
+            <a:avLst/>
+          </a:prstGeom>
+          <a:noFill/>
+        </p:spPr>
+        <p:txBody>
+          <a:bodyPr wrap="square" anchor="b" lIns="0" rIns="0" tIns="0" bIns="0">
+            <a:spAutoFit/>
+          </a:bodyPr>
+          <a:lstStyle/>
+          <a:p>
+            <a:pPr algn="l">
+              <a:spcAft>
+                <a:spcPts val="2700"/>
+              </a:spcAft>
+            </a:pPr>
+            <a:r>
+              <a:rPr sz="6000" b="1" i="0">
+                <a:solidFill>
+                  <a:srgbClr val="FFFFFF"/>
+                </a:solidFill>
+                <a:latin typeface="Source Serif 4"/>
+              </a:rPr>
+              <a:t>Under Construction</a:t>
+            </a:r>
+          </a:p>
+        </p:txBody>
+      </p:sp>
+      <p:sp>
+        <p:nvSpPr>
+          <p:cNvPr id="6" name="TextBox 5"/>
+          <p:cNvSpPr txBox="1"/>
+          <p:nvPr/>
+        </p:nvSpPr>
+        <p:spPr>
+          <a:xfrm>
+            <a:off x="822960" y="3611880"/>
+            <a:ext cx="10515600" cy="914400"/>
+          </a:xfrm>
+          <a:prstGeom prst="rect">
+            <a:avLst/>
+          </a:prstGeom>
+          <a:noFill/>
+        </p:spPr>
+        <p:txBody>
+          <a:bodyPr wrap="square" anchor="t" lIns="0" rIns="0" tIns="0" bIns="0">
+            <a:spAutoFit/>
+          </a:bodyPr>
+          <a:lstStyle/>
+          <a:p>
+            <a:pPr algn="l">
+              <a:spcAft>
+                <a:spcPts val="1080"/>
+              </a:spcAft>
+            </a:pPr>
+            <a:r>
+              <a:rPr sz="2400" b="0" i="1">
+                <a:solidFill>
+                  <a:srgbClr val="E8E4DA"/>
+                </a:solidFill>
+                <a:latin typeface="Source Serif 4"/>
+              </a:rPr>
+              <a:t>Everyone asks what you want to be. Hardly anyone asks who.</a:t>
+            </a:r>
+          </a:p>
+        </p:txBody>
+      </p:sp>
+      <p:sp>
+        <p:nvSpPr>
+          <p:cNvPr id="7" name="TextBox 6"/>
+          <p:cNvSpPr txBox="1"/>
+          <p:nvPr/>
+        </p:nvSpPr>
+        <p:spPr>
+          <a:xfrm>
+            <a:off x="822960" y="6035040"/>
+            <a:ext cx="7315200" cy="365760"/>
+          </a:xfrm>
+          <a:prstGeom prst="rect">
+            <a:avLst/>
+          </a:prstGeom>
+          <a:noFill/>
+        </p:spPr>
+        <p:txBody>
+          <a:bodyPr wrap="square" anchor="t" lIns="0" rIns="0" tIns="0" bIns="0">
+            <a:spAutoFit/>
+          </a:bodyPr>
+          <a:lstStyle/>
+          <a:p>
+            <a:pPr algn="l">
+              <a:spcAft>
+                <a:spcPts val="585"/>
+              </a:spcAft>
+            </a:pPr>
+            <a:r>
+              <a:rPr sz="1300" b="0" i="0">
+                <a:solidFill>
+                  <a:srgbClr val="E8E4DA"/>
+                </a:solidFill>
+                <a:latin typeface="Inter Tight"/>
+              </a:rPr>
+              <a:t>Beaver Upper School · Counseling</a:t>
+            </a:r>
+          </a:p>
+        </p:txBody>
+      </p:sp>
+    </p:spTree>
+  </p:cSld>
+  <p:clrMapOvr>
+    <a:masterClrMapping/>
+  </p:clrMapOvr>
+</p:sld>
+</file>
+
+<file path=ppt/slides/slide3.xml><?xml version="1.0" encoding="utf-8"?>
 <p:sld xmlns:a="http://schemas.openxmlformats.org/drawingml/2006/main" xmlns:p="http://schemas.openxmlformats.org/presentationml/2006/main" xmlns:r="http://schemas.openxmlformats.org/officeDocument/2006/relationships">
   <p:cSld>
     <p:bg>
@@ -4653,7 +6141,7 @@
                 </a:solidFill>
                 <a:latin typeface="Inter Tight"/>
               </a:rPr>
-              <a:t>THREE MOMENTS</a:t>
+              <a:t>FOUR CORNERS</a:t>
             </a:r>
           </a:p>
         </p:txBody>
@@ -4699,64 +6187,23 @@
       </p:sp>
       <p:sp>
         <p:nvSpPr>
-          <p:cNvPr id="5" name="TextBox 4"/>
-          <p:cNvSpPr txBox="1"/>
-          <p:nvPr/>
-        </p:nvSpPr>
-        <p:spPr>
-          <a:xfrm>
-            <a:off x="822960" y="1005840"/>
-            <a:ext cx="10515600" cy="914400"/>
-          </a:xfrm>
-          <a:prstGeom prst="rect">
-            <a:avLst/>
-          </a:prstGeom>
-          <a:noFill/>
-        </p:spPr>
-        <p:txBody>
-          <a:bodyPr wrap="square" anchor="t" lIns="0" rIns="0" tIns="0" bIns="0">
-            <a:spAutoFit/>
-          </a:bodyPr>
-          <a:lstStyle/>
-          <a:p>
-            <a:pPr algn="l">
-              <a:spcAft>
-                <a:spcPts val="1530"/>
-              </a:spcAft>
-            </a:pPr>
-            <a:r>
-              <a:rPr sz="3400" b="1" i="0">
-                <a:solidFill>
-                  <a:srgbClr val="1C1B19"/>
-                </a:solidFill>
-                <a:latin typeface="Source Serif 4"/>
-              </a:rPr>
-              <a:t>What would you actually say?</a:t>
-            </a:r>
-          </a:p>
-        </p:txBody>
-      </p:sp>
-      <p:sp>
-        <p:nvSpPr>
-          <p:cNvPr id="6" name="Rectangle 5"/>
+          <p:cNvPr id="5" name="Rectangle 4"/>
           <p:cNvSpPr/>
           <p:nvPr/>
         </p:nvSpPr>
         <p:spPr>
           <a:xfrm>
-            <a:off x="822960" y="2103120"/>
-            <a:ext cx="3322320" cy="3840480"/>
+            <a:off x="822960" y="1371600"/>
+            <a:ext cx="73152" cy="3566160"/>
           </a:xfrm>
           <a:prstGeom prst="rect">
             <a:avLst/>
           </a:prstGeom>
           <a:solidFill>
-            <a:srgbClr val="FFFFFF"/>
+            <a:srgbClr val="F47B20"/>
           </a:solidFill>
-          <a:ln w="15875">
-            <a:solidFill>
-              <a:srgbClr val="D8D2C6"/>
-            </a:solidFill>
+          <a:ln>
+            <a:noFill/>
           </a:ln>
           <a:effectLst/>
         </p:spPr>
@@ -4784,14 +6231,14 @@
       </p:sp>
       <p:sp>
         <p:nvSpPr>
-          <p:cNvPr id="7" name="TextBox 6"/>
+          <p:cNvPr id="6" name="TextBox 5"/>
           <p:cNvSpPr txBox="1"/>
           <p:nvPr/>
         </p:nvSpPr>
         <p:spPr>
           <a:xfrm>
-            <a:off x="1051560" y="2286000"/>
-            <a:ext cx="2865120" cy="365760"/>
+            <a:off x="1188720" y="1371600"/>
+            <a:ext cx="10058400" cy="3566160"/>
           </a:xfrm>
           <a:prstGeom prst="rect">
             <a:avLst/>
@@ -4799,38 +6246,38 @@
           <a:noFill/>
         </p:spPr>
         <p:txBody>
-          <a:bodyPr wrap="square" anchor="t" lIns="0" rIns="0" tIns="0" bIns="0">
+          <a:bodyPr wrap="square" anchor="ctr" lIns="0" rIns="0" tIns="0" bIns="0">
             <a:spAutoFit/>
           </a:bodyPr>
           <a:lstStyle/>
           <a:p>
             <a:pPr algn="l">
               <a:spcAft>
-                <a:spcPts val="585"/>
-              </a:spcAft>
-            </a:pPr>
-            <a:r>
-              <a:rPr sz="1300" b="1" i="0">
-                <a:solidFill>
-                  <a:srgbClr val="0B2D5B"/>
-                </a:solidFill>
-                <a:latin typeface="Inter Tight"/>
-              </a:rPr>
-              <a:t>NADIA</a:t>
-            </a:r>
-          </a:p>
-        </p:txBody>
-      </p:sp>
-      <p:sp>
-        <p:nvSpPr>
-          <p:cNvPr id="8" name="TextBox 7"/>
+                <a:spcPts val="1800"/>
+              </a:spcAft>
+            </a:pPr>
+            <a:r>
+              <a:rPr sz="4000" b="0" i="1">
+                <a:solidFill>
+                  <a:srgbClr val="1C1B19"/>
+                </a:solidFill>
+                <a:latin typeface="Source Serif 4"/>
+              </a:rPr>
+              <a:t>"You should know who you are by graduation."</a:t>
+            </a:r>
+          </a:p>
+        </p:txBody>
+      </p:sp>
+      <p:sp>
+        <p:nvSpPr>
+          <p:cNvPr id="7" name="TextBox 6"/>
           <p:cNvSpPr txBox="1"/>
           <p:nvPr/>
         </p:nvSpPr>
         <p:spPr>
           <a:xfrm>
-            <a:off x="1051560" y="2743200"/>
-            <a:ext cx="2865120" cy="3017520"/>
+            <a:off x="1188720" y="5120640"/>
+            <a:ext cx="10058400" cy="914400"/>
           </a:xfrm>
           <a:prstGeom prst="rect">
             <a:avLst/>
@@ -4851,259 +6298,11 @@
             <a:r>
               <a:rPr sz="1800" b="0" i="0">
                 <a:solidFill>
-                  <a:srgbClr val="1C1B19"/>
-                </a:solidFill>
-                <a:latin typeface="Source Serif 4"/>
-              </a:rPr>
-              <a:t>Her family has always said she'll be pre-med like her older sister. She's starting to love design.</a:t>
-            </a:r>
-          </a:p>
-        </p:txBody>
-      </p:sp>
-      <p:sp>
-        <p:nvSpPr>
-          <p:cNvPr id="9" name="Rectangle 8"/>
-          <p:cNvSpPr/>
-          <p:nvPr/>
-        </p:nvSpPr>
-        <p:spPr>
-          <a:xfrm>
-            <a:off x="4419600" y="2103120"/>
-            <a:ext cx="3322320" cy="3840480"/>
-          </a:xfrm>
-          <a:prstGeom prst="rect">
-            <a:avLst/>
-          </a:prstGeom>
-          <a:solidFill>
-            <a:srgbClr val="FFFFFF"/>
-          </a:solidFill>
-          <a:ln w="15875">
-            <a:solidFill>
-              <a:srgbClr val="D8D2C6"/>
-            </a:solidFill>
-          </a:ln>
-          <a:effectLst/>
-        </p:spPr>
-        <p:style>
-          <a:lnRef idx="1">
-            <a:schemeClr val="accent1"/>
-          </a:lnRef>
-          <a:fillRef idx="3">
-            <a:schemeClr val="accent1"/>
-          </a:fillRef>
-          <a:effectRef idx="2">
-            <a:schemeClr val="accent1"/>
-          </a:effectRef>
-          <a:fontRef idx="minor">
-            <a:schemeClr val="lt1"/>
-          </a:fontRef>
-        </p:style>
-        <p:txBody>
-          <a:bodyPr rtlCol="0" anchor="ctr"/>
-          <a:lstStyle/>
-          <a:p>
-            <a:pPr algn="ctr"/>
-          </a:p>
-        </p:txBody>
-      </p:sp>
-      <p:sp>
-        <p:nvSpPr>
-          <p:cNvPr id="10" name="TextBox 9"/>
-          <p:cNvSpPr txBox="1"/>
-          <p:nvPr/>
-        </p:nvSpPr>
-        <p:spPr>
-          <a:xfrm>
-            <a:off x="4648200" y="2286000"/>
-            <a:ext cx="2865120" cy="365760"/>
-          </a:xfrm>
-          <a:prstGeom prst="rect">
-            <a:avLst/>
-          </a:prstGeom>
-          <a:noFill/>
-        </p:spPr>
-        <p:txBody>
-          <a:bodyPr wrap="square" anchor="t" lIns="0" rIns="0" tIns="0" bIns="0">
-            <a:spAutoFit/>
-          </a:bodyPr>
-          <a:lstStyle/>
-          <a:p>
-            <a:pPr algn="l">
-              <a:spcAft>
-                <a:spcPts val="585"/>
-              </a:spcAft>
-            </a:pPr>
-            <a:r>
-              <a:rPr sz="1300" b="1" i="0">
-                <a:solidFill>
-                  <a:srgbClr val="0B2D5B"/>
+                  <a:srgbClr val="5D5A54"/>
                 </a:solidFill>
                 <a:latin typeface="Inter Tight"/>
               </a:rPr>
-              <a:t>GABE</a:t>
-            </a:r>
-          </a:p>
-        </p:txBody>
-      </p:sp>
-      <p:sp>
-        <p:nvSpPr>
-          <p:cNvPr id="11" name="TextBox 10"/>
-          <p:cNvSpPr txBox="1"/>
-          <p:nvPr/>
-        </p:nvSpPr>
-        <p:spPr>
-          <a:xfrm>
-            <a:off x="4648200" y="2743200"/>
-            <a:ext cx="2865120" cy="3017520"/>
-          </a:xfrm>
-          <a:prstGeom prst="rect">
-            <a:avLst/>
-          </a:prstGeom>
-          <a:noFill/>
-        </p:spPr>
-        <p:txBody>
-          <a:bodyPr wrap="square" anchor="t" lIns="0" rIns="0" tIns="0" bIns="0">
-            <a:spAutoFit/>
-          </a:bodyPr>
-          <a:lstStyle/>
-          <a:p>
-            <a:pPr algn="l">
-              <a:spcAft>
-                <a:spcPts val="810"/>
-              </a:spcAft>
-            </a:pPr>
-            <a:r>
-              <a:rPr sz="1800" b="0" i="0">
-                <a:solidFill>
-                  <a:srgbClr val="1C1B19"/>
-                </a:solidFill>
-                <a:latin typeface="Source Serif 4"/>
-              </a:rPr>
-              <a:t>A classmate asks where he's from. "Ohio." "No, where are you really from?"</a:t>
-            </a:r>
-          </a:p>
-        </p:txBody>
-      </p:sp>
-      <p:sp>
-        <p:nvSpPr>
-          <p:cNvPr id="12" name="Rectangle 11"/>
-          <p:cNvSpPr/>
-          <p:nvPr/>
-        </p:nvSpPr>
-        <p:spPr>
-          <a:xfrm>
-            <a:off x="8016239" y="2103120"/>
-            <a:ext cx="3322320" cy="3840480"/>
-          </a:xfrm>
-          <a:prstGeom prst="rect">
-            <a:avLst/>
-          </a:prstGeom>
-          <a:solidFill>
-            <a:srgbClr val="FFFFFF"/>
-          </a:solidFill>
-          <a:ln w="15875">
-            <a:solidFill>
-              <a:srgbClr val="D8D2C6"/>
-            </a:solidFill>
-          </a:ln>
-          <a:effectLst/>
-        </p:spPr>
-        <p:style>
-          <a:lnRef idx="1">
-            <a:schemeClr val="accent1"/>
-          </a:lnRef>
-          <a:fillRef idx="3">
-            <a:schemeClr val="accent1"/>
-          </a:fillRef>
-          <a:effectRef idx="2">
-            <a:schemeClr val="accent1"/>
-          </a:effectRef>
-          <a:fontRef idx="minor">
-            <a:schemeClr val="lt1"/>
-          </a:fontRef>
-        </p:style>
-        <p:txBody>
-          <a:bodyPr rtlCol="0" anchor="ctr"/>
-          <a:lstStyle/>
-          <a:p>
-            <a:pPr algn="ctr"/>
-          </a:p>
-        </p:txBody>
-      </p:sp>
-      <p:sp>
-        <p:nvSpPr>
-          <p:cNvPr id="13" name="TextBox 12"/>
-          <p:cNvSpPr txBox="1"/>
-          <p:nvPr/>
-        </p:nvSpPr>
-        <p:spPr>
-          <a:xfrm>
-            <a:off x="8244839" y="2286000"/>
-            <a:ext cx="2865120" cy="365760"/>
-          </a:xfrm>
-          <a:prstGeom prst="rect">
-            <a:avLst/>
-          </a:prstGeom>
-          <a:noFill/>
-        </p:spPr>
-        <p:txBody>
-          <a:bodyPr wrap="square" anchor="t" lIns="0" rIns="0" tIns="0" bIns="0">
-            <a:spAutoFit/>
-          </a:bodyPr>
-          <a:lstStyle/>
-          <a:p>
-            <a:pPr algn="l">
-              <a:spcAft>
-                <a:spcPts val="585"/>
-              </a:spcAft>
-            </a:pPr>
-            <a:r>
-              <a:rPr sz="1300" b="1" i="0">
-                <a:solidFill>
-                  <a:srgbClr val="0B2D5B"/>
-                </a:solidFill>
-                <a:latin typeface="Inter Tight"/>
-              </a:rPr>
-              <a:t>SAM</a:t>
-            </a:r>
-          </a:p>
-        </p:txBody>
-      </p:sp>
-      <p:sp>
-        <p:nvSpPr>
-          <p:cNvPr id="14" name="TextBox 13"/>
-          <p:cNvSpPr txBox="1"/>
-          <p:nvPr/>
-        </p:nvSpPr>
-        <p:spPr>
-          <a:xfrm>
-            <a:off x="8244839" y="2743200"/>
-            <a:ext cx="2865120" cy="3017520"/>
-          </a:xfrm>
-          <a:prstGeom prst="rect">
-            <a:avLst/>
-          </a:prstGeom>
-          <a:noFill/>
-        </p:spPr>
-        <p:txBody>
-          <a:bodyPr wrap="square" anchor="t" lIns="0" rIns="0" tIns="0" bIns="0">
-            <a:spAutoFit/>
-          </a:bodyPr>
-          <a:lstStyle/>
-          <a:p>
-            <a:pPr algn="l">
-              <a:spcAft>
-                <a:spcPts val="810"/>
-              </a:spcAft>
-            </a:pPr>
-            <a:r>
-              <a:rPr sz="1800" b="0" i="0">
-                <a:solidFill>
-                  <a:srgbClr val="1C1B19"/>
-                </a:solidFill>
-                <a:latin typeface="Source Serif 4"/>
-              </a:rPr>
-              <a:t>A friend tells Sam, nervously, that they're questioning their gender.</a:t>
+              <a:t>Point to a corner: agree, disagree, not sure, or it depends.</a:t>
             </a:r>
           </a:p>
         </p:txBody>
@@ -5116,7 +6315,7 @@
 </p:sld>
 </file>
 
-<file path=ppt/slides/slide11.xml><?xml version="1.0" encoding="utf-8"?>
+<file path=ppt/slides/slide4.xml><?xml version="1.0" encoding="utf-8"?>
 <p:sld xmlns:a="http://schemas.openxmlformats.org/drawingml/2006/main" xmlns:p="http://schemas.openxmlformats.org/presentationml/2006/main" xmlns:r="http://schemas.openxmlformats.org/officeDocument/2006/relationships">
   <p:cSld>
     <p:bg>
@@ -5212,7 +6411,7 @@
                 </a:solidFill>
                 <a:latin typeface="Inter Tight"/>
               </a:rPr>
-              <a:t>BEFORE YOU GO</a:t>
+              <a:t>EXPLORE, THEN COMMIT</a:t>
             </a:r>
           </a:p>
         </p:txBody>
@@ -5264,8 +6463,8 @@
         </p:nvSpPr>
         <p:spPr>
           <a:xfrm>
-            <a:off x="822960" y="1188720"/>
-            <a:ext cx="10515600" cy="914400"/>
+            <a:off x="822960" y="1005840"/>
+            <a:ext cx="10515600" cy="1097280"/>
           </a:xfrm>
           <a:prstGeom prst="rect">
             <a:avLst/>
@@ -5290,7 +6489,7 @@
                 </a:solidFill>
                 <a:latin typeface="Source Serif 4"/>
               </a:rPr>
-              <a:t>Explore on purpose. Commit when it fits.</a:t>
+              <a:t>Four common places to be</a:t>
             </a:r>
           </a:p>
         </p:txBody>
@@ -5303,8 +6502,8 @@
         </p:nvSpPr>
         <p:spPr>
           <a:xfrm>
-            <a:off x="822960" y="2286000"/>
-            <a:ext cx="10515600" cy="1463040"/>
+            <a:off x="822960" y="2194560"/>
+            <a:ext cx="548640" cy="1005840"/>
           </a:xfrm>
           <a:prstGeom prst="rect">
             <a:avLst/>
@@ -5319,42 +6518,403 @@
           <a:p>
             <a:pPr algn="l">
               <a:spcAft>
-                <a:spcPts val="1080"/>
-              </a:spcAft>
-            </a:pPr>
-            <a:r>
-              <a:rPr sz="2400" b="0" i="0">
+                <a:spcPts val="1170"/>
+              </a:spcAft>
+            </a:pPr>
+            <a:r>
+              <a:rPr sz="2600" b="1" i="0">
+                <a:solidFill>
+                  <a:srgbClr val="F47B20"/>
+                </a:solidFill>
+                <a:latin typeface="Source Serif 4"/>
+              </a:rPr>
+              <a:t>•</a:t>
+            </a:r>
+          </a:p>
+        </p:txBody>
+      </p:sp>
+      <p:sp>
+        <p:nvSpPr>
+          <p:cNvPr id="7" name="TextBox 6"/>
+          <p:cNvSpPr txBox="1"/>
+          <p:nvPr/>
+        </p:nvSpPr>
+        <p:spPr>
+          <a:xfrm>
+            <a:off x="1463040" y="2231136"/>
+            <a:ext cx="9875520" cy="1005840"/>
+          </a:xfrm>
+          <a:prstGeom prst="rect">
+            <a:avLst/>
+          </a:prstGeom>
+          <a:noFill/>
+        </p:spPr>
+        <p:txBody>
+          <a:bodyPr wrap="square" anchor="t" lIns="0" rIns="0" tIns="0" bIns="0">
+            <a:spAutoFit/>
+          </a:bodyPr>
+          <a:lstStyle/>
+          <a:p>
+            <a:pPr algn="l">
+              <a:spcAft>
+                <a:spcPts val="945"/>
+              </a:spcAft>
+            </a:pPr>
+            <a:r>
+              <a:rPr sz="2100" b="1" i="0">
                 <a:solidFill>
                   <a:srgbClr val="1C1B19"/>
                 </a:solidFill>
                 <a:latin typeface="Source Serif 4"/>
               </a:rPr>
-              <a:t>Write one thing you'll try that's easy to undo: an elective, a club, a new genre, a question for an elder.</a:t>
-            </a:r>
-          </a:p>
-        </p:txBody>
-      </p:sp>
-      <p:sp>
-        <p:nvSpPr>
-          <p:cNvPr id="7" name="Rectangle 6"/>
+              <a:t>Not exploring, not committed.</a:t>
+            </a:r>
+          </a:p>
+          <a:p>
+            <a:pPr algn="l">
+              <a:spcAft>
+                <a:spcPts val="945"/>
+              </a:spcAft>
+            </a:pPr>
+            <a:r>
+              <a:rPr sz="1600" b="0" i="0">
+                <a:solidFill>
+                  <a:srgbClr val="5D5A54"/>
+                </a:solidFill>
+                <a:latin typeface="Source Serif 4"/>
+              </a:rPr>
+              <a:t>"I haven't really thought about it."</a:t>
+            </a:r>
+          </a:p>
+        </p:txBody>
+      </p:sp>
+      <p:sp>
+        <p:nvSpPr>
+          <p:cNvPr id="8" name="TextBox 7"/>
+          <p:cNvSpPr txBox="1"/>
+          <p:nvPr/>
+        </p:nvSpPr>
+        <p:spPr>
+          <a:xfrm>
+            <a:off x="822960" y="3200400"/>
+            <a:ext cx="548640" cy="1005840"/>
+          </a:xfrm>
+          <a:prstGeom prst="rect">
+            <a:avLst/>
+          </a:prstGeom>
+          <a:noFill/>
+        </p:spPr>
+        <p:txBody>
+          <a:bodyPr wrap="square" anchor="t" lIns="0" rIns="0" tIns="0" bIns="0">
+            <a:spAutoFit/>
+          </a:bodyPr>
+          <a:lstStyle/>
+          <a:p>
+            <a:pPr algn="l">
+              <a:spcAft>
+                <a:spcPts val="1170"/>
+              </a:spcAft>
+            </a:pPr>
+            <a:r>
+              <a:rPr sz="2600" b="1" i="0">
+                <a:solidFill>
+                  <a:srgbClr val="F47B20"/>
+                </a:solidFill>
+                <a:latin typeface="Source Serif 4"/>
+              </a:rPr>
+              <a:t>•</a:t>
+            </a:r>
+          </a:p>
+        </p:txBody>
+      </p:sp>
+      <p:sp>
+        <p:nvSpPr>
+          <p:cNvPr id="9" name="TextBox 8"/>
+          <p:cNvSpPr txBox="1"/>
+          <p:nvPr/>
+        </p:nvSpPr>
+        <p:spPr>
+          <a:xfrm>
+            <a:off x="1463040" y="3236976"/>
+            <a:ext cx="9875520" cy="1005840"/>
+          </a:xfrm>
+          <a:prstGeom prst="rect">
+            <a:avLst/>
+          </a:prstGeom>
+          <a:noFill/>
+        </p:spPr>
+        <p:txBody>
+          <a:bodyPr wrap="square" anchor="t" lIns="0" rIns="0" tIns="0" bIns="0">
+            <a:spAutoFit/>
+          </a:bodyPr>
+          <a:lstStyle/>
+          <a:p>
+            <a:pPr algn="l">
+              <a:spcAft>
+                <a:spcPts val="945"/>
+              </a:spcAft>
+            </a:pPr>
+            <a:r>
+              <a:rPr sz="2100" b="1" i="0">
+                <a:solidFill>
+                  <a:srgbClr val="1C1B19"/>
+                </a:solidFill>
+                <a:latin typeface="Source Serif 4"/>
+              </a:rPr>
+              <a:t>Committed without exploring.</a:t>
+            </a:r>
+          </a:p>
+          <a:p>
+            <a:pPr algn="l">
+              <a:spcAft>
+                <a:spcPts val="945"/>
+              </a:spcAft>
+            </a:pPr>
+            <a:r>
+              <a:rPr sz="1600" b="0" i="0">
+                <a:solidFill>
+                  <a:srgbClr val="5D5A54"/>
+                </a:solidFill>
+                <a:latin typeface="Source Serif 4"/>
+              </a:rPr>
+              <a:t>"It's what I was handed."</a:t>
+            </a:r>
+          </a:p>
+        </p:txBody>
+      </p:sp>
+      <p:sp>
+        <p:nvSpPr>
+          <p:cNvPr id="10" name="TextBox 9"/>
+          <p:cNvSpPr txBox="1"/>
+          <p:nvPr/>
+        </p:nvSpPr>
+        <p:spPr>
+          <a:xfrm>
+            <a:off x="822960" y="4206240"/>
+            <a:ext cx="548640" cy="1005840"/>
+          </a:xfrm>
+          <a:prstGeom prst="rect">
+            <a:avLst/>
+          </a:prstGeom>
+          <a:noFill/>
+        </p:spPr>
+        <p:txBody>
+          <a:bodyPr wrap="square" anchor="t" lIns="0" rIns="0" tIns="0" bIns="0">
+            <a:spAutoFit/>
+          </a:bodyPr>
+          <a:lstStyle/>
+          <a:p>
+            <a:pPr algn="l">
+              <a:spcAft>
+                <a:spcPts val="1170"/>
+              </a:spcAft>
+            </a:pPr>
+            <a:r>
+              <a:rPr sz="2600" b="1" i="0">
+                <a:solidFill>
+                  <a:srgbClr val="F47B20"/>
+                </a:solidFill>
+                <a:latin typeface="Source Serif 4"/>
+              </a:rPr>
+              <a:t>•</a:t>
+            </a:r>
+          </a:p>
+        </p:txBody>
+      </p:sp>
+      <p:sp>
+        <p:nvSpPr>
+          <p:cNvPr id="11" name="TextBox 10"/>
+          <p:cNvSpPr txBox="1"/>
+          <p:nvPr/>
+        </p:nvSpPr>
+        <p:spPr>
+          <a:xfrm>
+            <a:off x="1463040" y="4242816"/>
+            <a:ext cx="9875520" cy="1005840"/>
+          </a:xfrm>
+          <a:prstGeom prst="rect">
+            <a:avLst/>
+          </a:prstGeom>
+          <a:noFill/>
+        </p:spPr>
+        <p:txBody>
+          <a:bodyPr wrap="square" anchor="t" lIns="0" rIns="0" tIns="0" bIns="0">
+            <a:spAutoFit/>
+          </a:bodyPr>
+          <a:lstStyle/>
+          <a:p>
+            <a:pPr algn="l">
+              <a:spcAft>
+                <a:spcPts val="945"/>
+              </a:spcAft>
+            </a:pPr>
+            <a:r>
+              <a:rPr sz="2100" b="1" i="0">
+                <a:solidFill>
+                  <a:srgbClr val="1C1B19"/>
+                </a:solidFill>
+                <a:latin typeface="Source Serif 4"/>
+              </a:rPr>
+              <a:t>Exploring, not committed yet.</a:t>
+            </a:r>
+          </a:p>
+          <a:p>
+            <a:pPr algn="l">
+              <a:spcAft>
+                <a:spcPts val="945"/>
+              </a:spcAft>
+            </a:pPr>
+            <a:r>
+              <a:rPr sz="1600" b="0" i="0">
+                <a:solidFill>
+                  <a:srgbClr val="5D5A54"/>
+                </a:solidFill>
+                <a:latin typeface="Source Serif 4"/>
+              </a:rPr>
+              <a:t>"I'm trying things on."</a:t>
+            </a:r>
+          </a:p>
+        </p:txBody>
+      </p:sp>
+      <p:sp>
+        <p:nvSpPr>
+          <p:cNvPr id="12" name="TextBox 11"/>
+          <p:cNvSpPr txBox="1"/>
+          <p:nvPr/>
+        </p:nvSpPr>
+        <p:spPr>
+          <a:xfrm>
+            <a:off x="822960" y="5212080"/>
+            <a:ext cx="548640" cy="1005840"/>
+          </a:xfrm>
+          <a:prstGeom prst="rect">
+            <a:avLst/>
+          </a:prstGeom>
+          <a:noFill/>
+        </p:spPr>
+        <p:txBody>
+          <a:bodyPr wrap="square" anchor="t" lIns="0" rIns="0" tIns="0" bIns="0">
+            <a:spAutoFit/>
+          </a:bodyPr>
+          <a:lstStyle/>
+          <a:p>
+            <a:pPr algn="l">
+              <a:spcAft>
+                <a:spcPts val="1170"/>
+              </a:spcAft>
+            </a:pPr>
+            <a:r>
+              <a:rPr sz="2600" b="1" i="0">
+                <a:solidFill>
+                  <a:srgbClr val="F47B20"/>
+                </a:solidFill>
+                <a:latin typeface="Source Serif 4"/>
+              </a:rPr>
+              <a:t>•</a:t>
+            </a:r>
+          </a:p>
+        </p:txBody>
+      </p:sp>
+      <p:sp>
+        <p:nvSpPr>
+          <p:cNvPr id="13" name="TextBox 12"/>
+          <p:cNvSpPr txBox="1"/>
+          <p:nvPr/>
+        </p:nvSpPr>
+        <p:spPr>
+          <a:xfrm>
+            <a:off x="1463040" y="5248656"/>
+            <a:ext cx="9875520" cy="1005840"/>
+          </a:xfrm>
+          <a:prstGeom prst="rect">
+            <a:avLst/>
+          </a:prstGeom>
+          <a:noFill/>
+        </p:spPr>
+        <p:txBody>
+          <a:bodyPr wrap="square" anchor="t" lIns="0" rIns="0" tIns="0" bIns="0">
+            <a:spAutoFit/>
+          </a:bodyPr>
+          <a:lstStyle/>
+          <a:p>
+            <a:pPr algn="l">
+              <a:spcAft>
+                <a:spcPts val="945"/>
+              </a:spcAft>
+            </a:pPr>
+            <a:r>
+              <a:rPr sz="2100" b="1" i="0">
+                <a:solidFill>
+                  <a:srgbClr val="1C1B19"/>
+                </a:solidFill>
+                <a:latin typeface="Source Serif 4"/>
+              </a:rPr>
+              <a:t>Explored, then committed.</a:t>
+            </a:r>
+          </a:p>
+          <a:p>
+            <a:pPr algn="l">
+              <a:spcAft>
+                <a:spcPts val="945"/>
+              </a:spcAft>
+            </a:pPr>
+            <a:r>
+              <a:rPr sz="1600" b="0" i="0">
+                <a:solidFill>
+                  <a:srgbClr val="5D5A54"/>
+                </a:solidFill>
+                <a:latin typeface="Source Serif 4"/>
+              </a:rPr>
+              <a:t>"I looked, and this fits me."</a:t>
+            </a:r>
+          </a:p>
+        </p:txBody>
+      </p:sp>
+    </p:spTree>
+  </p:cSld>
+  <p:clrMapOvr>
+    <a:masterClrMapping/>
+  </p:clrMapOvr>
+</p:sld>
+</file>
+
+<file path=ppt/slides/slide5.xml><?xml version="1.0" encoding="utf-8"?>
+<p:sld xmlns:a="http://schemas.openxmlformats.org/drawingml/2006/main" xmlns:p="http://schemas.openxmlformats.org/presentationml/2006/main" xmlns:r="http://schemas.openxmlformats.org/officeDocument/2006/relationships">
+  <p:cSld>
+    <p:bg>
+      <p:bgPr>
+        <a:solidFill>
+          <a:srgbClr val="F7F4EE"/>
+        </a:solidFill>
+        <a:effectLst/>
+      </p:bgPr>
+    </p:bg>
+    <p:spTree>
+      <p:nvGrpSpPr>
+        <p:cNvPr id="1" name=""/>
+        <p:cNvGrpSpPr/>
+        <p:nvPr/>
+      </p:nvGrpSpPr>
+      <p:grpSpPr/>
+      <p:sp>
+        <p:nvSpPr>
+          <p:cNvPr id="2" name="Rectangle 1"/>
           <p:cNvSpPr/>
           <p:nvPr/>
         </p:nvSpPr>
         <p:spPr>
           <a:xfrm>
-            <a:off x="822960" y="4023360"/>
-            <a:ext cx="10515600" cy="1371600"/>
+            <a:off x="548640" y="502920"/>
+            <a:ext cx="457200" cy="54864"/>
           </a:xfrm>
           <a:prstGeom prst="rect">
             <a:avLst/>
           </a:prstGeom>
           <a:solidFill>
-            <a:srgbClr val="FFFFFF"/>
+            <a:srgbClr val="F47B20"/>
           </a:solidFill>
-          <a:ln w="15875">
-            <a:solidFill>
-              <a:srgbClr val="1C1B19"/>
-            </a:solidFill>
+          <a:ln>
+            <a:noFill/>
           </a:ln>
           <a:effectLst/>
         </p:spPr>
@@ -5382,14 +6942,14 @@
       </p:sp>
       <p:sp>
         <p:nvSpPr>
-          <p:cNvPr id="8" name="TextBox 7"/>
+          <p:cNvPr id="3" name="TextBox 2"/>
           <p:cNvSpPr txBox="1"/>
           <p:nvPr/>
         </p:nvSpPr>
         <p:spPr>
           <a:xfrm>
-            <a:off x="1097280" y="4206240"/>
-            <a:ext cx="10058400" cy="365760"/>
+            <a:off x="1143000" y="393192"/>
+            <a:ext cx="8229600" cy="274320"/>
           </a:xfrm>
           <a:prstGeom prst="rect">
             <a:avLst/>
@@ -5410,25 +6970,25 @@
             <a:r>
               <a:rPr sz="1200" b="1" i="0">
                 <a:solidFill>
-                  <a:srgbClr val="0B2D5B"/>
+                  <a:srgbClr val="5D5A54"/>
                 </a:solidFill>
                 <a:latin typeface="Inter Tight"/>
               </a:rPr>
-              <a:t>STUDENT PAGE</a:t>
-            </a:r>
-          </a:p>
-        </p:txBody>
-      </p:sp>
-      <p:sp>
-        <p:nvSpPr>
-          <p:cNvPr id="9" name="TextBox 8"/>
+              <a:t>PRIVATE</a:t>
+            </a:r>
+          </a:p>
+        </p:txBody>
+      </p:sp>
+      <p:sp>
+        <p:nvSpPr>
+          <p:cNvPr id="4" name="TextBox 3"/>
           <p:cNvSpPr txBox="1"/>
           <p:nvPr/>
         </p:nvSpPr>
         <p:spPr>
           <a:xfrm>
-            <a:off x="1097280" y="4617720"/>
-            <a:ext cx="10058400" cy="640080"/>
+            <a:off x="8229600" y="6400800"/>
+            <a:ext cx="3410712" cy="274320"/>
           </a:xfrm>
           <a:prstGeom prst="rect">
             <a:avLst/>
@@ -5441,65 +7001,39 @@
           </a:bodyPr>
           <a:lstStyle/>
           <a:p>
-            <a:pPr algn="l">
-              <a:spcAft>
-                <a:spcPts val="900"/>
-              </a:spcAft>
-            </a:pPr>
-            <a:r>
-              <a:rPr sz="2000" b="0" i="0">
-                <a:solidFill>
-                  <a:srgbClr val="1C1B19"/>
+            <a:pPr algn="r">
+              <a:spcAft>
+                <a:spcPts val="450"/>
+              </a:spcAft>
+            </a:pPr>
+            <a:r>
+              <a:rPr sz="1000" b="0" i="0">
+                <a:solidFill>
+                  <a:srgbClr val="5D5A54"/>
                 </a:solidFill>
                 <a:latin typeface="Inter Tight"/>
               </a:rPr>
-              <a:t>https://rmwtoolkit.github.io/bcds-toolkit/under-construction-high-school.html</a:t>
-            </a:r>
-          </a:p>
-        </p:txBody>
-      </p:sp>
-    </p:spTree>
-  </p:cSld>
-  <p:clrMapOvr>
-    <a:masterClrMapping/>
-  </p:clrMapOvr>
-</p:sld>
-</file>
-
-<file path=ppt/slides/slide2.xml><?xml version="1.0" encoding="utf-8"?>
-<p:sld xmlns:a="http://schemas.openxmlformats.org/drawingml/2006/main" xmlns:p="http://schemas.openxmlformats.org/presentationml/2006/main" xmlns:r="http://schemas.openxmlformats.org/officeDocument/2006/relationships" show="0">
-  <p:cSld>
-    <p:bg>
-      <p:bgPr>
-        <a:solidFill>
-          <a:srgbClr val="EEEBE4"/>
-        </a:solidFill>
-        <a:effectLst/>
-      </p:bgPr>
-    </p:bg>
-    <p:spTree>
-      <p:nvGrpSpPr>
-        <p:cNvPr id="1" name=""/>
-        <p:cNvGrpSpPr/>
-        <p:nvPr/>
-      </p:nvGrpSpPr>
-      <p:grpSpPr/>
-      <p:sp>
-        <p:nvSpPr>
-          <p:cNvPr id="2" name="Rectangle 1"/>
+              <a:t>Beaver Counseling</a:t>
+            </a:r>
+          </a:p>
+        </p:txBody>
+      </p:sp>
+      <p:sp>
+        <p:nvSpPr>
+          <p:cNvPr id="5" name="Rectangle 4"/>
           <p:cNvSpPr/>
           <p:nvPr/>
         </p:nvSpPr>
         <p:spPr>
           <a:xfrm>
-            <a:off x="0" y="0"/>
-            <a:ext cx="12191695" cy="384048"/>
+            <a:off x="822960" y="1371600"/>
+            <a:ext cx="73152" cy="3566160"/>
           </a:xfrm>
           <a:prstGeom prst="rect">
             <a:avLst/>
           </a:prstGeom>
           <a:solidFill>
-            <a:srgbClr val="0B2D5B"/>
+            <a:srgbClr val="F47B20"/>
           </a:solidFill>
           <a:ln>
             <a:noFill/>
@@ -5530,14 +7064,14 @@
       </p:sp>
       <p:sp>
         <p:nvSpPr>
-          <p:cNvPr id="3" name="TextBox 2"/>
+          <p:cNvPr id="6" name="TextBox 5"/>
           <p:cNvSpPr txBox="1"/>
           <p:nvPr/>
         </p:nvSpPr>
         <p:spPr>
           <a:xfrm>
-            <a:off x="548640" y="100584"/>
-            <a:ext cx="10972800" cy="274320"/>
+            <a:off x="1188720" y="1371600"/>
+            <a:ext cx="10058400" cy="3566160"/>
           </a:xfrm>
           <a:prstGeom prst="rect">
             <a:avLst/>
@@ -5545,38 +7079,38 @@
           <a:noFill/>
         </p:spPr>
         <p:txBody>
-          <a:bodyPr wrap="square" anchor="t" lIns="0" rIns="0" tIns="0" bIns="0">
+          <a:bodyPr wrap="square" anchor="ctr" lIns="0" rIns="0" tIns="0" bIns="0">
             <a:spAutoFit/>
           </a:bodyPr>
           <a:lstStyle/>
           <a:p>
             <a:pPr algn="l">
               <a:spcAft>
-                <a:spcPts val="495"/>
-              </a:spcAft>
-            </a:pPr>
-            <a:r>
-              <a:rPr sz="1100" b="1" i="0">
-                <a:solidFill>
-                  <a:srgbClr val="FFFFFF"/>
-                </a:solidFill>
-                <a:latin typeface="Inter Tight"/>
-              </a:rPr>
-              <a:t>TEACHER PAGE  ·  skipped when you present  ·  Before you teach</a:t>
-            </a:r>
-          </a:p>
-        </p:txBody>
-      </p:sp>
-      <p:sp>
-        <p:nvSpPr>
-          <p:cNvPr id="4" name="TextBox 3"/>
+                <a:spcPts val="1800"/>
+              </a:spcAft>
+            </a:pPr>
+            <a:r>
+              <a:rPr sz="4000" b="0" i="1">
+                <a:solidFill>
+                  <a:srgbClr val="1C1B19"/>
+                </a:solidFill>
+                <a:latin typeface="Source Serif 4"/>
+              </a:rPr>
+              <a:t>Which piece of you feels biggest right now?</a:t>
+            </a:r>
+          </a:p>
+        </p:txBody>
+      </p:sp>
+      <p:sp>
+        <p:nvSpPr>
+          <p:cNvPr id="7" name="TextBox 6"/>
           <p:cNvSpPr txBox="1"/>
           <p:nvPr/>
         </p:nvSpPr>
         <p:spPr>
           <a:xfrm>
-            <a:off x="548640" y="685800"/>
-            <a:ext cx="10972800" cy="640080"/>
+            <a:off x="1188720" y="5120640"/>
+            <a:ext cx="10058400" cy="914400"/>
           </a:xfrm>
           <a:prstGeom prst="rect">
             <a:avLst/>
@@ -5591,1555 +7125,17 @@
           <a:p>
             <a:pPr algn="l">
               <a:spcAft>
-                <a:spcPts val="1350"/>
-              </a:spcAft>
-            </a:pPr>
-            <a:r>
-              <a:rPr sz="3000" b="1" i="0">
-                <a:solidFill>
-                  <a:srgbClr val="1C1B19"/>
-                </a:solidFill>
-                <a:latin typeface="Source Serif 4"/>
-              </a:rPr>
-              <a:t>Before you teach</a:t>
-            </a:r>
-          </a:p>
-        </p:txBody>
-      </p:sp>
-      <p:sp>
-        <p:nvSpPr>
-          <p:cNvPr id="5" name="TextBox 4"/>
-          <p:cNvSpPr txBox="1"/>
-          <p:nvPr/>
-        </p:nvSpPr>
-        <p:spPr>
-          <a:xfrm>
-            <a:off x="548640" y="1463040"/>
-            <a:ext cx="5394960" cy="4937760"/>
-          </a:xfrm>
-          <a:prstGeom prst="rect">
-            <a:avLst/>
-          </a:prstGeom>
-          <a:noFill/>
-        </p:spPr>
-        <p:txBody>
-          <a:bodyPr wrap="square" anchor="t" lIns="0" rIns="0" tIns="0" bIns="0">
-            <a:spAutoFit/>
-          </a:bodyPr>
-          <a:lstStyle/>
-          <a:p>
-            <a:pPr algn="l">
-              <a:spcAft>
-                <a:spcPts val="585"/>
-              </a:spcAft>
-            </a:pPr>
-            <a:r>
-              <a:rPr sz="1500" b="1" i="0">
-                <a:solidFill>
-                  <a:srgbClr val="1C1B19"/>
-                </a:solidFill>
-                <a:latin typeface="Source Serif 4"/>
-              </a:rPr>
-              <a:t>Nobody shares their own identity.</a:t>
-            </a:r>
-          </a:p>
-          <a:p>
-            <a:pPr algn="l">
-              <a:spcAft>
-                <a:spcPts val="585"/>
-              </a:spcAft>
-            </a:pPr>
-            <a:r>
-              <a:rPr sz="1300" b="0" i="0">
-                <a:solidFill>
-                  <a:srgbClr val="1C1B19"/>
-                </a:solidFill>
-                <a:latin typeface="Source Serif 4"/>
-              </a:rPr>
-              <a:t>Gender, sexuality, faith, immigration, adoption and money can be private, or unsafe to talk about. Every share today is optional. Never ask a student to speak for their whole group, and don't turn to the one student in the circle who shares a background.</a:t>
-            </a:r>
-          </a:p>
-          <a:p>
-            <a:pPr algn="l">
-              <a:spcAft>
-                <a:spcPts val="585"/>
-              </a:spcAft>
-            </a:pPr>
-            <a:r>
-              <a:rPr sz="1300" b="0" i="0">
-                <a:solidFill>
-                  <a:srgbClr val="1C1B19"/>
-                </a:solidFill>
-                <a:latin typeface="Source Serif 4"/>
-              </a:rPr>
-              <a:t/>
-            </a:r>
-          </a:p>
-          <a:p>
-            <a:pPr algn="l">
-              <a:spcAft>
-                <a:spcPts val="585"/>
-              </a:spcAft>
-            </a:pPr>
-            <a:r>
-              <a:rPr sz="1500" b="1" i="0">
-                <a:solidFill>
-                  <a:srgbClr val="1C1B19"/>
-                </a:solidFill>
-                <a:latin typeface="Source Serif 4"/>
-              </a:rPr>
-              <a:t>Four corners is about the research statements.</a:t>
-            </a:r>
-          </a:p>
-          <a:p>
-            <a:pPr algn="l">
-              <a:spcAft>
-                <a:spcPts val="585"/>
-              </a:spcAft>
-            </a:pPr>
-            <a:r>
-              <a:rPr sz="1300" b="0" i="0">
-                <a:solidFill>
-                  <a:srgbClr val="1C1B19"/>
-                </a:solidFill>
-                <a:latin typeface="Source Serif 4"/>
-              </a:rPr>
-              <a:t>Students vote on what the research says, never on anything personal. Pointing works as well as walking, and "it depends" is always a fine corner.</a:t>
-            </a:r>
-          </a:p>
-          <a:p>
-            <a:pPr algn="l">
-              <a:spcAft>
-                <a:spcPts val="585"/>
-              </a:spcAft>
-            </a:pPr>
-            <a:r>
-              <a:rPr sz="1300" b="0" i="0">
-                <a:solidFill>
-                  <a:srgbClr val="1C1B19"/>
-                </a:solidFill>
-                <a:latin typeface="Source Serif 4"/>
-              </a:rPr>
-              <a:t/>
-            </a:r>
-          </a:p>
-          <a:p>
-            <a:pPr algn="l">
-              <a:spcAft>
-                <a:spcPts val="585"/>
-              </a:spcAft>
-            </a:pPr>
-            <a:r>
-              <a:rPr sz="1500" b="1" i="0">
-                <a:solidFill>
-                  <a:srgbClr val="1C1B19"/>
-                </a:solidFill>
-                <a:latin typeface="Source Serif 4"/>
-              </a:rPr>
-              <a:t>If a student comes out in the circle.</a:t>
-            </a:r>
-          </a:p>
-          <a:p>
-            <a:pPr algn="l">
-              <a:spcAft>
-                <a:spcPts val="585"/>
-              </a:spcAft>
-            </a:pPr>
-            <a:r>
-              <a:rPr sz="1300" b="0" i="0">
-                <a:solidFill>
-                  <a:srgbClr val="1C1B19"/>
-                </a:solidFill>
-                <a:latin typeface="Source Serif 4"/>
-              </a:rPr>
-              <a:t>Thank them simply ("Thanks for telling us"), keep going, and don't make it a moment. Check in privately afterward. Remind the group at the start that what people say in advisory stays in advisory, while being honest that you'd get help if someone's safety were at risk.</a:t>
-            </a:r>
-          </a:p>
-          <a:p>
-            <a:pPr algn="l">
-              <a:spcAft>
-                <a:spcPts val="585"/>
-              </a:spcAft>
-            </a:pPr>
-            <a:r>
-              <a:rPr sz="1300" b="0" i="0">
-                <a:solidFill>
-                  <a:srgbClr val="1C1B19"/>
-                </a:solidFill>
-                <a:latin typeface="Source Serif 4"/>
-              </a:rPr>
-              <a:t/>
-            </a:r>
-          </a:p>
-        </p:txBody>
-      </p:sp>
-      <p:sp>
-        <p:nvSpPr>
-          <p:cNvPr id="6" name="TextBox 5"/>
-          <p:cNvSpPr txBox="1"/>
-          <p:nvPr/>
-        </p:nvSpPr>
-        <p:spPr>
-          <a:xfrm>
-            <a:off x="6217920" y="1463040"/>
-            <a:ext cx="5394960" cy="4937760"/>
-          </a:xfrm>
-          <a:prstGeom prst="rect">
-            <a:avLst/>
-          </a:prstGeom>
-          <a:noFill/>
-        </p:spPr>
-        <p:txBody>
-          <a:bodyPr wrap="square" anchor="t" lIns="0" rIns="0" tIns="0" bIns="0">
-            <a:spAutoFit/>
-          </a:bodyPr>
-          <a:lstStyle/>
-          <a:p>
-            <a:pPr algn="l">
-              <a:spcAft>
-                <a:spcPts val="585"/>
-              </a:spcAft>
-            </a:pPr>
-            <a:r>
-              <a:rPr sz="1500" b="1" i="0">
-                <a:solidFill>
-                  <a:srgbClr val="1C1B19"/>
-                </a:solidFill>
-                <a:latin typeface="Source Serif 4"/>
-              </a:rPr>
-              <a:t>Harassment and outing go to a counselor that day.</a:t>
-            </a:r>
-          </a:p>
-          <a:p>
-            <a:pPr algn="l">
-              <a:spcAft>
-                <a:spcPts val="585"/>
-              </a:spcAft>
-            </a:pPr>
-            <a:r>
-              <a:rPr sz="1300" b="0" i="0">
-                <a:solidFill>
-                  <a:srgbClr val="1C1B19"/>
-                </a:solidFill>
-                <a:latin typeface="Source Serif 4"/>
-              </a:rPr>
-              <a:t>If a student is being harassed or threatened because of their race, religion, gender, sexuality or disability, or someone outed them or is sharing private photos, that is a same-day counselor conversation, not a discussion topic.</a:t>
-            </a:r>
-          </a:p>
-          <a:p>
-            <a:pPr algn="l">
-              <a:spcAft>
-                <a:spcPts val="585"/>
-              </a:spcAft>
-            </a:pPr>
-            <a:r>
-              <a:rPr sz="1300" b="0" i="0">
-                <a:solidFill>
-                  <a:srgbClr val="1C1B19"/>
-                </a:solidFill>
-                <a:latin typeface="Source Serif 4"/>
-              </a:rPr>
-              <a:t/>
-            </a:r>
-          </a:p>
-          <a:p>
-            <a:pPr algn="l">
-              <a:spcAft>
-                <a:spcPts val="585"/>
-              </a:spcAft>
-            </a:pPr>
-            <a:r>
-              <a:rPr sz="1500" b="1" i="0">
-                <a:solidFill>
-                  <a:srgbClr val="1C1B19"/>
-                </a:solidFill>
-                <a:latin typeface="Source Serif 4"/>
-              </a:rPr>
-              <a:t>Keep families in the story.</a:t>
-            </a:r>
-          </a:p>
-          <a:p>
-            <a:pPr algn="l">
-              <a:spcAft>
-                <a:spcPts val="585"/>
-              </a:spcAft>
-            </a:pPr>
-            <a:r>
-              <a:rPr sz="1300" b="0" i="0">
-                <a:solidFill>
-                  <a:srgbClr val="1C1B19"/>
-                </a:solidFill>
-                <a:latin typeface="Source Serif 4"/>
-              </a:rPr>
-              <a:t>The Nadia scenario is about a family plan. Families pass down a lot worth keeping: language, faith, food, values, stories. Building your own identity can include choosing much of what you were given. Don't let the discussion turn into teens against families.</a:t>
-            </a:r>
-          </a:p>
-          <a:p>
-            <a:pPr algn="l">
-              <a:spcAft>
-                <a:spcPts val="585"/>
-              </a:spcAft>
-            </a:pPr>
-            <a:r>
-              <a:rPr sz="1300" b="0" i="0">
-                <a:solidFill>
-                  <a:srgbClr val="1C1B19"/>
-                </a:solidFill>
-                <a:latin typeface="Source Serif 4"/>
-              </a:rPr>
-              <a:t/>
-            </a:r>
-          </a:p>
-          <a:p>
-            <a:pPr algn="l">
-              <a:spcAft>
-                <a:spcPts val="585"/>
-              </a:spcAft>
-            </a:pPr>
-            <a:r>
-              <a:rPr sz="1500" b="1" i="0">
-                <a:solidFill>
-                  <a:srgbClr val="1C1B19"/>
-                </a:solidFill>
-                <a:latin typeface="Source Serif 4"/>
-              </a:rPr>
-              <a:t>Know when it's more than figuring things out.</a:t>
-            </a:r>
-          </a:p>
-          <a:p>
-            <a:pPr algn="l">
-              <a:spcAft>
-                <a:spcPts val="585"/>
-              </a:spcAft>
-            </a:pPr>
-            <a:r>
-              <a:rPr sz="1300" b="0" i="0">
-                <a:solidFill>
-                  <a:srgbClr val="1C1B19"/>
-                </a:solidFill>
-                <a:latin typeface="Source Serif 4"/>
-              </a:rPr>
-              <a:t>Feeling you have to hide who you are everywhere, including at home, or thoughts of hurting yourself, go to a counselor the same day. Don't ask about these in advisory. Students can call or text 988 any time. The Trevor Project (1-866-488-7386, or text START to 678-678) is there for LGBTQ+ young people, and Trans Lifeline is at 877-565-8860.</a:t>
-            </a:r>
-          </a:p>
-          <a:p>
-            <a:pPr algn="l">
-              <a:spcAft>
-                <a:spcPts val="585"/>
-              </a:spcAft>
-            </a:pPr>
-            <a:r>
-              <a:rPr sz="1300" b="0" i="0">
-                <a:solidFill>
-                  <a:srgbClr val="1C1B19"/>
-                </a:solidFill>
-                <a:latin typeface="Source Serif 4"/>
-              </a:rPr>
-              <a:t/>
-            </a:r>
-          </a:p>
-        </p:txBody>
-      </p:sp>
-    </p:spTree>
-  </p:cSld>
-  <p:clrMapOvr>
-    <a:masterClrMapping/>
-  </p:clrMapOvr>
-</p:sld>
-</file>
-
-<file path=ppt/slides/slide3.xml><?xml version="1.0" encoding="utf-8"?>
-<p:sld xmlns:a="http://schemas.openxmlformats.org/drawingml/2006/main" xmlns:p="http://schemas.openxmlformats.org/presentationml/2006/main" xmlns:r="http://schemas.openxmlformats.org/officeDocument/2006/relationships" show="0">
-  <p:cSld>
-    <p:bg>
-      <p:bgPr>
-        <a:solidFill>
-          <a:srgbClr val="EEEBE4"/>
-        </a:solidFill>
-        <a:effectLst/>
-      </p:bgPr>
-    </p:bg>
-    <p:spTree>
-      <p:nvGrpSpPr>
-        <p:cNvPr id="1" name=""/>
-        <p:cNvGrpSpPr/>
-        <p:nvPr/>
-      </p:nvGrpSpPr>
-      <p:grpSpPr/>
-      <p:sp>
-        <p:nvSpPr>
-          <p:cNvPr id="2" name="Rectangle 1"/>
-          <p:cNvSpPr/>
-          <p:nvPr/>
-        </p:nvSpPr>
-        <p:spPr>
-          <a:xfrm>
-            <a:off x="0" y="0"/>
-            <a:ext cx="12191695" cy="384048"/>
-          </a:xfrm>
-          <a:prstGeom prst="rect">
-            <a:avLst/>
-          </a:prstGeom>
-          <a:solidFill>
-            <a:srgbClr val="0B2D5B"/>
-          </a:solidFill>
-          <a:ln>
-            <a:noFill/>
-          </a:ln>
-          <a:effectLst/>
-        </p:spPr>
-        <p:style>
-          <a:lnRef idx="1">
-            <a:schemeClr val="accent1"/>
-          </a:lnRef>
-          <a:fillRef idx="3">
-            <a:schemeClr val="accent1"/>
-          </a:fillRef>
-          <a:effectRef idx="2">
-            <a:schemeClr val="accent1"/>
-          </a:effectRef>
-          <a:fontRef idx="minor">
-            <a:schemeClr val="lt1"/>
-          </a:fontRef>
-        </p:style>
-        <p:txBody>
-          <a:bodyPr rtlCol="0" anchor="ctr"/>
-          <a:lstStyle/>
-          <a:p>
-            <a:pPr algn="ctr"/>
-          </a:p>
-        </p:txBody>
-      </p:sp>
-      <p:sp>
-        <p:nvSpPr>
-          <p:cNvPr id="3" name="TextBox 2"/>
-          <p:cNvSpPr txBox="1"/>
-          <p:nvPr/>
-        </p:nvSpPr>
-        <p:spPr>
-          <a:xfrm>
-            <a:off x="548640" y="100584"/>
-            <a:ext cx="10972800" cy="274320"/>
-          </a:xfrm>
-          <a:prstGeom prst="rect">
-            <a:avLst/>
-          </a:prstGeom>
-          <a:noFill/>
-        </p:spPr>
-        <p:txBody>
-          <a:bodyPr wrap="square" anchor="t" lIns="0" rIns="0" tIns="0" bIns="0">
-            <a:spAutoFit/>
-          </a:bodyPr>
-          <a:lstStyle/>
-          <a:p>
-            <a:pPr algn="l">
-              <a:spcAft>
-                <a:spcPts val="495"/>
-              </a:spcAft>
-            </a:pPr>
-            <a:r>
-              <a:rPr sz="1100" b="1" i="0">
-                <a:solidFill>
-                  <a:srgbClr val="FFFFFF"/>
+                <a:spcPts val="810"/>
+              </a:spcAft>
+            </a:pPr>
+            <a:r>
+              <a:rPr sz="1800" b="0" i="0">
+                <a:solidFill>
+                  <a:srgbClr val="5D5A54"/>
                 </a:solidFill>
                 <a:latin typeface="Inter Tight"/>
               </a:rPr>
-              <a:t>TEACHER PAGE  ·  skipped when you present  ·  Every student in the room</a:t>
-            </a:r>
-          </a:p>
-        </p:txBody>
-      </p:sp>
-      <p:sp>
-        <p:nvSpPr>
-          <p:cNvPr id="4" name="TextBox 3"/>
-          <p:cNvSpPr txBox="1"/>
-          <p:nvPr/>
-        </p:nvSpPr>
-        <p:spPr>
-          <a:xfrm>
-            <a:off x="548640" y="685800"/>
-            <a:ext cx="10972800" cy="640080"/>
-          </a:xfrm>
-          <a:prstGeom prst="rect">
-            <a:avLst/>
-          </a:prstGeom>
-          <a:noFill/>
-        </p:spPr>
-        <p:txBody>
-          <a:bodyPr wrap="square" anchor="t" lIns="0" rIns="0" tIns="0" bIns="0">
-            <a:spAutoFit/>
-          </a:bodyPr>
-          <a:lstStyle/>
-          <a:p>
-            <a:pPr algn="l">
-              <a:spcAft>
-                <a:spcPts val="1350"/>
-              </a:spcAft>
-            </a:pPr>
-            <a:r>
-              <a:rPr sz="3000" b="1" i="0">
-                <a:solidFill>
-                  <a:srgbClr val="1C1B19"/>
-                </a:solidFill>
-                <a:latin typeface="Source Serif 4"/>
-              </a:rPr>
-              <a:t>Every student in the room</a:t>
-            </a:r>
-          </a:p>
-        </p:txBody>
-      </p:sp>
-      <p:sp>
-        <p:nvSpPr>
-          <p:cNvPr id="5" name="TextBox 4"/>
-          <p:cNvSpPr txBox="1"/>
-          <p:nvPr/>
-        </p:nvSpPr>
-        <p:spPr>
-          <a:xfrm>
-            <a:off x="548640" y="1325880"/>
-            <a:ext cx="10972800" cy="365760"/>
-          </a:xfrm>
-          <a:prstGeom prst="rect">
-            <a:avLst/>
-          </a:prstGeom>
-          <a:noFill/>
-        </p:spPr>
-        <p:txBody>
-          <a:bodyPr wrap="square" anchor="t" lIns="0" rIns="0" tIns="0" bIns="0">
-            <a:spAutoFit/>
-          </a:bodyPr>
-          <a:lstStyle/>
-          <a:p>
-            <a:pPr algn="l">
-              <a:spcAft>
-                <a:spcPts val="630"/>
-              </a:spcAft>
-            </a:pPr>
-            <a:r>
-              <a:rPr sz="1400" b="0" i="0">
-                <a:solidFill>
-                  <a:srgbClr val="5D5A54"/>
-                </a:solidFill>
-                <a:latin typeface="Inter Tight"/>
-              </a:rPr>
-              <a:t>Culture, family, identity, ability and money: what to keep in mind for this topic.</a:t>
-            </a:r>
-          </a:p>
-        </p:txBody>
-      </p:sp>
-      <p:sp>
-        <p:nvSpPr>
-          <p:cNvPr id="6" name="TextBox 5"/>
-          <p:cNvSpPr txBox="1"/>
-          <p:nvPr/>
-        </p:nvSpPr>
-        <p:spPr>
-          <a:xfrm>
-            <a:off x="548640" y="1828800"/>
-            <a:ext cx="5394960" cy="4572000"/>
-          </a:xfrm>
-          <a:prstGeom prst="rect">
-            <a:avLst/>
-          </a:prstGeom>
-          <a:noFill/>
-        </p:spPr>
-        <p:txBody>
-          <a:bodyPr wrap="square" anchor="t" lIns="0" rIns="0" tIns="0" bIns="0">
-            <a:spAutoFit/>
-          </a:bodyPr>
-          <a:lstStyle/>
-          <a:p>
-            <a:pPr algn="l">
-              <a:spcAft>
-                <a:spcPts val="585"/>
-              </a:spcAft>
-            </a:pPr>
-            <a:r>
-              <a:rPr sz="1500" b="1" i="0">
-                <a:solidFill>
-                  <a:srgbClr val="1C1B19"/>
-                </a:solidFill>
-                <a:latin typeface="Source Serif 4"/>
-              </a:rPr>
-              <a:t>Everyone has a racial and cultural story.</a:t>
-            </a:r>
-          </a:p>
-          <a:p>
-            <a:pPr algn="l">
-              <a:spcAft>
-                <a:spcPts val="585"/>
-              </a:spcAft>
-            </a:pPr>
-            <a:r>
-              <a:rPr sz="1300" b="0" i="0">
-                <a:solidFill>
-                  <a:srgbClr val="1C1B19"/>
-                </a:solidFill>
-                <a:latin typeface="Source Serif 4"/>
-              </a:rPr>
-              <a:t>Students of color often start thinking about racial identity early because the world brings it up. White students in mostly white places may not until later. The "where are you really from" scenario lets students practice without anyone in the circle having to tell their own story.</a:t>
-            </a:r>
-          </a:p>
-          <a:p>
-            <a:pPr algn="l">
-              <a:spcAft>
-                <a:spcPts val="585"/>
-              </a:spcAft>
-            </a:pPr>
-            <a:r>
-              <a:rPr sz="1300" b="0" i="0">
-                <a:solidFill>
-                  <a:srgbClr val="1C1B19"/>
-                </a:solidFill>
-                <a:latin typeface="Source Serif 4"/>
-              </a:rPr>
-              <a:t/>
-            </a:r>
-          </a:p>
-          <a:p>
-            <a:pPr algn="l">
-              <a:spcAft>
-                <a:spcPts val="585"/>
-              </a:spcAft>
-            </a:pPr>
-            <a:r>
-              <a:rPr sz="1500" b="1" i="0">
-                <a:solidFill>
-                  <a:srgbClr val="1C1B19"/>
-                </a:solidFill>
-                <a:latin typeface="Source Serif 4"/>
-              </a:rPr>
-              <a:t>Gender and sexuality: their timeline, their words.</a:t>
-            </a:r>
-          </a:p>
-          <a:p>
-            <a:pPr algn="l">
-              <a:spcAft>
-                <a:spcPts val="585"/>
-              </a:spcAft>
-            </a:pPr>
-            <a:r>
-              <a:rPr sz="1300" b="0" i="0">
-                <a:solidFill>
-                  <a:srgbClr val="1C1B19"/>
-                </a:solidFill>
-                <a:latin typeface="Source Serif 4"/>
-              </a:rPr>
-              <a:t>Some students know early, some question for a while, some land where they started. All of it is identity work. Nobody owes anyone a label, and who to tell, and when, is the student's call, with safety first. A student who isn't out at home needs a school adult route: a counselor can help them figure out who to talk to.</a:t>
-            </a:r>
-          </a:p>
-          <a:p>
-            <a:pPr algn="l">
-              <a:spcAft>
-                <a:spcPts val="585"/>
-              </a:spcAft>
-            </a:pPr>
-            <a:r>
-              <a:rPr sz="1300" b="0" i="0">
-                <a:solidFill>
-                  <a:srgbClr val="1C1B19"/>
-                </a:solidFill>
-                <a:latin typeface="Source Serif 4"/>
-              </a:rPr>
-              <a:t/>
-            </a:r>
-          </a:p>
-          <a:p>
-            <a:pPr algn="l">
-              <a:spcAft>
-                <a:spcPts val="585"/>
-              </a:spcAft>
-            </a:pPr>
-            <a:r>
-              <a:rPr sz="1500" b="1" i="0">
-                <a:solidFill>
-                  <a:srgbClr val="1C1B19"/>
-                </a:solidFill>
-                <a:latin typeface="Source Serif 4"/>
-              </a:rPr>
-              <a:t>"Interview your roots" doesn't assume who's at home.</a:t>
-            </a:r>
-          </a:p>
-          <a:p>
-            <a:pPr algn="l">
-              <a:spcAft>
-                <a:spcPts val="585"/>
-              </a:spcAft>
-            </a:pPr>
-            <a:r>
-              <a:rPr sz="1300" b="0" i="0">
-                <a:solidFill>
-                  <a:srgbClr val="1C1B19"/>
-                </a:solidFill>
-                <a:latin typeface="Source Serif 4"/>
-              </a:rPr>
-              <a:t>Students live with one parent, two moms or two dads, grandparents, foster or kinship families, or between two homes. Adopted students may not have access to some of their story. Any elder, family friend, coach or mentor who knows part of their story counts.</a:t>
-            </a:r>
-          </a:p>
-          <a:p>
-            <a:pPr algn="l">
-              <a:spcAft>
-                <a:spcPts val="585"/>
-              </a:spcAft>
-            </a:pPr>
-            <a:r>
-              <a:rPr sz="1300" b="0" i="0">
-                <a:solidFill>
-                  <a:srgbClr val="1C1B19"/>
-                </a:solidFill>
-                <a:latin typeface="Source Serif 4"/>
-              </a:rPr>
-              <a:t/>
-            </a:r>
-          </a:p>
-        </p:txBody>
-      </p:sp>
-      <p:sp>
-        <p:nvSpPr>
-          <p:cNvPr id="7" name="TextBox 6"/>
-          <p:cNvSpPr txBox="1"/>
-          <p:nvPr/>
-        </p:nvSpPr>
-        <p:spPr>
-          <a:xfrm>
-            <a:off x="6217920" y="1828800"/>
-            <a:ext cx="5394960" cy="4572000"/>
-          </a:xfrm>
-          <a:prstGeom prst="rect">
-            <a:avLst/>
-          </a:prstGeom>
-          <a:noFill/>
-        </p:spPr>
-        <p:txBody>
-          <a:bodyPr wrap="square" anchor="t" lIns="0" rIns="0" tIns="0" bIns="0">
-            <a:spAutoFit/>
-          </a:bodyPr>
-          <a:lstStyle/>
-          <a:p>
-            <a:pPr algn="l">
-              <a:spcAft>
-                <a:spcPts val="585"/>
-              </a:spcAft>
-            </a:pPr>
-            <a:r>
-              <a:rPr sz="1500" b="1" i="0">
-                <a:solidFill>
-                  <a:srgbClr val="1C1B19"/>
-                </a:solidFill>
-                <a:latin typeface="Source Serif 4"/>
-              </a:rPr>
-              <a:t>Faith can be kept, questioned, or chosen.</a:t>
-            </a:r>
-          </a:p>
-          <a:p>
-            <a:pPr algn="l">
-              <a:spcAft>
-                <a:spcPts val="585"/>
-              </a:spcAft>
-            </a:pPr>
-            <a:r>
-              <a:rPr sz="1300" b="0" i="0">
-                <a:solidFill>
-                  <a:srgbClr val="1C1B19"/>
-                </a:solidFill>
-                <a:latin typeface="Source Serif 4"/>
-              </a:rPr>
-              <a:t>For some students faith is the steadiest piece. Others are questioning it, or grew up without one. Keeping a faith after thinking it through is as much a commitment that fits as anything else. Don't present questioning as the goal.</a:t>
-            </a:r>
-          </a:p>
-          <a:p>
-            <a:pPr algn="l">
-              <a:spcAft>
-                <a:spcPts val="585"/>
-              </a:spcAft>
-            </a:pPr>
-            <a:r>
-              <a:rPr sz="1300" b="0" i="0">
-                <a:solidFill>
-                  <a:srgbClr val="1C1B19"/>
-                </a:solidFill>
-                <a:latin typeface="Source Serif 4"/>
-              </a:rPr>
-              <a:t/>
-            </a:r>
-          </a:p>
-          <a:p>
-            <a:pPr algn="l">
-              <a:spcAft>
-                <a:spcPts val="585"/>
-              </a:spcAft>
-            </a:pPr>
-            <a:r>
-              <a:rPr sz="1500" b="1" i="0">
-                <a:solidFill>
-                  <a:srgbClr val="1C1B19"/>
-                </a:solidFill>
-                <a:latin typeface="Source Serif 4"/>
-              </a:rPr>
-              <a:t>Body and ability is one of the pieces.</a:t>
-            </a:r>
-          </a:p>
-          <a:p>
-            <a:pPr algn="l">
-              <a:spcAft>
-                <a:spcPts val="585"/>
-              </a:spcAft>
-            </a:pPr>
-            <a:r>
-              <a:rPr sz="1300" b="0" i="0">
-                <a:solidFill>
-                  <a:srgbClr val="1C1B19"/>
-                </a:solidFill>
-                <a:latin typeface="Source Serif 4"/>
-              </a:rPr>
-              <a:t>For disabled and chronically ill students, disability can be a source of pride and community, not only something other people notice. Include it in the list without making it the example of something hard.</a:t>
-            </a:r>
-          </a:p>
-          <a:p>
-            <a:pPr algn="l">
-              <a:spcAft>
-                <a:spcPts val="585"/>
-              </a:spcAft>
-            </a:pPr>
-            <a:r>
-              <a:rPr sz="1300" b="0" i="0">
-                <a:solidFill>
-                  <a:srgbClr val="1C1B19"/>
-                </a:solidFill>
-                <a:latin typeface="Source Serif 4"/>
-              </a:rPr>
-              <a:t/>
-            </a:r>
-          </a:p>
-          <a:p>
-            <a:pPr algn="l">
-              <a:spcAft>
-                <a:spcPts val="585"/>
-              </a:spcAft>
-            </a:pPr>
-            <a:r>
-              <a:rPr sz="1500" b="1" i="0">
-                <a:solidFill>
-                  <a:srgbClr val="1C1B19"/>
-                </a:solidFill>
-                <a:latin typeface="Source Serif 4"/>
-              </a:rPr>
-              <a:t>Language and code switching.</a:t>
-            </a:r>
-          </a:p>
-          <a:p>
-            <a:pPr algn="l">
-              <a:spcAft>
-                <a:spcPts val="585"/>
-              </a:spcAft>
-            </a:pPr>
-            <a:r>
-              <a:rPr sz="1300" b="0" i="0">
-                <a:solidFill>
-                  <a:srgbClr val="1C1B19"/>
-                </a:solidFill>
-                <a:latin typeface="Source Serif 4"/>
-              </a:rPr>
-              <a:t>Children of immigrants and students whose home language isn't English may switch how they talk, dress or act between home and school. It is a real skill, and it can be tiring when you never get a break. Mixed students don't have to pick a side.</a:t>
-            </a:r>
-          </a:p>
-          <a:p>
-            <a:pPr algn="l">
-              <a:spcAft>
-                <a:spcPts val="585"/>
-              </a:spcAft>
-            </a:pPr>
-            <a:r>
-              <a:rPr sz="1300" b="0" i="0">
-                <a:solidFill>
-                  <a:srgbClr val="1C1B19"/>
-                </a:solidFill>
-                <a:latin typeface="Source Serif 4"/>
-              </a:rPr>
-              <a:t/>
-            </a:r>
-          </a:p>
-        </p:txBody>
-      </p:sp>
-    </p:spTree>
-  </p:cSld>
-  <p:clrMapOvr>
-    <a:masterClrMapping/>
-  </p:clrMapOvr>
-</p:sld>
-</file>
-
-<file path=ppt/slides/slide4.xml><?xml version="1.0" encoding="utf-8"?>
-<p:sld xmlns:a="http://schemas.openxmlformats.org/drawingml/2006/main" xmlns:p="http://schemas.openxmlformats.org/presentationml/2006/main" xmlns:r="http://schemas.openxmlformats.org/officeDocument/2006/relationships" show="0">
-  <p:cSld>
-    <p:bg>
-      <p:bgPr>
-        <a:solidFill>
-          <a:srgbClr val="EEEBE4"/>
-        </a:solidFill>
-        <a:effectLst/>
-      </p:bgPr>
-    </p:bg>
-    <p:spTree>
-      <p:nvGrpSpPr>
-        <p:cNvPr id="1" name=""/>
-        <p:cNvGrpSpPr/>
-        <p:nvPr/>
-      </p:nvGrpSpPr>
-      <p:grpSpPr/>
-      <p:sp>
-        <p:nvSpPr>
-          <p:cNvPr id="2" name="Rectangle 1"/>
-          <p:cNvSpPr/>
-          <p:nvPr/>
-        </p:nvSpPr>
-        <p:spPr>
-          <a:xfrm>
-            <a:off x="0" y="0"/>
-            <a:ext cx="12191695" cy="384048"/>
-          </a:xfrm>
-          <a:prstGeom prst="rect">
-            <a:avLst/>
-          </a:prstGeom>
-          <a:solidFill>
-            <a:srgbClr val="0B2D5B"/>
-          </a:solidFill>
-          <a:ln>
-            <a:noFill/>
-          </a:ln>
-          <a:effectLst/>
-        </p:spPr>
-        <p:style>
-          <a:lnRef idx="1">
-            <a:schemeClr val="accent1"/>
-          </a:lnRef>
-          <a:fillRef idx="3">
-            <a:schemeClr val="accent1"/>
-          </a:fillRef>
-          <a:effectRef idx="2">
-            <a:schemeClr val="accent1"/>
-          </a:effectRef>
-          <a:fontRef idx="minor">
-            <a:schemeClr val="lt1"/>
-          </a:fontRef>
-        </p:style>
-        <p:txBody>
-          <a:bodyPr rtlCol="0" anchor="ctr"/>
-          <a:lstStyle/>
-          <a:p>
-            <a:pPr algn="ctr"/>
-          </a:p>
-        </p:txBody>
-      </p:sp>
-      <p:sp>
-        <p:nvSpPr>
-          <p:cNvPr id="3" name="TextBox 2"/>
-          <p:cNvSpPr txBox="1"/>
-          <p:nvPr/>
-        </p:nvSpPr>
-        <p:spPr>
-          <a:xfrm>
-            <a:off x="548640" y="100584"/>
-            <a:ext cx="10972800" cy="274320"/>
-          </a:xfrm>
-          <a:prstGeom prst="rect">
-            <a:avLst/>
-          </a:prstGeom>
-          <a:noFill/>
-        </p:spPr>
-        <p:txBody>
-          <a:bodyPr wrap="square" anchor="t" lIns="0" rIns="0" tIns="0" bIns="0">
-            <a:spAutoFit/>
-          </a:bodyPr>
-          <a:lstStyle/>
-          <a:p>
-            <a:pPr algn="l">
-              <a:spcAft>
-                <a:spcPts val="495"/>
-              </a:spcAft>
-            </a:pPr>
-            <a:r>
-              <a:rPr sz="1100" b="1" i="0">
-                <a:solidFill>
-                  <a:srgbClr val="FFFFFF"/>
-                </a:solidFill>
-                <a:latin typeface="Inter Tight"/>
-              </a:rPr>
-              <a:t>TEACHER PAGE  ·  skipped when you present  ·  Background</a:t>
-            </a:r>
-          </a:p>
-        </p:txBody>
-      </p:sp>
-      <p:sp>
-        <p:nvSpPr>
-          <p:cNvPr id="4" name="TextBox 3"/>
-          <p:cNvSpPr txBox="1"/>
-          <p:nvPr/>
-        </p:nvSpPr>
-        <p:spPr>
-          <a:xfrm>
-            <a:off x="548640" y="685800"/>
-            <a:ext cx="10972800" cy="640080"/>
-          </a:xfrm>
-          <a:prstGeom prst="rect">
-            <a:avLst/>
-          </a:prstGeom>
-          <a:noFill/>
-        </p:spPr>
-        <p:txBody>
-          <a:bodyPr wrap="square" anchor="t" lIns="0" rIns="0" tIns="0" bIns="0">
-            <a:spAutoFit/>
-          </a:bodyPr>
-          <a:lstStyle/>
-          <a:p>
-            <a:pPr algn="l">
-              <a:spcAft>
-                <a:spcPts val="1350"/>
-              </a:spcAft>
-            </a:pPr>
-            <a:r>
-              <a:rPr sz="3000" b="1" i="0">
-                <a:solidFill>
-                  <a:srgbClr val="1C1B19"/>
-                </a:solidFill>
-                <a:latin typeface="Source Serif 4"/>
-              </a:rPr>
-              <a:t>What the research says</a:t>
-            </a:r>
-          </a:p>
-        </p:txBody>
-      </p:sp>
-      <p:sp>
-        <p:nvSpPr>
-          <p:cNvPr id="5" name="TextBox 4"/>
-          <p:cNvSpPr txBox="1"/>
-          <p:nvPr/>
-        </p:nvSpPr>
-        <p:spPr>
-          <a:xfrm>
-            <a:off x="548640" y="1463040"/>
-            <a:ext cx="5394960" cy="4937760"/>
-          </a:xfrm>
-          <a:prstGeom prst="rect">
-            <a:avLst/>
-          </a:prstGeom>
-          <a:noFill/>
-        </p:spPr>
-        <p:txBody>
-          <a:bodyPr wrap="square" anchor="t" lIns="0" rIns="0" tIns="0" bIns="0">
-            <a:spAutoFit/>
-          </a:bodyPr>
-          <a:lstStyle/>
-          <a:p>
-            <a:pPr algn="l">
-              <a:spcAft>
-                <a:spcPts val="585"/>
-              </a:spcAft>
-            </a:pPr>
-            <a:r>
-              <a:rPr sz="1300" b="0" i="0">
-                <a:solidFill>
-                  <a:srgbClr val="1C1B19"/>
-                </a:solidFill>
-                <a:latin typeface="Source Serif 4"/>
-              </a:rPr>
-              <a:t>Psychologist Erik Erikson called building a sense of who you are and where you fit the central task of adolescence.</a:t>
-            </a:r>
-          </a:p>
-          <a:p>
-            <a:pPr algn="l">
-              <a:spcAft>
-                <a:spcPts val="585"/>
-              </a:spcAft>
-            </a:pPr>
-            <a:r>
-              <a:rPr sz="1050" b="0" i="0">
-                <a:solidFill>
-                  <a:srgbClr val="5D5A54"/>
-                </a:solidFill>
-                <a:latin typeface="Inter Tight"/>
-              </a:rPr>
-              <a:t>Erikson, Identity: Youth and Crisis, 1968</a:t>
-            </a:r>
-          </a:p>
-          <a:p>
-            <a:pPr algn="l">
-              <a:spcAft>
-                <a:spcPts val="585"/>
-              </a:spcAft>
-            </a:pPr>
-            <a:r>
-              <a:rPr sz="1300" b="0" i="0">
-                <a:solidFill>
-                  <a:srgbClr val="1C1B19"/>
-                </a:solidFill>
-                <a:latin typeface="Source Serif 4"/>
-              </a:rPr>
-              <a:t>Identity can be described by two questions: Have you explored your options? Have you committed to something? The answers make four common places to be, and a person can be in a different place for each part of themselves.</a:t>
-            </a:r>
-          </a:p>
-          <a:p>
-            <a:pPr algn="l">
-              <a:spcAft>
-                <a:spcPts val="585"/>
-              </a:spcAft>
-            </a:pPr>
-            <a:r>
-              <a:rPr sz="1050" b="0" i="0">
-                <a:solidFill>
-                  <a:srgbClr val="5D5A54"/>
-                </a:solidFill>
-                <a:latin typeface="Inter Tight"/>
-              </a:rPr>
-              <a:t>Marcia, Journal of Personality and Social Psychology, 1966</a:t>
-            </a:r>
-          </a:p>
-          <a:p>
-            <a:pPr algn="l">
-              <a:spcAft>
-                <a:spcPts val="585"/>
-              </a:spcAft>
-            </a:pPr>
-            <a:r>
-              <a:rPr sz="1300" b="0" i="0">
-                <a:solidFill>
-                  <a:srgbClr val="1C1B19"/>
-                </a:solidFill>
-                <a:latin typeface="Source Serif 4"/>
-              </a:rPr>
-              <a:t>Across 73 studies, the most common change from the teens into the 20s was from exploring to a commitment that fits. Moving forward was about twice as common as sliding back.</a:t>
-            </a:r>
-          </a:p>
-          <a:p>
-            <a:pPr algn="l">
-              <a:spcAft>
-                <a:spcPts val="585"/>
-              </a:spcAft>
-            </a:pPr>
-            <a:r>
-              <a:rPr sz="1050" b="0" i="0">
-                <a:solidFill>
-                  <a:srgbClr val="5D5A54"/>
-                </a:solidFill>
-                <a:latin typeface="Inter Tight"/>
-              </a:rPr>
-              <a:t>Kroger, Martinussen and Marcia, Journal of Adolescence, 2010</a:t>
-            </a:r>
-          </a:p>
-          <a:p>
-            <a:pPr algn="l">
-              <a:spcAft>
-                <a:spcPts val="585"/>
-              </a:spcAft>
-            </a:pPr>
-            <a:r>
-              <a:rPr sz="1300" b="0" i="0">
-                <a:solidFill>
-                  <a:srgbClr val="1C1B19"/>
-                </a:solidFill>
-                <a:latin typeface="Source Serif 4"/>
-              </a:rPr>
-              <a:t>Across 46 studies, minority youth who felt good about their ethnic or racial group had fewer symptoms of depression, better self-esteem, fewer problems with drugs and alcohol, and did better in school.</a:t>
-            </a:r>
-          </a:p>
-          <a:p>
-            <a:pPr algn="l">
-              <a:spcAft>
-                <a:spcPts val="585"/>
-              </a:spcAft>
-            </a:pPr>
-            <a:r>
-              <a:rPr sz="1050" b="0" i="0">
-                <a:solidFill>
-                  <a:srgbClr val="5D5A54"/>
-                </a:solidFill>
-                <a:latin typeface="Inter Tight"/>
-              </a:rPr>
-              <a:t>Rivas-Drake et al., Child Development, 2014</a:t>
-            </a:r>
-          </a:p>
-        </p:txBody>
-      </p:sp>
-      <p:sp>
-        <p:nvSpPr>
-          <p:cNvPr id="6" name="TextBox 5"/>
-          <p:cNvSpPr txBox="1"/>
-          <p:nvPr/>
-        </p:nvSpPr>
-        <p:spPr>
-          <a:xfrm>
-            <a:off x="6217920" y="1463040"/>
-            <a:ext cx="5394960" cy="4937760"/>
-          </a:xfrm>
-          <a:prstGeom prst="rect">
-            <a:avLst/>
-          </a:prstGeom>
-          <a:noFill/>
-        </p:spPr>
-        <p:txBody>
-          <a:bodyPr wrap="square" anchor="t" lIns="0" rIns="0" tIns="0" bIns="0">
-            <a:spAutoFit/>
-          </a:bodyPr>
-          <a:lstStyle/>
-          <a:p>
-            <a:pPr algn="l">
-              <a:spcAft>
-                <a:spcPts val="585"/>
-              </a:spcAft>
-            </a:pPr>
-            <a:r>
-              <a:rPr sz="1300" b="0" i="0">
-                <a:solidFill>
-                  <a:srgbClr val="1C1B19"/>
-                </a:solidFill>
-                <a:latin typeface="Source Serif 4"/>
-              </a:rPr>
-              <a:t>Ethnic and racial identity develops across adolescence and into young adulthood. Students of color often start this work early; white students in mostly white settings may start later.</a:t>
-            </a:r>
-          </a:p>
-          <a:p>
-            <a:pPr algn="l">
-              <a:spcAft>
-                <a:spcPts val="585"/>
-              </a:spcAft>
-            </a:pPr>
-            <a:r>
-              <a:rPr sz="1050" b="0" i="0">
-                <a:solidFill>
-                  <a:srgbClr val="5D5A54"/>
-                </a:solidFill>
-                <a:latin typeface="Inter Tight"/>
-              </a:rPr>
-              <a:t>Umaña-Taylor et al., Child Development, 2014</a:t>
-            </a:r>
-          </a:p>
-          <a:p>
-            <a:pPr algn="l">
-              <a:spcAft>
-                <a:spcPts val="585"/>
-              </a:spcAft>
-            </a:pPr>
-            <a:r>
-              <a:rPr sz="1300" b="0" i="0">
-                <a:solidFill>
-                  <a:srgbClr val="1C1B19"/>
-                </a:solidFill>
-                <a:latin typeface="Source Serif 4"/>
-              </a:rPr>
-              <a:t>People start building a life story about where they came from and where they're headed in adolescence. People who find growth or meaning in a hard stretch tend to do better than those who tell it as a dead end.</a:t>
-            </a:r>
-          </a:p>
-          <a:p>
-            <a:pPr algn="l">
-              <a:spcAft>
-                <a:spcPts val="585"/>
-              </a:spcAft>
-            </a:pPr>
-            <a:r>
-              <a:rPr sz="1050" b="0" i="0">
-                <a:solidFill>
-                  <a:srgbClr val="5D5A54"/>
-                </a:solidFill>
-                <a:latin typeface="Inter Tight"/>
-              </a:rPr>
-              <a:t>McAdams and McLean, Current Directions in Psychological Science, 2013</a:t>
-            </a:r>
-          </a:p>
-          <a:p>
-            <a:pPr algn="l">
-              <a:spcAft>
-                <a:spcPts val="585"/>
-              </a:spcAft>
-            </a:pPr>
-            <a:r>
-              <a:rPr sz="1300" b="0" i="0">
-                <a:solidFill>
-                  <a:srgbClr val="1C1B19"/>
-                </a:solidFill>
-                <a:latin typeface="Source Serif 4"/>
-              </a:rPr>
-              <a:t>In a study of about 19,000 adults ages 18 to 68, people at every age said they'd changed a lot in the past ten years and expected to change very little in the next ten: the "end of history illusion." It compared people of different ages, so it's a rough picture.</a:t>
-            </a:r>
-          </a:p>
-          <a:p>
-            <a:pPr algn="l">
-              <a:spcAft>
-                <a:spcPts val="585"/>
-              </a:spcAft>
-            </a:pPr>
-            <a:r>
-              <a:rPr sz="1050" b="0" i="0">
-                <a:solidFill>
-                  <a:srgbClr val="5D5A54"/>
-                </a:solidFill>
-                <a:latin typeface="Inter Tight"/>
-              </a:rPr>
-              <a:t>Quoidbach, Gilbert and Wilson, Science, 2013</a:t>
-            </a:r>
-          </a:p>
-        </p:txBody>
-      </p:sp>
-    </p:spTree>
-  </p:cSld>
-  <p:clrMapOvr>
-    <a:masterClrMapping/>
-  </p:clrMapOvr>
-</p:sld>
-</file>
-
-<file path=ppt/slides/slide5.xml><?xml version="1.0" encoding="utf-8"?>
-<p:sld xmlns:a="http://schemas.openxmlformats.org/drawingml/2006/main" xmlns:p="http://schemas.openxmlformats.org/presentationml/2006/main" xmlns:r="http://schemas.openxmlformats.org/officeDocument/2006/relationships">
-  <p:cSld>
-    <p:bg>
-      <p:bgPr>
-        <a:solidFill>
-          <a:srgbClr val="0B2D5B"/>
-        </a:solidFill>
-        <a:effectLst/>
-      </p:bgPr>
-    </p:bg>
-    <p:spTree>
-      <p:nvGrpSpPr>
-        <p:cNvPr id="1" name=""/>
-        <p:cNvGrpSpPr/>
-        <p:nvPr/>
-      </p:nvGrpSpPr>
-      <p:grpSpPr/>
-      <p:sp>
-        <p:nvSpPr>
-          <p:cNvPr id="2" name="Rectangle 1"/>
-          <p:cNvSpPr/>
-          <p:nvPr/>
-        </p:nvSpPr>
-        <p:spPr>
-          <a:xfrm>
-            <a:off x="548640" y="502920"/>
-            <a:ext cx="457200" cy="54864"/>
-          </a:xfrm>
-          <a:prstGeom prst="rect">
-            <a:avLst/>
-          </a:prstGeom>
-          <a:solidFill>
-            <a:srgbClr val="F47B20"/>
-          </a:solidFill>
-          <a:ln>
-            <a:noFill/>
-          </a:ln>
-          <a:effectLst/>
-        </p:spPr>
-        <p:style>
-          <a:lnRef idx="1">
-            <a:schemeClr val="accent1"/>
-          </a:lnRef>
-          <a:fillRef idx="3">
-            <a:schemeClr val="accent1"/>
-          </a:fillRef>
-          <a:effectRef idx="2">
-            <a:schemeClr val="accent1"/>
-          </a:effectRef>
-          <a:fontRef idx="minor">
-            <a:schemeClr val="lt1"/>
-          </a:fontRef>
-        </p:style>
-        <p:txBody>
-          <a:bodyPr rtlCol="0" anchor="ctr"/>
-          <a:lstStyle/>
-          <a:p>
-            <a:pPr algn="ctr"/>
-          </a:p>
-        </p:txBody>
-      </p:sp>
-      <p:sp>
-        <p:nvSpPr>
-          <p:cNvPr id="3" name="TextBox 2"/>
-          <p:cNvSpPr txBox="1"/>
-          <p:nvPr/>
-        </p:nvSpPr>
-        <p:spPr>
-          <a:xfrm>
-            <a:off x="1143000" y="393192"/>
-            <a:ext cx="8229600" cy="274320"/>
-          </a:xfrm>
-          <a:prstGeom prst="rect">
-            <a:avLst/>
-          </a:prstGeom>
-          <a:noFill/>
-        </p:spPr>
-        <p:txBody>
-          <a:bodyPr wrap="square" anchor="t" lIns="0" rIns="0" tIns="0" bIns="0">
-            <a:spAutoFit/>
-          </a:bodyPr>
-          <a:lstStyle/>
-          <a:p>
-            <a:pPr algn="l">
-              <a:spcAft>
-                <a:spcPts val="540"/>
-              </a:spcAft>
-            </a:pPr>
-            <a:r>
-              <a:rPr sz="1200" b="1" i="0">
-                <a:solidFill>
-                  <a:srgbClr val="5D5A54"/>
-                </a:solidFill>
-                <a:latin typeface="Inter Tight"/>
-              </a:rPr>
-              <a:t>UNDER CONSTRUCTION</a:t>
-            </a:r>
-          </a:p>
-        </p:txBody>
-      </p:sp>
-      <p:sp>
-        <p:nvSpPr>
-          <p:cNvPr id="4" name="TextBox 3"/>
-          <p:cNvSpPr txBox="1"/>
-          <p:nvPr/>
-        </p:nvSpPr>
-        <p:spPr>
-          <a:xfrm>
-            <a:off x="8229600" y="6400800"/>
-            <a:ext cx="3410712" cy="274320"/>
-          </a:xfrm>
-          <a:prstGeom prst="rect">
-            <a:avLst/>
-          </a:prstGeom>
-          <a:noFill/>
-        </p:spPr>
-        <p:txBody>
-          <a:bodyPr wrap="square" anchor="t" lIns="0" rIns="0" tIns="0" bIns="0">
-            <a:spAutoFit/>
-          </a:bodyPr>
-          <a:lstStyle/>
-          <a:p>
-            <a:pPr algn="r">
-              <a:spcAft>
-                <a:spcPts val="450"/>
-              </a:spcAft>
-            </a:pPr>
-            <a:r>
-              <a:rPr sz="1000" b="0" i="0">
-                <a:solidFill>
-                  <a:srgbClr val="5D5A54"/>
-                </a:solidFill>
-                <a:latin typeface="Inter Tight"/>
-              </a:rPr>
-              <a:t>Beaver Counseling</a:t>
-            </a:r>
-          </a:p>
-        </p:txBody>
-      </p:sp>
-      <p:sp>
-        <p:nvSpPr>
-          <p:cNvPr id="5" name="TextBox 4"/>
-          <p:cNvSpPr txBox="1"/>
-          <p:nvPr/>
-        </p:nvSpPr>
-        <p:spPr>
-          <a:xfrm>
-            <a:off x="822960" y="2011680"/>
-            <a:ext cx="10515600" cy="1463040"/>
-          </a:xfrm>
-          <a:prstGeom prst="rect">
-            <a:avLst/>
-          </a:prstGeom>
-          <a:noFill/>
-        </p:spPr>
-        <p:txBody>
-          <a:bodyPr wrap="square" anchor="b" lIns="0" rIns="0" tIns="0" bIns="0">
-            <a:spAutoFit/>
-          </a:bodyPr>
-          <a:lstStyle/>
-          <a:p>
-            <a:pPr algn="l">
-              <a:spcAft>
-                <a:spcPts val="2700"/>
-              </a:spcAft>
-            </a:pPr>
-            <a:r>
-              <a:rPr sz="6000" b="1" i="0">
-                <a:solidFill>
-                  <a:srgbClr val="FFFFFF"/>
-                </a:solidFill>
-                <a:latin typeface="Source Serif 4"/>
-              </a:rPr>
-              <a:t>Under Construction</a:t>
-            </a:r>
-          </a:p>
-        </p:txBody>
-      </p:sp>
-      <p:sp>
-        <p:nvSpPr>
-          <p:cNvPr id="6" name="TextBox 5"/>
-          <p:cNvSpPr txBox="1"/>
-          <p:nvPr/>
-        </p:nvSpPr>
-        <p:spPr>
-          <a:xfrm>
-            <a:off x="822960" y="3611880"/>
-            <a:ext cx="10515600" cy="914400"/>
-          </a:xfrm>
-          <a:prstGeom prst="rect">
-            <a:avLst/>
-          </a:prstGeom>
-          <a:noFill/>
-        </p:spPr>
-        <p:txBody>
-          <a:bodyPr wrap="square" anchor="t" lIns="0" rIns="0" tIns="0" bIns="0">
-            <a:spAutoFit/>
-          </a:bodyPr>
-          <a:lstStyle/>
-          <a:p>
-            <a:pPr algn="l">
-              <a:spcAft>
-                <a:spcPts val="1080"/>
-              </a:spcAft>
-            </a:pPr>
-            <a:r>
-              <a:rPr sz="2400" b="0" i="1">
-                <a:solidFill>
-                  <a:srgbClr val="E8E4DA"/>
-                </a:solidFill>
-                <a:latin typeface="Source Serif 4"/>
-              </a:rPr>
-              <a:t>Everyone asks what you want to be. Hardly anyone asks who.</a:t>
-            </a:r>
-          </a:p>
-        </p:txBody>
-      </p:sp>
-      <p:sp>
-        <p:nvSpPr>
-          <p:cNvPr id="7" name="TextBox 6"/>
-          <p:cNvSpPr txBox="1"/>
-          <p:nvPr/>
-        </p:nvSpPr>
-        <p:spPr>
-          <a:xfrm>
-            <a:off x="822960" y="6035040"/>
-            <a:ext cx="7315200" cy="365760"/>
-          </a:xfrm>
-          <a:prstGeom prst="rect">
-            <a:avLst/>
-          </a:prstGeom>
-          <a:noFill/>
-        </p:spPr>
-        <p:txBody>
-          <a:bodyPr wrap="square" anchor="t" lIns="0" rIns="0" tIns="0" bIns="0">
-            <a:spAutoFit/>
-          </a:bodyPr>
-          <a:lstStyle/>
-          <a:p>
-            <a:pPr algn="l">
-              <a:spcAft>
-                <a:spcPts val="585"/>
-              </a:spcAft>
-            </a:pPr>
-            <a:r>
-              <a:rPr sz="1300" b="0" i="0">
-                <a:solidFill>
-                  <a:srgbClr val="E8E4DA"/>
-                </a:solidFill>
-                <a:latin typeface="Inter Tight"/>
-              </a:rPr>
-              <a:t>Beaver Upper School · Counseling</a:t>
+              <a:t>Race, culture, language, gender, sexuality, faith, values, interests, body and ability, money, your online self. Write it for yourself.</a:t>
             </a:r>
           </a:p>
         </p:txBody>
@@ -7294,58 +7290,14 @@
       </p:sp>
       <p:sp>
         <p:nvSpPr>
-          <p:cNvPr id="5" name="Rectangle 4"/>
-          <p:cNvSpPr/>
-          <p:nvPr/>
-        </p:nvSpPr>
-        <p:spPr>
-          <a:xfrm>
-            <a:off x="822960" y="1371600"/>
-            <a:ext cx="73152" cy="3566160"/>
-          </a:xfrm>
-          <a:prstGeom prst="rect">
-            <a:avLst/>
-          </a:prstGeom>
-          <a:solidFill>
-            <a:srgbClr val="F47B20"/>
-          </a:solidFill>
-          <a:ln>
-            <a:noFill/>
-          </a:ln>
-          <a:effectLst/>
-        </p:spPr>
-        <p:style>
-          <a:lnRef idx="1">
-            <a:schemeClr val="accent1"/>
-          </a:lnRef>
-          <a:fillRef idx="3">
-            <a:schemeClr val="accent1"/>
-          </a:fillRef>
-          <a:effectRef idx="2">
-            <a:schemeClr val="accent1"/>
-          </a:effectRef>
-          <a:fontRef idx="minor">
-            <a:schemeClr val="lt1"/>
-          </a:fontRef>
-        </p:style>
-        <p:txBody>
-          <a:bodyPr rtlCol="0" anchor="ctr"/>
-          <a:lstStyle/>
-          <a:p>
-            <a:pPr algn="ctr"/>
-          </a:p>
-        </p:txBody>
-      </p:sp>
-      <p:sp>
-        <p:nvSpPr>
-          <p:cNvPr id="6" name="TextBox 5"/>
+          <p:cNvPr id="5" name="TextBox 4"/>
           <p:cNvSpPr txBox="1"/>
           <p:nvPr/>
         </p:nvSpPr>
         <p:spPr>
           <a:xfrm>
-            <a:off x="1188720" y="1371600"/>
-            <a:ext cx="10058400" cy="3566160"/>
+            <a:off x="822960" y="1463040"/>
+            <a:ext cx="10515600" cy="3291840"/>
           </a:xfrm>
           <a:prstGeom prst="rect">
             <a:avLst/>
@@ -7360,31 +7312,31 @@
           <a:p>
             <a:pPr algn="l">
               <a:spcAft>
-                <a:spcPts val="1800"/>
-              </a:spcAft>
-            </a:pPr>
-            <a:r>
-              <a:rPr sz="4000" b="0" i="1">
+                <a:spcPts val="2070"/>
+              </a:spcAft>
+            </a:pPr>
+            <a:r>
+              <a:rPr sz="4600" b="1" i="0">
                 <a:solidFill>
                   <a:srgbClr val="1C1B19"/>
                 </a:solidFill>
                 <a:latin typeface="Source Serif 4"/>
               </a:rPr>
-              <a:t>"You should know who you are by graduation."</a:t>
-            </a:r>
-          </a:p>
-        </p:txBody>
-      </p:sp>
-      <p:sp>
-        <p:nvSpPr>
-          <p:cNvPr id="7" name="TextBox 6"/>
+              <a:t>"Most adults expect to change a lot in the next ten years."</a:t>
+            </a:r>
+          </a:p>
+        </p:txBody>
+      </p:sp>
+      <p:sp>
+        <p:nvSpPr>
+          <p:cNvPr id="6" name="TextBox 5"/>
           <p:cNvSpPr txBox="1"/>
           <p:nvPr/>
         </p:nvSpPr>
         <p:spPr>
           <a:xfrm>
-            <a:off x="1188720" y="5120640"/>
-            <a:ext cx="10058400" cy="914400"/>
+            <a:off x="822960" y="4846320"/>
+            <a:ext cx="10515600" cy="1097280"/>
           </a:xfrm>
           <a:prstGeom prst="rect">
             <a:avLst/>
@@ -7399,17 +7351,17 @@
           <a:p>
             <a:pPr algn="l">
               <a:spcAft>
-                <a:spcPts val="810"/>
-              </a:spcAft>
-            </a:pPr>
-            <a:r>
-              <a:rPr sz="1800" b="0" i="0">
+                <a:spcPts val="990"/>
+              </a:spcAft>
+            </a:pPr>
+            <a:r>
+              <a:rPr sz="2200" b="0" i="1">
                 <a:solidFill>
                   <a:srgbClr val="5D5A54"/>
                 </a:solidFill>
-                <a:latin typeface="Inter Tight"/>
-              </a:rPr>
-              <a:t>Point to a corner: agree, disagree, not sure, or it depends.</a:t>
+                <a:latin typeface="Source Serif 4"/>
+              </a:rPr>
+              <a:t>Point to a corner first. Then the answer.</a:t>
             </a:r>
           </a:p>
         </p:txBody>
@@ -7518,7 +7470,7 @@
                 </a:solidFill>
                 <a:latin typeface="Inter Tight"/>
               </a:rPr>
-              <a:t>EXPLORE, THEN COMMIT</a:t>
+              <a:t>THREE MOMENTS</a:t>
             </a:r>
           </a:p>
         </p:txBody>
@@ -7571,7 +7523,7 @@
         <p:spPr>
           <a:xfrm>
             <a:off x="822960" y="1005840"/>
-            <a:ext cx="10515600" cy="1097280"/>
+            <a:ext cx="10515600" cy="914400"/>
           </a:xfrm>
           <a:prstGeom prst="rect">
             <a:avLst/>
@@ -7586,31 +7538,77 @@
           <a:p>
             <a:pPr algn="l">
               <a:spcAft>
-                <a:spcPts val="1620"/>
-              </a:spcAft>
-            </a:pPr>
-            <a:r>
-              <a:rPr sz="3600" b="1" i="0">
+                <a:spcPts val="1530"/>
+              </a:spcAft>
+            </a:pPr>
+            <a:r>
+              <a:rPr sz="3400" b="1" i="0">
                 <a:solidFill>
                   <a:srgbClr val="1C1B19"/>
                 </a:solidFill>
                 <a:latin typeface="Source Serif 4"/>
               </a:rPr>
-              <a:t>Four common places to be</a:t>
-            </a:r>
-          </a:p>
-        </p:txBody>
-      </p:sp>
-      <p:sp>
-        <p:nvSpPr>
-          <p:cNvPr id="6" name="TextBox 5"/>
+              <a:t>What would you actually say?</a:t>
+            </a:r>
+          </a:p>
+        </p:txBody>
+      </p:sp>
+      <p:sp>
+        <p:nvSpPr>
+          <p:cNvPr id="6" name="Rectangle 5"/>
+          <p:cNvSpPr/>
+          <p:nvPr/>
+        </p:nvSpPr>
+        <p:spPr>
+          <a:xfrm>
+            <a:off x="822960" y="2103120"/>
+            <a:ext cx="3322320" cy="3840480"/>
+          </a:xfrm>
+          <a:prstGeom prst="rect">
+            <a:avLst/>
+          </a:prstGeom>
+          <a:solidFill>
+            <a:srgbClr val="FFFFFF"/>
+          </a:solidFill>
+          <a:ln w="15875">
+            <a:solidFill>
+              <a:srgbClr val="D8D2C6"/>
+            </a:solidFill>
+          </a:ln>
+          <a:effectLst/>
+        </p:spPr>
+        <p:style>
+          <a:lnRef idx="1">
+            <a:schemeClr val="accent1"/>
+          </a:lnRef>
+          <a:fillRef idx="3">
+            <a:schemeClr val="accent1"/>
+          </a:fillRef>
+          <a:effectRef idx="2">
+            <a:schemeClr val="accent1"/>
+          </a:effectRef>
+          <a:fontRef idx="minor">
+            <a:schemeClr val="lt1"/>
+          </a:fontRef>
+        </p:style>
+        <p:txBody>
+          <a:bodyPr rtlCol="0" anchor="ctr"/>
+          <a:lstStyle/>
+          <a:p>
+            <a:pPr algn="ctr"/>
+          </a:p>
+        </p:txBody>
+      </p:sp>
+      <p:sp>
+        <p:nvSpPr>
+          <p:cNvPr id="7" name="TextBox 6"/>
           <p:cNvSpPr txBox="1"/>
           <p:nvPr/>
         </p:nvSpPr>
         <p:spPr>
           <a:xfrm>
-            <a:off x="822960" y="2194560"/>
-            <a:ext cx="548640" cy="1005840"/>
+            <a:off x="1051560" y="2286000"/>
+            <a:ext cx="2865120" cy="365760"/>
           </a:xfrm>
           <a:prstGeom prst="rect">
             <a:avLst/>
@@ -7625,31 +7623,31 @@
           <a:p>
             <a:pPr algn="l">
               <a:spcAft>
-                <a:spcPts val="1170"/>
-              </a:spcAft>
-            </a:pPr>
-            <a:r>
-              <a:rPr sz="2600" b="1" i="0">
-                <a:solidFill>
-                  <a:srgbClr val="F47B20"/>
-                </a:solidFill>
-                <a:latin typeface="Source Serif 4"/>
-              </a:rPr>
-              <a:t>•</a:t>
-            </a:r>
-          </a:p>
-        </p:txBody>
-      </p:sp>
-      <p:sp>
-        <p:nvSpPr>
-          <p:cNvPr id="7" name="TextBox 6"/>
+                <a:spcPts val="585"/>
+              </a:spcAft>
+            </a:pPr>
+            <a:r>
+              <a:rPr sz="1300" b="1" i="0">
+                <a:solidFill>
+                  <a:srgbClr val="0B2D5B"/>
+                </a:solidFill>
+                <a:latin typeface="Inter Tight"/>
+              </a:rPr>
+              <a:t>NADIA</a:t>
+            </a:r>
+          </a:p>
+        </p:txBody>
+      </p:sp>
+      <p:sp>
+        <p:nvSpPr>
+          <p:cNvPr id="8" name="TextBox 7"/>
           <p:cNvSpPr txBox="1"/>
           <p:nvPr/>
         </p:nvSpPr>
         <p:spPr>
           <a:xfrm>
-            <a:off x="1463040" y="2231136"/>
-            <a:ext cx="9875520" cy="1005840"/>
+            <a:off x="1051560" y="2743200"/>
+            <a:ext cx="2865120" cy="3017520"/>
           </a:xfrm>
           <a:prstGeom prst="rect">
             <a:avLst/>
@@ -7664,47 +7662,77 @@
           <a:p>
             <a:pPr algn="l">
               <a:spcAft>
-                <a:spcPts val="945"/>
-              </a:spcAft>
-            </a:pPr>
-            <a:r>
-              <a:rPr sz="2100" b="1" i="0">
+                <a:spcPts val="810"/>
+              </a:spcAft>
+            </a:pPr>
+            <a:r>
+              <a:rPr sz="1800" b="0" i="0">
                 <a:solidFill>
                   <a:srgbClr val="1C1B19"/>
                 </a:solidFill>
                 <a:latin typeface="Source Serif 4"/>
               </a:rPr>
-              <a:t>Not exploring, not committed.</a:t>
-            </a:r>
-          </a:p>
-          <a:p>
-            <a:pPr algn="l">
-              <a:spcAft>
-                <a:spcPts val="945"/>
-              </a:spcAft>
-            </a:pPr>
-            <a:r>
-              <a:rPr sz="1600" b="0" i="0">
-                <a:solidFill>
-                  <a:srgbClr val="5D5A54"/>
-                </a:solidFill>
-                <a:latin typeface="Source Serif 4"/>
-              </a:rPr>
-              <a:t>"I haven't really thought about it."</a:t>
-            </a:r>
-          </a:p>
-        </p:txBody>
-      </p:sp>
-      <p:sp>
-        <p:nvSpPr>
-          <p:cNvPr id="8" name="TextBox 7"/>
+              <a:t>Her family has always said she'll be pre-med like her older sister. She's starting to love design.</a:t>
+            </a:r>
+          </a:p>
+        </p:txBody>
+      </p:sp>
+      <p:sp>
+        <p:nvSpPr>
+          <p:cNvPr id="9" name="Rectangle 8"/>
+          <p:cNvSpPr/>
+          <p:nvPr/>
+        </p:nvSpPr>
+        <p:spPr>
+          <a:xfrm>
+            <a:off x="4419600" y="2103120"/>
+            <a:ext cx="3322320" cy="3840480"/>
+          </a:xfrm>
+          <a:prstGeom prst="rect">
+            <a:avLst/>
+          </a:prstGeom>
+          <a:solidFill>
+            <a:srgbClr val="FFFFFF"/>
+          </a:solidFill>
+          <a:ln w="15875">
+            <a:solidFill>
+              <a:srgbClr val="D8D2C6"/>
+            </a:solidFill>
+          </a:ln>
+          <a:effectLst/>
+        </p:spPr>
+        <p:style>
+          <a:lnRef idx="1">
+            <a:schemeClr val="accent1"/>
+          </a:lnRef>
+          <a:fillRef idx="3">
+            <a:schemeClr val="accent1"/>
+          </a:fillRef>
+          <a:effectRef idx="2">
+            <a:schemeClr val="accent1"/>
+          </a:effectRef>
+          <a:fontRef idx="minor">
+            <a:schemeClr val="lt1"/>
+          </a:fontRef>
+        </p:style>
+        <p:txBody>
+          <a:bodyPr rtlCol="0" anchor="ctr"/>
+          <a:lstStyle/>
+          <a:p>
+            <a:pPr algn="ctr"/>
+          </a:p>
+        </p:txBody>
+      </p:sp>
+      <p:sp>
+        <p:nvSpPr>
+          <p:cNvPr id="10" name="TextBox 9"/>
           <p:cNvSpPr txBox="1"/>
           <p:nvPr/>
         </p:nvSpPr>
         <p:spPr>
           <a:xfrm>
-            <a:off x="822960" y="3200400"/>
-            <a:ext cx="548640" cy="1005840"/>
+            <a:off x="4648200" y="2286000"/>
+            <a:ext cx="2865120" cy="365760"/>
           </a:xfrm>
           <a:prstGeom prst="rect">
             <a:avLst/>
@@ -7719,31 +7747,31 @@
           <a:p>
             <a:pPr algn="l">
               <a:spcAft>
-                <a:spcPts val="1170"/>
-              </a:spcAft>
-            </a:pPr>
-            <a:r>
-              <a:rPr sz="2600" b="1" i="0">
-                <a:solidFill>
-                  <a:srgbClr val="F47B20"/>
-                </a:solidFill>
-                <a:latin typeface="Source Serif 4"/>
-              </a:rPr>
-              <a:t>•</a:t>
-            </a:r>
-          </a:p>
-        </p:txBody>
-      </p:sp>
-      <p:sp>
-        <p:nvSpPr>
-          <p:cNvPr id="9" name="TextBox 8"/>
+                <a:spcPts val="585"/>
+              </a:spcAft>
+            </a:pPr>
+            <a:r>
+              <a:rPr sz="1300" b="1" i="0">
+                <a:solidFill>
+                  <a:srgbClr val="0B2D5B"/>
+                </a:solidFill>
+                <a:latin typeface="Inter Tight"/>
+              </a:rPr>
+              <a:t>GABE</a:t>
+            </a:r>
+          </a:p>
+        </p:txBody>
+      </p:sp>
+      <p:sp>
+        <p:nvSpPr>
+          <p:cNvPr id="11" name="TextBox 10"/>
           <p:cNvSpPr txBox="1"/>
           <p:nvPr/>
         </p:nvSpPr>
         <p:spPr>
           <a:xfrm>
-            <a:off x="1463040" y="3236976"/>
-            <a:ext cx="9875520" cy="1005840"/>
+            <a:off x="4648200" y="2743200"/>
+            <a:ext cx="2865120" cy="3017520"/>
           </a:xfrm>
           <a:prstGeom prst="rect">
             <a:avLst/>
@@ -7758,47 +7786,77 @@
           <a:p>
             <a:pPr algn="l">
               <a:spcAft>
-                <a:spcPts val="945"/>
-              </a:spcAft>
-            </a:pPr>
-            <a:r>
-              <a:rPr sz="2100" b="1" i="0">
+                <a:spcPts val="810"/>
+              </a:spcAft>
+            </a:pPr>
+            <a:r>
+              <a:rPr sz="1800" b="0" i="0">
                 <a:solidFill>
                   <a:srgbClr val="1C1B19"/>
                 </a:solidFill>
                 <a:latin typeface="Source Serif 4"/>
               </a:rPr>
-              <a:t>Committed without exploring.</a:t>
-            </a:r>
-          </a:p>
-          <a:p>
-            <a:pPr algn="l">
-              <a:spcAft>
-                <a:spcPts val="945"/>
-              </a:spcAft>
-            </a:pPr>
-            <a:r>
-              <a:rPr sz="1600" b="0" i="0">
-                <a:solidFill>
-                  <a:srgbClr val="5D5A54"/>
-                </a:solidFill>
-                <a:latin typeface="Source Serif 4"/>
-              </a:rPr>
-              <a:t>"It's what I was handed."</a:t>
-            </a:r>
-          </a:p>
-        </p:txBody>
-      </p:sp>
-      <p:sp>
-        <p:nvSpPr>
-          <p:cNvPr id="10" name="TextBox 9"/>
+              <a:t>A classmate asks where he's from. "Ohio." "No, where are you really from?"</a:t>
+            </a:r>
+          </a:p>
+        </p:txBody>
+      </p:sp>
+      <p:sp>
+        <p:nvSpPr>
+          <p:cNvPr id="12" name="Rectangle 11"/>
+          <p:cNvSpPr/>
+          <p:nvPr/>
+        </p:nvSpPr>
+        <p:spPr>
+          <a:xfrm>
+            <a:off x="8016239" y="2103120"/>
+            <a:ext cx="3322320" cy="3840480"/>
+          </a:xfrm>
+          <a:prstGeom prst="rect">
+            <a:avLst/>
+          </a:prstGeom>
+          <a:solidFill>
+            <a:srgbClr val="FFFFFF"/>
+          </a:solidFill>
+          <a:ln w="15875">
+            <a:solidFill>
+              <a:srgbClr val="D8D2C6"/>
+            </a:solidFill>
+          </a:ln>
+          <a:effectLst/>
+        </p:spPr>
+        <p:style>
+          <a:lnRef idx="1">
+            <a:schemeClr val="accent1"/>
+          </a:lnRef>
+          <a:fillRef idx="3">
+            <a:schemeClr val="accent1"/>
+          </a:fillRef>
+          <a:effectRef idx="2">
+            <a:schemeClr val="accent1"/>
+          </a:effectRef>
+          <a:fontRef idx="minor">
+            <a:schemeClr val="lt1"/>
+          </a:fontRef>
+        </p:style>
+        <p:txBody>
+          <a:bodyPr rtlCol="0" anchor="ctr"/>
+          <a:lstStyle/>
+          <a:p>
+            <a:pPr algn="ctr"/>
+          </a:p>
+        </p:txBody>
+      </p:sp>
+      <p:sp>
+        <p:nvSpPr>
+          <p:cNvPr id="13" name="TextBox 12"/>
           <p:cNvSpPr txBox="1"/>
           <p:nvPr/>
         </p:nvSpPr>
         <p:spPr>
           <a:xfrm>
-            <a:off x="822960" y="4206240"/>
-            <a:ext cx="548640" cy="1005840"/>
+            <a:off x="8244839" y="2286000"/>
+            <a:ext cx="2865120" cy="365760"/>
           </a:xfrm>
           <a:prstGeom prst="rect">
             <a:avLst/>
@@ -7813,31 +7871,31 @@
           <a:p>
             <a:pPr algn="l">
               <a:spcAft>
-                <a:spcPts val="1170"/>
-              </a:spcAft>
-            </a:pPr>
-            <a:r>
-              <a:rPr sz="2600" b="1" i="0">
-                <a:solidFill>
-                  <a:srgbClr val="F47B20"/>
-                </a:solidFill>
-                <a:latin typeface="Source Serif 4"/>
-              </a:rPr>
-              <a:t>•</a:t>
-            </a:r>
-          </a:p>
-        </p:txBody>
-      </p:sp>
-      <p:sp>
-        <p:nvSpPr>
-          <p:cNvPr id="11" name="TextBox 10"/>
+                <a:spcPts val="585"/>
+              </a:spcAft>
+            </a:pPr>
+            <a:r>
+              <a:rPr sz="1300" b="1" i="0">
+                <a:solidFill>
+                  <a:srgbClr val="0B2D5B"/>
+                </a:solidFill>
+                <a:latin typeface="Inter Tight"/>
+              </a:rPr>
+              <a:t>SAM</a:t>
+            </a:r>
+          </a:p>
+        </p:txBody>
+      </p:sp>
+      <p:sp>
+        <p:nvSpPr>
+          <p:cNvPr id="14" name="TextBox 13"/>
           <p:cNvSpPr txBox="1"/>
           <p:nvPr/>
         </p:nvSpPr>
         <p:spPr>
           <a:xfrm>
-            <a:off x="1463040" y="4242816"/>
-            <a:ext cx="9875520" cy="1005840"/>
+            <a:off x="8244839" y="2743200"/>
+            <a:ext cx="2865120" cy="3017520"/>
           </a:xfrm>
           <a:prstGeom prst="rect">
             <a:avLst/>
@@ -7852,127 +7910,17 @@
           <a:p>
             <a:pPr algn="l">
               <a:spcAft>
-                <a:spcPts val="945"/>
-              </a:spcAft>
-            </a:pPr>
-            <a:r>
-              <a:rPr sz="2100" b="1" i="0">
+                <a:spcPts val="810"/>
+              </a:spcAft>
+            </a:pPr>
+            <a:r>
+              <a:rPr sz="1800" b="0" i="0">
                 <a:solidFill>
                   <a:srgbClr val="1C1B19"/>
                 </a:solidFill>
                 <a:latin typeface="Source Serif 4"/>
               </a:rPr>
-              <a:t>Exploring, not committed yet.</a:t>
-            </a:r>
-          </a:p>
-          <a:p>
-            <a:pPr algn="l">
-              <a:spcAft>
-                <a:spcPts val="945"/>
-              </a:spcAft>
-            </a:pPr>
-            <a:r>
-              <a:rPr sz="1600" b="0" i="0">
-                <a:solidFill>
-                  <a:srgbClr val="5D5A54"/>
-                </a:solidFill>
-                <a:latin typeface="Source Serif 4"/>
-              </a:rPr>
-              <a:t>"I'm trying things on."</a:t>
-            </a:r>
-          </a:p>
-        </p:txBody>
-      </p:sp>
-      <p:sp>
-        <p:nvSpPr>
-          <p:cNvPr id="12" name="TextBox 11"/>
-          <p:cNvSpPr txBox="1"/>
-          <p:nvPr/>
-        </p:nvSpPr>
-        <p:spPr>
-          <a:xfrm>
-            <a:off x="822960" y="5212080"/>
-            <a:ext cx="548640" cy="1005840"/>
-          </a:xfrm>
-          <a:prstGeom prst="rect">
-            <a:avLst/>
-          </a:prstGeom>
-          <a:noFill/>
-        </p:spPr>
-        <p:txBody>
-          <a:bodyPr wrap="square" anchor="t" lIns="0" rIns="0" tIns="0" bIns="0">
-            <a:spAutoFit/>
-          </a:bodyPr>
-          <a:lstStyle/>
-          <a:p>
-            <a:pPr algn="l">
-              <a:spcAft>
-                <a:spcPts val="1170"/>
-              </a:spcAft>
-            </a:pPr>
-            <a:r>
-              <a:rPr sz="2600" b="1" i="0">
-                <a:solidFill>
-                  <a:srgbClr val="F47B20"/>
-                </a:solidFill>
-                <a:latin typeface="Source Serif 4"/>
-              </a:rPr>
-              <a:t>•</a:t>
-            </a:r>
-          </a:p>
-        </p:txBody>
-      </p:sp>
-      <p:sp>
-        <p:nvSpPr>
-          <p:cNvPr id="13" name="TextBox 12"/>
-          <p:cNvSpPr txBox="1"/>
-          <p:nvPr/>
-        </p:nvSpPr>
-        <p:spPr>
-          <a:xfrm>
-            <a:off x="1463040" y="5248656"/>
-            <a:ext cx="9875520" cy="1005840"/>
-          </a:xfrm>
-          <a:prstGeom prst="rect">
-            <a:avLst/>
-          </a:prstGeom>
-          <a:noFill/>
-        </p:spPr>
-        <p:txBody>
-          <a:bodyPr wrap="square" anchor="t" lIns="0" rIns="0" tIns="0" bIns="0">
-            <a:spAutoFit/>
-          </a:bodyPr>
-          <a:lstStyle/>
-          <a:p>
-            <a:pPr algn="l">
-              <a:spcAft>
-                <a:spcPts val="945"/>
-              </a:spcAft>
-            </a:pPr>
-            <a:r>
-              <a:rPr sz="2100" b="1" i="0">
-                <a:solidFill>
-                  <a:srgbClr val="1C1B19"/>
-                </a:solidFill>
-                <a:latin typeface="Source Serif 4"/>
-              </a:rPr>
-              <a:t>Explored, then committed.</a:t>
-            </a:r>
-          </a:p>
-          <a:p>
-            <a:pPr algn="l">
-              <a:spcAft>
-                <a:spcPts val="945"/>
-              </a:spcAft>
-            </a:pPr>
-            <a:r>
-              <a:rPr sz="1600" b="0" i="0">
-                <a:solidFill>
-                  <a:srgbClr val="5D5A54"/>
-                </a:solidFill>
-                <a:latin typeface="Source Serif 4"/>
-              </a:rPr>
-              <a:t>"I looked, and this fits me."</a:t>
+              <a:t>A friend tells Sam, nervously, that they're questioning their gender.</a:t>
             </a:r>
           </a:p>
         </p:txBody>
@@ -8081,7 +8029,7 @@
                 </a:solidFill>
                 <a:latin typeface="Inter Tight"/>
               </a:rPr>
-              <a:t>PRIVATE</a:t>
+              <a:t>BEFORE YOU GO</a:t>
             </a:r>
           </a:p>
         </p:txBody>
@@ -8127,23 +8075,103 @@
       </p:sp>
       <p:sp>
         <p:nvSpPr>
-          <p:cNvPr id="5" name="Rectangle 4"/>
+          <p:cNvPr id="5" name="TextBox 4"/>
+          <p:cNvSpPr txBox="1"/>
+          <p:nvPr/>
+        </p:nvSpPr>
+        <p:spPr>
+          <a:xfrm>
+            <a:off x="822960" y="1188720"/>
+            <a:ext cx="10515600" cy="914400"/>
+          </a:xfrm>
+          <a:prstGeom prst="rect">
+            <a:avLst/>
+          </a:prstGeom>
+          <a:noFill/>
+        </p:spPr>
+        <p:txBody>
+          <a:bodyPr wrap="square" anchor="t" lIns="0" rIns="0" tIns="0" bIns="0">
+            <a:spAutoFit/>
+          </a:bodyPr>
+          <a:lstStyle/>
+          <a:p>
+            <a:pPr algn="l">
+              <a:spcAft>
+                <a:spcPts val="1620"/>
+              </a:spcAft>
+            </a:pPr>
+            <a:r>
+              <a:rPr sz="3600" b="1" i="0">
+                <a:solidFill>
+                  <a:srgbClr val="1C1B19"/>
+                </a:solidFill>
+                <a:latin typeface="Source Serif 4"/>
+              </a:rPr>
+              <a:t>Explore on purpose. Commit when it fits.</a:t>
+            </a:r>
+          </a:p>
+        </p:txBody>
+      </p:sp>
+      <p:sp>
+        <p:nvSpPr>
+          <p:cNvPr id="6" name="TextBox 5"/>
+          <p:cNvSpPr txBox="1"/>
+          <p:nvPr/>
+        </p:nvSpPr>
+        <p:spPr>
+          <a:xfrm>
+            <a:off x="822960" y="2286000"/>
+            <a:ext cx="10515600" cy="1463040"/>
+          </a:xfrm>
+          <a:prstGeom prst="rect">
+            <a:avLst/>
+          </a:prstGeom>
+          <a:noFill/>
+        </p:spPr>
+        <p:txBody>
+          <a:bodyPr wrap="square" anchor="t" lIns="0" rIns="0" tIns="0" bIns="0">
+            <a:spAutoFit/>
+          </a:bodyPr>
+          <a:lstStyle/>
+          <a:p>
+            <a:pPr algn="l">
+              <a:spcAft>
+                <a:spcPts val="1080"/>
+              </a:spcAft>
+            </a:pPr>
+            <a:r>
+              <a:rPr sz="2400" b="0" i="0">
+                <a:solidFill>
+                  <a:srgbClr val="1C1B19"/>
+                </a:solidFill>
+                <a:latin typeface="Source Serif 4"/>
+              </a:rPr>
+              <a:t>Write one thing you'll try that's easy to undo: an elective, a club, a new genre, a question for an elder.</a:t>
+            </a:r>
+          </a:p>
+        </p:txBody>
+      </p:sp>
+      <p:sp>
+        <p:nvSpPr>
+          <p:cNvPr id="7" name="Rectangle 6"/>
           <p:cNvSpPr/>
           <p:nvPr/>
         </p:nvSpPr>
         <p:spPr>
           <a:xfrm>
-            <a:off x="822960" y="1371600"/>
-            <a:ext cx="73152" cy="3566160"/>
+            <a:off x="822960" y="4023360"/>
+            <a:ext cx="10515600" cy="1371600"/>
           </a:xfrm>
           <a:prstGeom prst="rect">
             <a:avLst/>
           </a:prstGeom>
           <a:solidFill>
-            <a:srgbClr val="F47B20"/>
+            <a:srgbClr val="FFFFFF"/>
           </a:solidFill>
-          <a:ln>
-            <a:noFill/>
+          <a:ln w="15875">
+            <a:solidFill>
+              <a:srgbClr val="1C1B19"/>
+            </a:solidFill>
           </a:ln>
           <a:effectLst/>
         </p:spPr>
@@ -8171,14 +8199,14 @@
       </p:sp>
       <p:sp>
         <p:nvSpPr>
-          <p:cNvPr id="6" name="TextBox 5"/>
+          <p:cNvPr id="8" name="TextBox 7"/>
           <p:cNvSpPr txBox="1"/>
           <p:nvPr/>
         </p:nvSpPr>
         <p:spPr>
           <a:xfrm>
-            <a:off x="1188720" y="1371600"/>
-            <a:ext cx="10058400" cy="3566160"/>
+            <a:off x="1097280" y="4206240"/>
+            <a:ext cx="10058400" cy="365760"/>
           </a:xfrm>
           <a:prstGeom prst="rect">
             <a:avLst/>
@@ -8186,38 +8214,38 @@
           <a:noFill/>
         </p:spPr>
         <p:txBody>
-          <a:bodyPr wrap="square" anchor="ctr" lIns="0" rIns="0" tIns="0" bIns="0">
+          <a:bodyPr wrap="square" anchor="t" lIns="0" rIns="0" tIns="0" bIns="0">
             <a:spAutoFit/>
           </a:bodyPr>
           <a:lstStyle/>
           <a:p>
             <a:pPr algn="l">
               <a:spcAft>
-                <a:spcPts val="1800"/>
-              </a:spcAft>
-            </a:pPr>
-            <a:r>
-              <a:rPr sz="4000" b="0" i="1">
-                <a:solidFill>
-                  <a:srgbClr val="1C1B19"/>
-                </a:solidFill>
-                <a:latin typeface="Source Serif 4"/>
-              </a:rPr>
-              <a:t>Which piece of you feels biggest right now?</a:t>
-            </a:r>
-          </a:p>
-        </p:txBody>
-      </p:sp>
-      <p:sp>
-        <p:nvSpPr>
-          <p:cNvPr id="7" name="TextBox 6"/>
+                <a:spcPts val="540"/>
+              </a:spcAft>
+            </a:pPr>
+            <a:r>
+              <a:rPr sz="1200" b="1" i="0">
+                <a:solidFill>
+                  <a:srgbClr val="0B2D5B"/>
+                </a:solidFill>
+                <a:latin typeface="Inter Tight"/>
+              </a:rPr>
+              <a:t>STUDENT PAGE</a:t>
+            </a:r>
+          </a:p>
+        </p:txBody>
+      </p:sp>
+      <p:sp>
+        <p:nvSpPr>
+          <p:cNvPr id="9" name="TextBox 8"/>
           <p:cNvSpPr txBox="1"/>
           <p:nvPr/>
         </p:nvSpPr>
         <p:spPr>
           <a:xfrm>
-            <a:off x="1188720" y="5120640"/>
-            <a:ext cx="10058400" cy="914400"/>
+            <a:off x="1097280" y="4617720"/>
+            <a:ext cx="10058400" cy="640080"/>
           </a:xfrm>
           <a:prstGeom prst="rect">
             <a:avLst/>
@@ -8232,17 +8260,17 @@
           <a:p>
             <a:pPr algn="l">
               <a:spcAft>
-                <a:spcPts val="810"/>
-              </a:spcAft>
-            </a:pPr>
-            <a:r>
-              <a:rPr sz="1800" b="0" i="0">
-                <a:solidFill>
-                  <a:srgbClr val="5D5A54"/>
+                <a:spcPts val="900"/>
+              </a:spcAft>
+            </a:pPr>
+            <a:r>
+              <a:rPr sz="2000" b="0" i="0">
+                <a:solidFill>
+                  <a:srgbClr val="1C1B19"/>
                 </a:solidFill>
                 <a:latin typeface="Inter Tight"/>
               </a:rPr>
-              <a:t>Race, culture, language, gender, sexuality, faith, values, interests, body and ability, money, your online self. Write it for yourself.</a:t>
+              <a:t>https://rmwtoolkit.github.io/bcds-toolkit/under-construction-high-school.html</a:t>
             </a:r>
           </a:p>
         </p:txBody>
@@ -8256,12 +8284,12 @@
 </file>
 
 <file path=ppt/slides/slide9.xml><?xml version="1.0" encoding="utf-8"?>
-<p:sld xmlns:a="http://schemas.openxmlformats.org/drawingml/2006/main" xmlns:p="http://schemas.openxmlformats.org/presentationml/2006/main" xmlns:r="http://schemas.openxmlformats.org/officeDocument/2006/relationships">
+<p:sld xmlns:a="http://schemas.openxmlformats.org/drawingml/2006/main" xmlns:p="http://schemas.openxmlformats.org/presentationml/2006/main" xmlns:r="http://schemas.openxmlformats.org/officeDocument/2006/relationships" show="0">
   <p:cSld>
     <p:bg>
       <p:bgPr>
         <a:solidFill>
-          <a:srgbClr val="F7F4EE"/>
+          <a:srgbClr val="EEEBE4"/>
         </a:solidFill>
         <a:effectLst/>
       </p:bgPr>
@@ -8281,14 +8309,14 @@
         </p:nvSpPr>
         <p:spPr>
           <a:xfrm>
-            <a:off x="548640" y="502920"/>
-            <a:ext cx="457200" cy="54864"/>
+            <a:off x="0" y="0"/>
+            <a:ext cx="12191695" cy="384048"/>
           </a:xfrm>
           <a:prstGeom prst="rect">
             <a:avLst/>
           </a:prstGeom>
           <a:solidFill>
-            <a:srgbClr val="F47B20"/>
+            <a:srgbClr val="0B2D5B"/>
           </a:solidFill>
           <a:ln>
             <a:noFill/>
@@ -8325,8 +8353,8 @@
         </p:nvSpPr>
         <p:spPr>
           <a:xfrm>
-            <a:off x="1143000" y="393192"/>
-            <a:ext cx="8229600" cy="274320"/>
+            <a:off x="548640" y="100584"/>
+            <a:ext cx="10972800" cy="274320"/>
           </a:xfrm>
           <a:prstGeom prst="rect">
             <a:avLst/>
@@ -8341,17 +8369,17 @@
           <a:p>
             <a:pPr algn="l">
               <a:spcAft>
-                <a:spcPts val="540"/>
-              </a:spcAft>
-            </a:pPr>
-            <a:r>
-              <a:rPr sz="1200" b="1" i="0">
-                <a:solidFill>
-                  <a:srgbClr val="5D5A54"/>
+                <a:spcPts val="495"/>
+              </a:spcAft>
+            </a:pPr>
+            <a:r>
+              <a:rPr sz="1100" b="1" i="0">
+                <a:solidFill>
+                  <a:srgbClr val="FFFFFF"/>
                 </a:solidFill>
                 <a:latin typeface="Inter Tight"/>
               </a:rPr>
-              <a:t>FOUR CORNERS</a:t>
+              <a:t>TEACHER PAGE  ·  skipped when you present  ·  Lesson plan</a:t>
             </a:r>
           </a:p>
         </p:txBody>
@@ -8364,8 +8392,8 @@
         </p:nvSpPr>
         <p:spPr>
           <a:xfrm>
-            <a:off x="8229600" y="6400800"/>
-            <a:ext cx="3410712" cy="274320"/>
+            <a:off x="548640" y="685800"/>
+            <a:ext cx="10972800" cy="731520"/>
           </a:xfrm>
           <a:prstGeom prst="rect">
             <a:avLst/>
@@ -8378,19 +8406,19 @@
           </a:bodyPr>
           <a:lstStyle/>
           <a:p>
-            <a:pPr algn="r">
-              <a:spcAft>
-                <a:spcPts val="450"/>
-              </a:spcAft>
-            </a:pPr>
-            <a:r>
-              <a:rPr sz="1000" b="0" i="0">
-                <a:solidFill>
-                  <a:srgbClr val="5D5A54"/>
-                </a:solidFill>
-                <a:latin typeface="Inter Tight"/>
-              </a:rPr>
-              <a:t>Beaver Counseling</a:t>
+            <a:pPr algn="l">
+              <a:spcAft>
+                <a:spcPts val="1530"/>
+              </a:spcAft>
+            </a:pPr>
+            <a:r>
+              <a:rPr sz="3400" b="1" i="0">
+                <a:solidFill>
+                  <a:srgbClr val="1C1B19"/>
+                </a:solidFill>
+                <a:latin typeface="Source Serif 4"/>
+              </a:rPr>
+              <a:t>Under Construction</a:t>
             </a:r>
           </a:p>
         </p:txBody>
@@ -8403,8 +8431,8 @@
         </p:nvSpPr>
         <p:spPr>
           <a:xfrm>
-            <a:off x="822960" y="1463040"/>
-            <a:ext cx="10515600" cy="3291840"/>
+            <a:off x="548640" y="1325880"/>
+            <a:ext cx="10972800" cy="365760"/>
           </a:xfrm>
           <a:prstGeom prst="rect">
             <a:avLst/>
@@ -8412,24 +8440,24 @@
           <a:noFill/>
         </p:spPr>
         <p:txBody>
-          <a:bodyPr wrap="square" anchor="ctr" lIns="0" rIns="0" tIns="0" bIns="0">
+          <a:bodyPr wrap="square" anchor="t" lIns="0" rIns="0" tIns="0" bIns="0">
             <a:spAutoFit/>
           </a:bodyPr>
           <a:lstStyle/>
           <a:p>
             <a:pPr algn="l">
               <a:spcAft>
-                <a:spcPts val="2070"/>
-              </a:spcAft>
-            </a:pPr>
-            <a:r>
-              <a:rPr sz="4600" b="1" i="0">
-                <a:solidFill>
-                  <a:srgbClr val="1C1B19"/>
-                </a:solidFill>
-                <a:latin typeface="Source Serif 4"/>
-              </a:rPr>
-              <a:t>"Most adults expect to change a lot in the next ten years."</a:t>
+                <a:spcPts val="630"/>
+              </a:spcAft>
+            </a:pPr>
+            <a:r>
+              <a:rPr sz="1400" b="0" i="0">
+                <a:solidFill>
+                  <a:srgbClr val="5D5A54"/>
+                </a:solidFill>
+                <a:latin typeface="Inter Tight"/>
+              </a:rPr>
+              <a:t>Upper School  ·  20 minutes (fits a 30-minute advisory, with time for your opening check-in; 10-minute version below)  ·  Any grade</a:t>
             </a:r>
           </a:p>
         </p:txBody>
@@ -8442,8 +8470,8 @@
         </p:nvSpPr>
         <p:spPr>
           <a:xfrm>
-            <a:off x="822960" y="4846320"/>
-            <a:ext cx="10515600" cy="1097280"/>
+            <a:off x="548640" y="1828800"/>
+            <a:ext cx="5120640" cy="4389120"/>
           </a:xfrm>
           <a:prstGeom prst="rect">
             <a:avLst/>
@@ -8458,17 +8486,350 @@
           <a:p>
             <a:pPr algn="l">
               <a:spcAft>
-                <a:spcPts val="990"/>
-              </a:spcAft>
-            </a:pPr>
-            <a:r>
-              <a:rPr sz="2200" b="0" i="1">
-                <a:solidFill>
-                  <a:srgbClr val="5D5A54"/>
+                <a:spcPts val="675"/>
+              </a:spcAft>
+            </a:pPr>
+            <a:r>
+              <a:rPr sz="1100" b="1" i="0">
+                <a:solidFill>
+                  <a:srgbClr val="0B2D5B"/>
+                </a:solidFill>
+                <a:latin typeface="Inter Tight"/>
+              </a:rPr>
+              <a:t>GOAL</a:t>
+            </a:r>
+          </a:p>
+          <a:p>
+            <a:pPr algn="l">
+              <a:spcAft>
+                <a:spcPts val="675"/>
+              </a:spcAft>
+            </a:pPr>
+            <a:r>
+              <a:rPr sz="1500" b="0" i="0">
+                <a:solidFill>
+                  <a:srgbClr val="1C1B19"/>
                 </a:solidFill>
                 <a:latin typeface="Source Serif 4"/>
               </a:rPr>
-              <a:t>Point to a corner first. Then the answer.</a:t>
+              <a:t>Students can describe identity as exploring and then committing, know that it keeps developing through the 20s, and choose one low-stakes way to explore or one place to be all of themselves. Nobody has to share anything about their own identity.</a:t>
+            </a:r>
+          </a:p>
+          <a:p>
+            <a:pPr algn="l">
+              <a:spcAft>
+                <a:spcPts val="675"/>
+              </a:spcAft>
+            </a:pPr>
+            <a:r>
+              <a:rPr sz="1500" b="0" i="0">
+                <a:solidFill>
+                  <a:srgbClr val="1C1B19"/>
+                </a:solidFill>
+                <a:latin typeface="Source Serif 4"/>
+              </a:rPr>
+              <a:t/>
+            </a:r>
+          </a:p>
+          <a:p>
+            <a:pPr algn="l">
+              <a:spcAft>
+                <a:spcPts val="675"/>
+              </a:spcAft>
+            </a:pPr>
+            <a:r>
+              <a:rPr sz="1100" b="1" i="0">
+                <a:solidFill>
+                  <a:srgbClr val="0B2D5B"/>
+                </a:solidFill>
+                <a:latin typeface="Inter Tight"/>
+              </a:rPr>
+              <a:t>MATERIALS</a:t>
+            </a:r>
+          </a:p>
+          <a:p>
+            <a:pPr algn="l">
+              <a:spcAft>
+                <a:spcPts val="675"/>
+              </a:spcAft>
+            </a:pPr>
+            <a:r>
+              <a:rPr sz="1500" b="0" i="0">
+                <a:solidFill>
+                  <a:srgbClr val="1C1B19"/>
+                </a:solidFill>
+                <a:latin typeface="Source Serif 4"/>
+              </a:rPr>
+              <a:t>Four corner signs (agree, disagree, not sure, it depends), or just point to four corners of the room</a:t>
+            </a:r>
+          </a:p>
+          <a:p>
+            <a:pPr algn="l">
+              <a:spcAft>
+                <a:spcPts val="675"/>
+              </a:spcAft>
+            </a:pPr>
+            <a:r>
+              <a:rPr sz="1500" b="0" i="0">
+                <a:solidFill>
+                  <a:srgbClr val="1C1B19"/>
+                </a:solidFill>
+                <a:latin typeface="Source Serif 4"/>
+              </a:rPr>
+              <a:t>Index cards for the private reflection and the closing experiment</a:t>
+            </a:r>
+          </a:p>
+          <a:p>
+            <a:pPr algn="l">
+              <a:spcAft>
+                <a:spcPts val="675"/>
+              </a:spcAft>
+            </a:pPr>
+            <a:r>
+              <a:rPr sz="1500" b="0" i="0">
+                <a:solidFill>
+                  <a:srgbClr val="1C1B19"/>
+                </a:solidFill>
+                <a:latin typeface="Source Serif 4"/>
+              </a:rPr>
+              <a:t>The student page link (last slide) to share after advisory</a:t>
+            </a:r>
+          </a:p>
+        </p:txBody>
+      </p:sp>
+      <p:sp>
+        <p:nvSpPr>
+          <p:cNvPr id="7" name="TextBox 6"/>
+          <p:cNvSpPr txBox="1"/>
+          <p:nvPr/>
+        </p:nvSpPr>
+        <p:spPr>
+          <a:xfrm>
+            <a:off x="6126480" y="1828800"/>
+            <a:ext cx="5486400" cy="4389120"/>
+          </a:xfrm>
+          <a:prstGeom prst="rect">
+            <a:avLst/>
+          </a:prstGeom>
+          <a:noFill/>
+        </p:spPr>
+        <p:txBody>
+          <a:bodyPr wrap="square" anchor="t" lIns="0" rIns="0" tIns="0" bIns="0">
+            <a:spAutoFit/>
+          </a:bodyPr>
+          <a:lstStyle/>
+          <a:p>
+            <a:pPr algn="l">
+              <a:spcAft>
+                <a:spcPts val="630"/>
+              </a:spcAft>
+            </a:pPr>
+            <a:r>
+              <a:rPr sz="1100" b="1" i="0">
+                <a:solidFill>
+                  <a:srgbClr val="0B2D5B"/>
+                </a:solidFill>
+                <a:latin typeface="Inter Tight"/>
+              </a:rPr>
+              <a:t>FLOW</a:t>
+            </a:r>
+          </a:p>
+          <a:p>
+            <a:pPr algn="l">
+              <a:spcAft>
+                <a:spcPts val="630"/>
+              </a:spcAft>
+            </a:pPr>
+            <a:r>
+              <a:rPr sz="1300" b="1" i="0">
+                <a:solidFill>
+                  <a:srgbClr val="F47B20"/>
+                </a:solidFill>
+                <a:latin typeface="Inter Tight"/>
+              </a:rPr>
+              <a:t>3 min   </a:t>
+            </a:r>
+            <a:r>
+              <a:rPr sz="1400" b="0" i="0">
+                <a:solidFill>
+                  <a:srgbClr val="1C1B19"/>
+                </a:solidFill>
+                <a:latin typeface="Source Serif 4"/>
+              </a:rPr>
+              <a:t>Four corners: "Know who you are by graduation"</a:t>
+            </a:r>
+          </a:p>
+          <a:p>
+            <a:pPr algn="l">
+              <a:spcAft>
+                <a:spcPts val="630"/>
+              </a:spcAft>
+            </a:pPr>
+            <a:r>
+              <a:rPr sz="1300" b="1" i="0">
+                <a:solidFill>
+                  <a:srgbClr val="F47B20"/>
+                </a:solidFill>
+                <a:latin typeface="Inter Tight"/>
+              </a:rPr>
+              <a:t>4 min   </a:t>
+            </a:r>
+            <a:r>
+              <a:rPr sz="1400" b="0" i="0">
+                <a:solidFill>
+                  <a:srgbClr val="1C1B19"/>
+                </a:solidFill>
+                <a:latin typeface="Source Serif 4"/>
+              </a:rPr>
+              <a:t>Explore, then commit</a:t>
+            </a:r>
+          </a:p>
+          <a:p>
+            <a:pPr algn="l">
+              <a:spcAft>
+                <a:spcPts val="630"/>
+              </a:spcAft>
+            </a:pPr>
+            <a:r>
+              <a:rPr sz="1300" b="1" i="0">
+                <a:solidFill>
+                  <a:srgbClr val="F47B20"/>
+                </a:solidFill>
+                <a:latin typeface="Inter Tight"/>
+              </a:rPr>
+              <a:t>3 min   </a:t>
+            </a:r>
+            <a:r>
+              <a:rPr sz="1400" b="0" i="0">
+                <a:solidFill>
+                  <a:srgbClr val="1C1B19"/>
+                </a:solidFill>
+                <a:latin typeface="Source Serif 4"/>
+              </a:rPr>
+              <a:t>The pieces of you (private reflection)</a:t>
+            </a:r>
+          </a:p>
+          <a:p>
+            <a:pPr algn="l">
+              <a:spcAft>
+                <a:spcPts val="630"/>
+              </a:spcAft>
+            </a:pPr>
+            <a:r>
+              <a:rPr sz="1300" b="1" i="0">
+                <a:solidFill>
+                  <a:srgbClr val="F47B20"/>
+                </a:solidFill>
+                <a:latin typeface="Inter Tight"/>
+              </a:rPr>
+              <a:t>3 min   </a:t>
+            </a:r>
+            <a:r>
+              <a:rPr sz="1400" b="0" i="0">
+                <a:solidFill>
+                  <a:srgbClr val="1C1B19"/>
+                </a:solidFill>
+                <a:latin typeface="Source Serif 4"/>
+              </a:rPr>
+              <a:t>Four corners: "Adults expect to change a lot"</a:t>
+            </a:r>
+          </a:p>
+          <a:p>
+            <a:pPr algn="l">
+              <a:spcAft>
+                <a:spcPts val="630"/>
+              </a:spcAft>
+            </a:pPr>
+            <a:r>
+              <a:rPr sz="1300" b="1" i="0">
+                <a:solidFill>
+                  <a:srgbClr val="F47B20"/>
+                </a:solidFill>
+                <a:latin typeface="Inter Tight"/>
+              </a:rPr>
+              <a:t>5 min   </a:t>
+            </a:r>
+            <a:r>
+              <a:rPr sz="1400" b="0" i="0">
+                <a:solidFill>
+                  <a:srgbClr val="1C1B19"/>
+                </a:solidFill>
+                <a:latin typeface="Source Serif 4"/>
+              </a:rPr>
+              <a:t>Three moments (scenario talk)</a:t>
+            </a:r>
+          </a:p>
+          <a:p>
+            <a:pPr algn="l">
+              <a:spcAft>
+                <a:spcPts val="630"/>
+              </a:spcAft>
+            </a:pPr>
+            <a:r>
+              <a:rPr sz="1300" b="1" i="0">
+                <a:solidFill>
+                  <a:srgbClr val="F47B20"/>
+                </a:solidFill>
+                <a:latin typeface="Inter Tight"/>
+              </a:rPr>
+              <a:t>2 min   </a:t>
+            </a:r>
+            <a:r>
+              <a:rPr sz="1400" b="0" i="0">
+                <a:solidFill>
+                  <a:srgbClr val="1C1B19"/>
+                </a:solidFill>
+                <a:latin typeface="Source Serif 4"/>
+              </a:rPr>
+              <a:t>One experiment, and the student page link</a:t>
+            </a:r>
+          </a:p>
+          <a:p>
+            <a:pPr algn="l">
+              <a:spcAft>
+                <a:spcPts val="630"/>
+              </a:spcAft>
+            </a:pPr>
+            <a:r>
+              <a:rPr sz="1400" b="0" i="0">
+                <a:solidFill>
+                  <a:srgbClr val="1C1B19"/>
+                </a:solidFill>
+                <a:latin typeface="Source Serif 4"/>
+              </a:rPr>
+              <a:t/>
+            </a:r>
+          </a:p>
+          <a:p>
+            <a:pPr algn="l">
+              <a:spcAft>
+                <a:spcPts val="630"/>
+              </a:spcAft>
+            </a:pPr>
+            <a:r>
+              <a:rPr sz="1100" b="1" i="0">
+                <a:solidFill>
+                  <a:srgbClr val="0B2D5B"/>
+                </a:solidFill>
+                <a:latin typeface="Inter Tight"/>
+              </a:rPr>
+              <a:t>SHORT ON TIME (10-MINUTE CHECK-IN)</a:t>
+            </a:r>
+          </a:p>
+          <a:p>
+            <a:pPr algn="l">
+              <a:spcAft>
+                <a:spcPts val="630"/>
+              </a:spcAft>
+            </a:pPr>
+            <a:r>
+              <a:rPr sz="1400" b="0" i="0">
+                <a:solidFill>
+                  <a:srgbClr val="1C1B19"/>
+                </a:solidFill>
+                <a:latin typeface="Source Serif 4"/>
+              </a:rPr>
+              <a:t>Four corners on graduation (3), explore then commit (3), the pieces of you, private (2), one experiment and the link (2).</a:t>
             </a:r>
           </a:p>
         </p:txBody>

--- a/decks/under-construction-lesson-v2.pptx
+++ b/decks/under-construction-lesson-v2.pptx
@@ -6033,6 +6033,45 @@
                 <a:latin typeface="Inter Tight"/>
               </a:rPr>
               <a:t>Beaver Upper School · Counseling</a:t>
+            </a:r>
+          </a:p>
+        </p:txBody>
+      </p:sp>
+      <p:sp>
+        <p:nvSpPr>
+          <p:cNvPr id="8" name="TextBox 7"/>
+          <p:cNvSpPr txBox="1"/>
+          <p:nvPr/>
+        </p:nvSpPr>
+        <p:spPr>
+          <a:xfrm>
+            <a:off x="6766560" y="5897880"/>
+            <a:ext cx="4846320" cy="640080"/>
+          </a:xfrm>
+          <a:prstGeom prst="rect">
+            <a:avLst/>
+          </a:prstGeom>
+          <a:noFill/>
+        </p:spPr>
+        <p:txBody>
+          <a:bodyPr wrap="square" anchor="t" lIns="0" rIns="0" tIns="0" bIns="0">
+            <a:spAutoFit/>
+          </a:bodyPr>
+          <a:lstStyle/>
+          <a:p>
+            <a:pPr algn="r">
+              <a:spcAft>
+                <a:spcPts val="495"/>
+              </a:spcAft>
+            </a:pPr>
+            <a:r>
+              <a:rPr sz="1100" b="0" i="0">
+                <a:solidFill>
+                  <a:srgbClr val="E8E4DA"/>
+                </a:solidFill>
+                <a:latin typeface="Inter Tight"/>
+              </a:rPr>
+              <a:t>Written by Dr. Rick Wilson, with AI-assisted drafting. Every lesson is reviewed and edited by Dr. Wilson.</a:t>
             </a:r>
           </a:p>
         </p:txBody>
